--- a/fig/chapter3/WPAT特征学习模块.pptx
+++ b/fig/chapter3/WPAT特征学习模块.pptx
@@ -197,7 +197,7 @@
           <a:p>
             <a:fld id="{DA9B18FC-D10D-4773-AA85-C7CEEE2E732B}" type="datetimeFigureOut">
               <a:rPr lang="zh-CN" altLang="en-US" smtClean="0"/>
-              <a:t>2026/3/17</a:t>
+              <a:t>2026/3/19</a:t>
             </a:fld>
             <a:endParaRPr lang="zh-CN" altLang="en-US"/>
           </a:p>
@@ -684,7 +684,7 @@
           <a:p>
             <a:fld id="{6363147F-8724-418E-AD29-6EDD2EA32218}" type="datetimeFigureOut">
               <a:rPr lang="zh-CN" altLang="en-US" smtClean="0"/>
-              <a:t>2026/3/17</a:t>
+              <a:t>2026/3/19</a:t>
             </a:fld>
             <a:endParaRPr lang="zh-CN" altLang="en-US"/>
           </a:p>
@@ -854,7 +854,7 @@
           <a:p>
             <a:fld id="{6363147F-8724-418E-AD29-6EDD2EA32218}" type="datetimeFigureOut">
               <a:rPr lang="zh-CN" altLang="en-US" smtClean="0"/>
-              <a:t>2026/3/17</a:t>
+              <a:t>2026/3/19</a:t>
             </a:fld>
             <a:endParaRPr lang="zh-CN" altLang="en-US"/>
           </a:p>
@@ -1034,7 +1034,7 @@
           <a:p>
             <a:fld id="{6363147F-8724-418E-AD29-6EDD2EA32218}" type="datetimeFigureOut">
               <a:rPr lang="zh-CN" altLang="en-US" smtClean="0"/>
-              <a:t>2026/3/17</a:t>
+              <a:t>2026/3/19</a:t>
             </a:fld>
             <a:endParaRPr lang="zh-CN" altLang="en-US"/>
           </a:p>
@@ -1204,7 +1204,7 @@
           <a:p>
             <a:fld id="{6363147F-8724-418E-AD29-6EDD2EA32218}" type="datetimeFigureOut">
               <a:rPr lang="zh-CN" altLang="en-US" smtClean="0"/>
-              <a:t>2026/3/17</a:t>
+              <a:t>2026/3/19</a:t>
             </a:fld>
             <a:endParaRPr lang="zh-CN" altLang="en-US"/>
           </a:p>
@@ -1450,7 +1450,7 @@
           <a:p>
             <a:fld id="{6363147F-8724-418E-AD29-6EDD2EA32218}" type="datetimeFigureOut">
               <a:rPr lang="zh-CN" altLang="en-US" smtClean="0"/>
-              <a:t>2026/3/17</a:t>
+              <a:t>2026/3/19</a:t>
             </a:fld>
             <a:endParaRPr lang="zh-CN" altLang="en-US"/>
           </a:p>
@@ -1682,7 +1682,7 @@
           <a:p>
             <a:fld id="{6363147F-8724-418E-AD29-6EDD2EA32218}" type="datetimeFigureOut">
               <a:rPr lang="zh-CN" altLang="en-US" smtClean="0"/>
-              <a:t>2026/3/17</a:t>
+              <a:t>2026/3/19</a:t>
             </a:fld>
             <a:endParaRPr lang="zh-CN" altLang="en-US"/>
           </a:p>
@@ -2049,7 +2049,7 @@
           <a:p>
             <a:fld id="{6363147F-8724-418E-AD29-6EDD2EA32218}" type="datetimeFigureOut">
               <a:rPr lang="zh-CN" altLang="en-US" smtClean="0"/>
-              <a:t>2026/3/17</a:t>
+              <a:t>2026/3/19</a:t>
             </a:fld>
             <a:endParaRPr lang="zh-CN" altLang="en-US"/>
           </a:p>
@@ -2167,7 +2167,7 @@
           <a:p>
             <a:fld id="{6363147F-8724-418E-AD29-6EDD2EA32218}" type="datetimeFigureOut">
               <a:rPr lang="zh-CN" altLang="en-US" smtClean="0"/>
-              <a:t>2026/3/17</a:t>
+              <a:t>2026/3/19</a:t>
             </a:fld>
             <a:endParaRPr lang="zh-CN" altLang="en-US"/>
           </a:p>
@@ -2262,7 +2262,7 @@
           <a:p>
             <a:fld id="{6363147F-8724-418E-AD29-6EDD2EA32218}" type="datetimeFigureOut">
               <a:rPr lang="zh-CN" altLang="en-US" smtClean="0"/>
-              <a:t>2026/3/17</a:t>
+              <a:t>2026/3/19</a:t>
             </a:fld>
             <a:endParaRPr lang="zh-CN" altLang="en-US"/>
           </a:p>
@@ -2539,7 +2539,7 @@
           <a:p>
             <a:fld id="{6363147F-8724-418E-AD29-6EDD2EA32218}" type="datetimeFigureOut">
               <a:rPr lang="zh-CN" altLang="en-US" smtClean="0"/>
-              <a:t>2026/3/17</a:t>
+              <a:t>2026/3/19</a:t>
             </a:fld>
             <a:endParaRPr lang="zh-CN" altLang="en-US"/>
           </a:p>
@@ -2796,7 +2796,7 @@
           <a:p>
             <a:fld id="{6363147F-8724-418E-AD29-6EDD2EA32218}" type="datetimeFigureOut">
               <a:rPr lang="zh-CN" altLang="en-US" smtClean="0"/>
-              <a:t>2026/3/17</a:t>
+              <a:t>2026/3/19</a:t>
             </a:fld>
             <a:endParaRPr lang="zh-CN" altLang="en-US"/>
           </a:p>
@@ -3009,7 +3009,7 @@
           <a:p>
             <a:fld id="{6363147F-8724-418E-AD29-6EDD2EA32218}" type="datetimeFigureOut">
               <a:rPr lang="zh-CN" altLang="en-US" smtClean="0"/>
-              <a:t>2026/3/17</a:t>
+              <a:t>2026/3/19</a:t>
             </a:fld>
             <a:endParaRPr lang="zh-CN" altLang="en-US"/>
           </a:p>
@@ -3414,8 +3414,8 @@
           <a:chExt cx="0" cy="0"/>
         </a:xfrm>
       </p:grpSpPr>
-      <mc:AlternateContent xmlns:mc="http://schemas.openxmlformats.org/markup-compatibility/2006">
-        <mc:Choice xmlns:a14="http://schemas.microsoft.com/office/drawing/2010/main" Requires="a14">
+      <mc:AlternateContent xmlns:mc="http://schemas.openxmlformats.org/markup-compatibility/2006" xmlns:a14="http://schemas.microsoft.com/office/drawing/2010/main">
+        <mc:Choice Requires="a14">
           <p:sp>
             <p:nvSpPr>
               <p:cNvPr id="124" name="文本框 123">
@@ -3594,7 +3594,7 @@
             </p:txBody>
           </p:sp>
         </mc:Choice>
-        <mc:Fallback>
+        <mc:Fallback xmlns="">
           <p:sp>
             <p:nvSpPr>
               <p:cNvPr id="124" name="文本框 123">
@@ -3733,174 +3733,153 @@
           </a:prstGeom>
         </p:spPr>
       </p:pic>
-      <p:grpSp>
-        <p:nvGrpSpPr>
-          <p:cNvPr id="20" name="组合 19">
+      <p:sp>
+        <p:nvSpPr>
+          <p:cNvPr id="14" name="矩形: 圆角 13">
             <a:extLst>
               <a:ext uri="{FF2B5EF4-FFF2-40B4-BE49-F238E27FC236}">
-                <a16:creationId xmlns:a16="http://schemas.microsoft.com/office/drawing/2014/main" id="{447E7CBD-1B8F-47CA-92A2-5B3D14942FCD}"/>
+                <a16:creationId xmlns:a16="http://schemas.microsoft.com/office/drawing/2014/main" id="{0678065A-D1B3-47ED-BF36-B3B1220C54C4}"/>
               </a:ext>
             </a:extLst>
           </p:cNvPr>
-          <p:cNvGrpSpPr/>
+          <p:cNvSpPr/>
           <p:nvPr/>
-        </p:nvGrpSpPr>
-        <p:grpSpPr>
+        </p:nvSpPr>
+        <p:spPr>
           <a:xfrm>
             <a:off x="3652038" y="943568"/>
-            <a:ext cx="1982935" cy="2304042"/>
-            <a:chOff x="4965700" y="1549400"/>
-            <a:chExt cx="2031998" cy="2597150"/>
-          </a:xfrm>
-        </p:grpSpPr>
-        <p:sp>
-          <p:nvSpPr>
-            <p:cNvPr id="14" name="矩形: 圆角 13">
-              <a:extLst>
-                <a:ext uri="{FF2B5EF4-FFF2-40B4-BE49-F238E27FC236}">
-                  <a16:creationId xmlns:a16="http://schemas.microsoft.com/office/drawing/2014/main" id="{0678065A-D1B3-47ED-BF36-B3B1220C54C4}"/>
-                </a:ext>
-              </a:extLst>
-            </p:cNvPr>
-            <p:cNvSpPr/>
-            <p:nvPr/>
-          </p:nvSpPr>
-          <p:spPr>
-            <a:xfrm>
-              <a:off x="4965700" y="1549400"/>
-              <a:ext cx="1943100" cy="2482850"/>
-            </a:xfrm>
-            <a:prstGeom prst="roundRect">
-              <a:avLst/>
-            </a:prstGeom>
-            <a:solidFill>
-              <a:srgbClr val="EEEEEE"/>
-            </a:solidFill>
-          </p:spPr>
-          <p:style>
-            <a:lnRef idx="2">
-              <a:schemeClr val="accent3">
-                <a:shade val="50000"/>
-              </a:schemeClr>
-            </a:lnRef>
-            <a:fillRef idx="1">
-              <a:schemeClr val="accent3"/>
-            </a:fillRef>
-            <a:effectRef idx="0">
-              <a:schemeClr val="accent3"/>
-            </a:effectRef>
-            <a:fontRef idx="minor">
-              <a:schemeClr val="lt1"/>
-            </a:fontRef>
-          </p:style>
-          <p:txBody>
-            <a:bodyPr rtlCol="0" anchor="ctr"/>
-            <a:lstStyle/>
-            <a:p>
-              <a:pPr algn="ctr"/>
-              <a:endParaRPr lang="zh-CN" altLang="en-US" sz="2019"/>
-            </a:p>
-          </p:txBody>
-        </p:sp>
-        <p:sp>
-          <p:nvSpPr>
-            <p:cNvPr id="17" name="矩形: 圆角 16">
-              <a:extLst>
-                <a:ext uri="{FF2B5EF4-FFF2-40B4-BE49-F238E27FC236}">
-                  <a16:creationId xmlns:a16="http://schemas.microsoft.com/office/drawing/2014/main" id="{593AA81A-7F90-4652-AFF6-053D19DD4F64}"/>
-                </a:ext>
-              </a:extLst>
-            </p:cNvPr>
-            <p:cNvSpPr/>
-            <p:nvPr/>
-          </p:nvSpPr>
-          <p:spPr>
-            <a:xfrm>
-              <a:off x="5010149" y="1606550"/>
-              <a:ext cx="1943100" cy="2482850"/>
-            </a:xfrm>
-            <a:prstGeom prst="roundRect">
-              <a:avLst/>
-            </a:prstGeom>
-            <a:solidFill>
-              <a:srgbClr val="EEEEEE"/>
-            </a:solidFill>
-          </p:spPr>
-          <p:style>
-            <a:lnRef idx="2">
-              <a:schemeClr val="accent3">
-                <a:shade val="50000"/>
-              </a:schemeClr>
-            </a:lnRef>
-            <a:fillRef idx="1">
-              <a:schemeClr val="accent3"/>
-            </a:fillRef>
-            <a:effectRef idx="0">
-              <a:schemeClr val="accent3"/>
-            </a:effectRef>
-            <a:fontRef idx="minor">
-              <a:schemeClr val="lt1"/>
-            </a:fontRef>
-          </p:style>
-          <p:txBody>
-            <a:bodyPr rtlCol="0" anchor="ctr"/>
-            <a:lstStyle/>
-            <a:p>
-              <a:pPr algn="ctr"/>
-              <a:endParaRPr lang="zh-CN" altLang="en-US" sz="2019"/>
-            </a:p>
-          </p:txBody>
-        </p:sp>
-        <p:sp>
-          <p:nvSpPr>
-            <p:cNvPr id="19" name="矩形: 圆角 18">
-              <a:extLst>
-                <a:ext uri="{FF2B5EF4-FFF2-40B4-BE49-F238E27FC236}">
-                  <a16:creationId xmlns:a16="http://schemas.microsoft.com/office/drawing/2014/main" id="{C2323128-3B0F-4649-A7E3-BD3CE4ECB6A4}"/>
-                </a:ext>
-              </a:extLst>
-            </p:cNvPr>
-            <p:cNvSpPr/>
-            <p:nvPr/>
-          </p:nvSpPr>
-          <p:spPr>
-            <a:xfrm>
-              <a:off x="5054598" y="1663700"/>
-              <a:ext cx="1943100" cy="2482850"/>
-            </a:xfrm>
-            <a:prstGeom prst="roundRect">
-              <a:avLst/>
-            </a:prstGeom>
-            <a:solidFill>
-              <a:srgbClr val="EEEEEE"/>
-            </a:solidFill>
-          </p:spPr>
-          <p:style>
-            <a:lnRef idx="2">
-              <a:schemeClr val="accent3">
-                <a:shade val="50000"/>
-              </a:schemeClr>
-            </a:lnRef>
-            <a:fillRef idx="1">
-              <a:schemeClr val="accent3"/>
-            </a:fillRef>
-            <a:effectRef idx="0">
-              <a:schemeClr val="accent3"/>
-            </a:effectRef>
-            <a:fontRef idx="minor">
-              <a:schemeClr val="lt1"/>
-            </a:fontRef>
-          </p:style>
-          <p:txBody>
-            <a:bodyPr rtlCol="0" anchor="ctr"/>
-            <a:lstStyle/>
-            <a:p>
-              <a:pPr algn="ctr"/>
-              <a:endParaRPr lang="zh-CN" altLang="en-US" sz="2019"/>
-            </a:p>
-          </p:txBody>
-        </p:sp>
-      </p:grpSp>
+            <a:ext cx="1896183" cy="2202642"/>
+          </a:xfrm>
+          <a:prstGeom prst="roundRect">
+            <a:avLst/>
+          </a:prstGeom>
+          <a:solidFill>
+            <a:srgbClr val="EEEEEE"/>
+          </a:solidFill>
+        </p:spPr>
+        <p:style>
+          <a:lnRef idx="2">
+            <a:schemeClr val="accent3">
+              <a:shade val="50000"/>
+            </a:schemeClr>
+          </a:lnRef>
+          <a:fillRef idx="1">
+            <a:schemeClr val="accent3"/>
+          </a:fillRef>
+          <a:effectRef idx="0">
+            <a:schemeClr val="accent3"/>
+          </a:effectRef>
+          <a:fontRef idx="minor">
+            <a:schemeClr val="lt1"/>
+          </a:fontRef>
+        </p:style>
+        <p:txBody>
+          <a:bodyPr rtlCol="0" anchor="ctr"/>
+          <a:lstStyle/>
+          <a:p>
+            <a:pPr algn="ctr"/>
+            <a:endParaRPr lang="zh-CN" altLang="en-US" sz="2019"/>
+          </a:p>
+        </p:txBody>
+      </p:sp>
+      <p:sp>
+        <p:nvSpPr>
+          <p:cNvPr id="17" name="矩形: 圆角 16">
+            <a:extLst>
+              <a:ext uri="{FF2B5EF4-FFF2-40B4-BE49-F238E27FC236}">
+                <a16:creationId xmlns:a16="http://schemas.microsoft.com/office/drawing/2014/main" id="{593AA81A-7F90-4652-AFF6-053D19DD4F64}"/>
+              </a:ext>
+            </a:extLst>
+          </p:cNvPr>
+          <p:cNvSpPr/>
+          <p:nvPr/>
+        </p:nvSpPr>
+        <p:spPr>
+          <a:xfrm>
+            <a:off x="3695414" y="994268"/>
+            <a:ext cx="1896183" cy="2202642"/>
+          </a:xfrm>
+          <a:prstGeom prst="roundRect">
+            <a:avLst/>
+          </a:prstGeom>
+          <a:solidFill>
+            <a:srgbClr val="EEEEEE"/>
+          </a:solidFill>
+        </p:spPr>
+        <p:style>
+          <a:lnRef idx="2">
+            <a:schemeClr val="accent3">
+              <a:shade val="50000"/>
+            </a:schemeClr>
+          </a:lnRef>
+          <a:fillRef idx="1">
+            <a:schemeClr val="accent3"/>
+          </a:fillRef>
+          <a:effectRef idx="0">
+            <a:schemeClr val="accent3"/>
+          </a:effectRef>
+          <a:fontRef idx="minor">
+            <a:schemeClr val="lt1"/>
+          </a:fontRef>
+        </p:style>
+        <p:txBody>
+          <a:bodyPr rtlCol="0" anchor="ctr"/>
+          <a:lstStyle/>
+          <a:p>
+            <a:pPr algn="ctr"/>
+            <a:endParaRPr lang="zh-CN" altLang="en-US" sz="2019"/>
+          </a:p>
+        </p:txBody>
+      </p:sp>
+      <p:sp>
+        <p:nvSpPr>
+          <p:cNvPr id="19" name="矩形: 圆角 18">
+            <a:extLst>
+              <a:ext uri="{FF2B5EF4-FFF2-40B4-BE49-F238E27FC236}">
+                <a16:creationId xmlns:a16="http://schemas.microsoft.com/office/drawing/2014/main" id="{C2323128-3B0F-4649-A7E3-BD3CE4ECB6A4}"/>
+              </a:ext>
+            </a:extLst>
+          </p:cNvPr>
+          <p:cNvSpPr/>
+          <p:nvPr/>
+        </p:nvSpPr>
+        <p:spPr>
+          <a:xfrm>
+            <a:off x="3738790" y="1044968"/>
+            <a:ext cx="1896183" cy="2202642"/>
+          </a:xfrm>
+          <a:prstGeom prst="roundRect">
+            <a:avLst/>
+          </a:prstGeom>
+          <a:solidFill>
+            <a:srgbClr val="EEEEEE"/>
+          </a:solidFill>
+        </p:spPr>
+        <p:style>
+          <a:lnRef idx="2">
+            <a:schemeClr val="accent3">
+              <a:shade val="50000"/>
+            </a:schemeClr>
+          </a:lnRef>
+          <a:fillRef idx="1">
+            <a:schemeClr val="accent3"/>
+          </a:fillRef>
+          <a:effectRef idx="0">
+            <a:schemeClr val="accent3"/>
+          </a:effectRef>
+          <a:fontRef idx="minor">
+            <a:schemeClr val="lt1"/>
+          </a:fontRef>
+        </p:style>
+        <p:txBody>
+          <a:bodyPr rtlCol="0" anchor="ctr"/>
+          <a:lstStyle/>
+          <a:p>
+            <a:pPr algn="ctr"/>
+            <a:endParaRPr lang="zh-CN" altLang="en-US" sz="2019"/>
+          </a:p>
+        </p:txBody>
+      </p:sp>
       <p:cxnSp>
         <p:nvCxnSpPr>
           <p:cNvPr id="22" name="直接箭头连接符 21">
@@ -4345,8 +4324,8 @@
           </a:fontRef>
         </p:style>
       </p:cxnSp>
-      <mc:AlternateContent xmlns:mc="http://schemas.openxmlformats.org/markup-compatibility/2006">
-        <mc:Choice xmlns:a14="http://schemas.microsoft.com/office/drawing/2010/main" Requires="a14">
+      <mc:AlternateContent xmlns:mc="http://schemas.openxmlformats.org/markup-compatibility/2006" xmlns:a14="http://schemas.microsoft.com/office/drawing/2010/main">
+        <mc:Choice Requires="a14">
           <p:sp>
             <p:nvSpPr>
               <p:cNvPr id="256" name="文本框 255">
@@ -4417,7 +4396,7 @@
             </p:txBody>
           </p:sp>
         </mc:Choice>
-        <mc:Fallback>
+        <mc:Fallback xmlns="">
           <p:sp>
             <p:nvSpPr>
               <p:cNvPr id="256" name="文本框 255">
@@ -4505,12 +4484,924 @@
           </a:p>
         </p:txBody>
       </p:sp>
+      <p:sp>
+        <p:nvSpPr>
+          <p:cNvPr id="35" name="矩形: 圆角 34">
+            <a:extLst>
+              <a:ext uri="{FF2B5EF4-FFF2-40B4-BE49-F238E27FC236}">
+                <a16:creationId xmlns:a16="http://schemas.microsoft.com/office/drawing/2014/main" id="{A39DC109-C05C-41BA-8095-87F01261CE58}"/>
+              </a:ext>
+            </a:extLst>
+          </p:cNvPr>
+          <p:cNvSpPr/>
+          <p:nvPr/>
+        </p:nvSpPr>
+        <p:spPr>
+          <a:xfrm>
+            <a:off x="6073237" y="1076393"/>
+            <a:ext cx="5696108" cy="2693984"/>
+          </a:xfrm>
+          <a:prstGeom prst="roundRect">
+            <a:avLst>
+              <a:gd name="adj" fmla="val 13105"/>
+            </a:avLst>
+          </a:prstGeom>
+          <a:noFill/>
+          <a:ln>
+            <a:solidFill>
+              <a:srgbClr val="7F7F7F"/>
+            </a:solidFill>
+            <a:prstDash val="dash"/>
+          </a:ln>
+        </p:spPr>
+        <p:style>
+          <a:lnRef idx="2">
+            <a:schemeClr val="accent1">
+              <a:shade val="50000"/>
+            </a:schemeClr>
+          </a:lnRef>
+          <a:fillRef idx="1">
+            <a:schemeClr val="accent1"/>
+          </a:fillRef>
+          <a:effectRef idx="0">
+            <a:schemeClr val="accent1"/>
+          </a:effectRef>
+          <a:fontRef idx="minor">
+            <a:schemeClr val="lt1"/>
+          </a:fontRef>
+        </p:style>
+        <p:txBody>
+          <a:bodyPr rtlCol="0" anchor="ctr"/>
+          <a:lstStyle/>
+          <a:p>
+            <a:pPr algn="ctr"/>
+            <a:endParaRPr lang="zh-CN" altLang="en-US" sz="2019"/>
+          </a:p>
+        </p:txBody>
+      </p:sp>
+      <p:sp>
+        <p:nvSpPr>
+          <p:cNvPr id="44" name="文本框 43">
+            <a:extLst>
+              <a:ext uri="{FF2B5EF4-FFF2-40B4-BE49-F238E27FC236}">
+                <a16:creationId xmlns:a16="http://schemas.microsoft.com/office/drawing/2014/main" id="{0A195017-3FC9-4898-8B14-F8559D0FAFA4}"/>
+              </a:ext>
+            </a:extLst>
+          </p:cNvPr>
+          <p:cNvSpPr txBox="1"/>
+          <p:nvPr/>
+        </p:nvSpPr>
+        <p:spPr>
+          <a:xfrm>
+            <a:off x="5993458" y="3187849"/>
+            <a:ext cx="271228" cy="299441"/>
+          </a:xfrm>
+          <a:prstGeom prst="rect">
+            <a:avLst/>
+          </a:prstGeom>
+          <a:noFill/>
+        </p:spPr>
+        <p:txBody>
+          <a:bodyPr wrap="none" rtlCol="0">
+            <a:spAutoFit/>
+          </a:bodyPr>
+          <a:lstStyle/>
+          <a:p>
+            <a:r>
+              <a:rPr lang="en-US" altLang="zh-CN" sz="1346" dirty="0">
+                <a:latin typeface="宋体" panose="02010600030101010101" pitchFamily="2" charset="-122"/>
+                <a:ea typeface="宋体" panose="02010600030101010101" pitchFamily="2" charset="-122"/>
+              </a:rPr>
+              <a:t>x</a:t>
+            </a:r>
+            <a:endParaRPr lang="zh-CN" altLang="en-US" sz="1346" dirty="0">
+              <a:latin typeface="宋体" panose="02010600030101010101" pitchFamily="2" charset="-122"/>
+              <a:ea typeface="宋体" panose="02010600030101010101" pitchFamily="2" charset="-122"/>
+            </a:endParaRPr>
+          </a:p>
+        </p:txBody>
+      </p:sp>
+      <p:cxnSp>
+        <p:nvCxnSpPr>
+          <p:cNvPr id="49" name="直接箭头连接符 48">
+            <a:extLst>
+              <a:ext uri="{FF2B5EF4-FFF2-40B4-BE49-F238E27FC236}">
+                <a16:creationId xmlns:a16="http://schemas.microsoft.com/office/drawing/2014/main" id="{1FF2D918-7419-4764-977A-2FC5CAEAE1B7}"/>
+              </a:ext>
+            </a:extLst>
+          </p:cNvPr>
+          <p:cNvCxnSpPr>
+            <a:cxnSpLocks/>
+            <a:stCxn id="44" idx="3"/>
+            <a:endCxn id="47" idx="1"/>
+          </p:cNvCxnSpPr>
+          <p:nvPr/>
+        </p:nvCxnSpPr>
+        <p:spPr>
+          <a:xfrm>
+            <a:off x="6264686" y="3337570"/>
+            <a:ext cx="33452" cy="31480"/>
+          </a:xfrm>
+          <a:prstGeom prst="straightConnector1">
+            <a:avLst/>
+          </a:prstGeom>
+          <a:ln w="12700">
+            <a:tailEnd type="triangle"/>
+          </a:ln>
+        </p:spPr>
+        <p:style>
+          <a:lnRef idx="1">
+            <a:schemeClr val="dk1"/>
+          </a:lnRef>
+          <a:fillRef idx="0">
+            <a:schemeClr val="dk1"/>
+          </a:fillRef>
+          <a:effectRef idx="0">
+            <a:schemeClr val="dk1"/>
+          </a:effectRef>
+          <a:fontRef idx="minor">
+            <a:schemeClr val="tx1"/>
+          </a:fontRef>
+        </p:style>
+      </p:cxnSp>
+      <p:sp>
+        <p:nvSpPr>
+          <p:cNvPr id="38" name="矩形: 圆角 37">
+            <a:extLst>
+              <a:ext uri="{FF2B5EF4-FFF2-40B4-BE49-F238E27FC236}">
+                <a16:creationId xmlns:a16="http://schemas.microsoft.com/office/drawing/2014/main" id="{4A9E894A-7101-4A7B-A752-B7C5507090FB}"/>
+              </a:ext>
+            </a:extLst>
+          </p:cNvPr>
+          <p:cNvSpPr/>
+          <p:nvPr/>
+        </p:nvSpPr>
+        <p:spPr>
+          <a:xfrm>
+            <a:off x="6443856" y="1157811"/>
+            <a:ext cx="4922492" cy="2204145"/>
+          </a:xfrm>
+          <a:prstGeom prst="roundRect">
+            <a:avLst>
+              <a:gd name="adj" fmla="val 10265"/>
+            </a:avLst>
+          </a:prstGeom>
+          <a:solidFill>
+            <a:srgbClr val="E6E6E6"/>
+          </a:solidFill>
+          <a:ln>
+            <a:solidFill>
+              <a:srgbClr val="787A7D"/>
+            </a:solidFill>
+          </a:ln>
+        </p:spPr>
+        <p:style>
+          <a:lnRef idx="2">
+            <a:schemeClr val="accent1">
+              <a:shade val="50000"/>
+            </a:schemeClr>
+          </a:lnRef>
+          <a:fillRef idx="1">
+            <a:schemeClr val="accent1"/>
+          </a:fillRef>
+          <a:effectRef idx="0">
+            <a:schemeClr val="accent1"/>
+          </a:effectRef>
+          <a:fontRef idx="minor">
+            <a:schemeClr val="lt1"/>
+          </a:fontRef>
+        </p:style>
+        <p:txBody>
+          <a:bodyPr rtlCol="0" anchor="ctr"/>
+          <a:lstStyle/>
+          <a:p>
+            <a:pPr algn="ctr"/>
+            <a:endParaRPr lang="zh-CN" altLang="en-US" sz="2019"/>
+          </a:p>
+        </p:txBody>
+      </p:sp>
+      <p:sp>
+        <p:nvSpPr>
+          <p:cNvPr id="39" name="矩形: 圆角 38">
+            <a:extLst>
+              <a:ext uri="{FF2B5EF4-FFF2-40B4-BE49-F238E27FC236}">
+                <a16:creationId xmlns:a16="http://schemas.microsoft.com/office/drawing/2014/main" id="{2232AD07-8CB8-4EFD-833B-91572DFC2AD0}"/>
+              </a:ext>
+            </a:extLst>
+          </p:cNvPr>
+          <p:cNvSpPr/>
+          <p:nvPr/>
+        </p:nvSpPr>
+        <p:spPr>
+          <a:xfrm>
+            <a:off x="6354170" y="1273057"/>
+            <a:ext cx="4922492" cy="2204145"/>
+          </a:xfrm>
+          <a:prstGeom prst="roundRect">
+            <a:avLst>
+              <a:gd name="adj" fmla="val 8472"/>
+            </a:avLst>
+          </a:prstGeom>
+          <a:solidFill>
+            <a:srgbClr val="E6E6E6"/>
+          </a:solidFill>
+          <a:ln>
+            <a:solidFill>
+              <a:srgbClr val="787A7D"/>
+            </a:solidFill>
+          </a:ln>
+        </p:spPr>
+        <p:style>
+          <a:lnRef idx="2">
+            <a:schemeClr val="accent1">
+              <a:shade val="50000"/>
+            </a:schemeClr>
+          </a:lnRef>
+          <a:fillRef idx="1">
+            <a:schemeClr val="accent1"/>
+          </a:fillRef>
+          <a:effectRef idx="0">
+            <a:schemeClr val="accent1"/>
+          </a:effectRef>
+          <a:fontRef idx="minor">
+            <a:schemeClr val="lt1"/>
+          </a:fontRef>
+        </p:style>
+        <p:txBody>
+          <a:bodyPr rtlCol="0" anchor="ctr"/>
+          <a:lstStyle/>
+          <a:p>
+            <a:pPr algn="ctr"/>
+            <a:endParaRPr lang="zh-CN" altLang="en-US" sz="2019"/>
+          </a:p>
+        </p:txBody>
+      </p:sp>
+      <p:sp>
+        <p:nvSpPr>
+          <p:cNvPr id="40" name="矩形: 圆角 39">
+            <a:extLst>
+              <a:ext uri="{FF2B5EF4-FFF2-40B4-BE49-F238E27FC236}">
+                <a16:creationId xmlns:a16="http://schemas.microsoft.com/office/drawing/2014/main" id="{00C22531-D63B-44AA-BF94-1C2807C8EF56}"/>
+              </a:ext>
+            </a:extLst>
+          </p:cNvPr>
+          <p:cNvSpPr/>
+          <p:nvPr/>
+        </p:nvSpPr>
+        <p:spPr>
+          <a:xfrm>
+            <a:off x="6237753" y="1419185"/>
+            <a:ext cx="4922492" cy="2204145"/>
+          </a:xfrm>
+          <a:prstGeom prst="roundRect">
+            <a:avLst>
+              <a:gd name="adj" fmla="val 7704"/>
+            </a:avLst>
+          </a:prstGeom>
+          <a:solidFill>
+            <a:srgbClr val="E6E6E6"/>
+          </a:solidFill>
+          <a:ln>
+            <a:solidFill>
+              <a:srgbClr val="787A7D"/>
+            </a:solidFill>
+          </a:ln>
+        </p:spPr>
+        <p:style>
+          <a:lnRef idx="2">
+            <a:schemeClr val="accent1">
+              <a:shade val="50000"/>
+            </a:schemeClr>
+          </a:lnRef>
+          <a:fillRef idx="1">
+            <a:schemeClr val="accent1"/>
+          </a:fillRef>
+          <a:effectRef idx="0">
+            <a:schemeClr val="accent1"/>
+          </a:effectRef>
+          <a:fontRef idx="minor">
+            <a:schemeClr val="lt1"/>
+          </a:fontRef>
+        </p:style>
+        <p:txBody>
+          <a:bodyPr rtlCol="0" anchor="ctr"/>
+          <a:lstStyle/>
+          <a:p>
+            <a:pPr algn="ctr"/>
+            <a:endParaRPr lang="zh-CN" altLang="en-US" sz="2019" dirty="0"/>
+          </a:p>
+        </p:txBody>
+      </p:sp>
+      <p:sp>
+        <p:nvSpPr>
+          <p:cNvPr id="47" name="矩形 46">
+            <a:extLst>
+              <a:ext uri="{FF2B5EF4-FFF2-40B4-BE49-F238E27FC236}">
+                <a16:creationId xmlns:a16="http://schemas.microsoft.com/office/drawing/2014/main" id="{46A5A17E-59B5-4AF9-AF18-377E3E56D191}"/>
+              </a:ext>
+            </a:extLst>
+          </p:cNvPr>
+          <p:cNvSpPr/>
+          <p:nvPr/>
+        </p:nvSpPr>
+        <p:spPr>
+          <a:xfrm>
+            <a:off x="6298138" y="3219329"/>
+            <a:ext cx="735584" cy="299441"/>
+          </a:xfrm>
+          <a:prstGeom prst="rect">
+            <a:avLst/>
+          </a:prstGeom>
+          <a:solidFill>
+            <a:schemeClr val="bg1"/>
+          </a:solidFill>
+          <a:ln>
+            <a:solidFill>
+              <a:schemeClr val="tx1"/>
+            </a:solidFill>
+          </a:ln>
+        </p:spPr>
+        <p:style>
+          <a:lnRef idx="2">
+            <a:schemeClr val="accent1">
+              <a:shade val="50000"/>
+            </a:schemeClr>
+          </a:lnRef>
+          <a:fillRef idx="1">
+            <a:schemeClr val="accent1"/>
+          </a:fillRef>
+          <a:effectRef idx="0">
+            <a:schemeClr val="accent1"/>
+          </a:effectRef>
+          <a:fontRef idx="minor">
+            <a:schemeClr val="lt1"/>
+          </a:fontRef>
+        </p:style>
+        <p:txBody>
+          <a:bodyPr rtlCol="0" anchor="ctr"/>
+          <a:lstStyle/>
+          <a:p>
+            <a:pPr algn="ctr"/>
+            <a:r>
+              <a:rPr lang="en-US" altLang="zh-CN" sz="1346" dirty="0">
+                <a:solidFill>
+                  <a:schemeClr val="tx1"/>
+                </a:solidFill>
+                <a:latin typeface="宋体" panose="02010600030101010101" pitchFamily="2" charset="-122"/>
+                <a:ea typeface="宋体" panose="02010600030101010101" pitchFamily="2" charset="-122"/>
+              </a:rPr>
+              <a:t>Linear</a:t>
+            </a:r>
+            <a:endParaRPr lang="zh-CN" altLang="en-US" sz="1346" dirty="0">
+              <a:solidFill>
+                <a:schemeClr val="tx1"/>
+              </a:solidFill>
+              <a:latin typeface="宋体" panose="02010600030101010101" pitchFamily="2" charset="-122"/>
+              <a:ea typeface="宋体" panose="02010600030101010101" pitchFamily="2" charset="-122"/>
+            </a:endParaRPr>
+          </a:p>
+        </p:txBody>
+      </p:sp>
+      <p:sp>
+        <p:nvSpPr>
+          <p:cNvPr id="52" name="矩形 51">
+            <a:extLst>
+              <a:ext uri="{FF2B5EF4-FFF2-40B4-BE49-F238E27FC236}">
+                <a16:creationId xmlns:a16="http://schemas.microsoft.com/office/drawing/2014/main" id="{6F500114-770B-44FA-AFD9-C5647288D911}"/>
+              </a:ext>
+            </a:extLst>
+          </p:cNvPr>
+          <p:cNvSpPr/>
+          <p:nvPr/>
+        </p:nvSpPr>
+        <p:spPr>
+          <a:xfrm>
+            <a:off x="7269046" y="2313303"/>
+            <a:ext cx="245915" cy="285421"/>
+          </a:xfrm>
+          <a:prstGeom prst="rect">
+            <a:avLst/>
+          </a:prstGeom>
+          <a:solidFill>
+            <a:srgbClr val="CDEB8B"/>
+          </a:solidFill>
+          <a:ln>
+            <a:solidFill>
+              <a:srgbClr val="696A6F"/>
+            </a:solidFill>
+          </a:ln>
+        </p:spPr>
+        <p:style>
+          <a:lnRef idx="2">
+            <a:schemeClr val="accent1">
+              <a:shade val="50000"/>
+            </a:schemeClr>
+          </a:lnRef>
+          <a:fillRef idx="1">
+            <a:schemeClr val="accent1"/>
+          </a:fillRef>
+          <a:effectRef idx="0">
+            <a:schemeClr val="accent1"/>
+          </a:effectRef>
+          <a:fontRef idx="minor">
+            <a:schemeClr val="lt1"/>
+          </a:fontRef>
+        </p:style>
+        <p:txBody>
+          <a:bodyPr rtlCol="0" anchor="ctr"/>
+          <a:lstStyle/>
+          <a:p>
+            <a:pPr algn="ctr"/>
+            <a:r>
+              <a:rPr lang="en-US" altLang="zh-CN" sz="1346" dirty="0">
+                <a:solidFill>
+                  <a:schemeClr val="tx1"/>
+                </a:solidFill>
+                <a:latin typeface="宋体" panose="02010600030101010101" pitchFamily="2" charset="-122"/>
+                <a:ea typeface="宋体" panose="02010600030101010101" pitchFamily="2" charset="-122"/>
+              </a:rPr>
+              <a:t>Q</a:t>
+            </a:r>
+            <a:endParaRPr lang="zh-CN" altLang="en-US" sz="1346" dirty="0">
+              <a:solidFill>
+                <a:schemeClr val="tx1"/>
+              </a:solidFill>
+              <a:latin typeface="宋体" panose="02010600030101010101" pitchFamily="2" charset="-122"/>
+              <a:ea typeface="宋体" panose="02010600030101010101" pitchFamily="2" charset="-122"/>
+            </a:endParaRPr>
+          </a:p>
+        </p:txBody>
+      </p:sp>
+      <p:sp>
+        <p:nvSpPr>
+          <p:cNvPr id="53" name="矩形 52">
+            <a:extLst>
+              <a:ext uri="{FF2B5EF4-FFF2-40B4-BE49-F238E27FC236}">
+                <a16:creationId xmlns:a16="http://schemas.microsoft.com/office/drawing/2014/main" id="{161DCD0B-A9FE-4234-831B-B674DA1B2287}"/>
+              </a:ext>
+            </a:extLst>
+          </p:cNvPr>
+          <p:cNvSpPr/>
+          <p:nvPr/>
+        </p:nvSpPr>
+        <p:spPr>
+          <a:xfrm>
+            <a:off x="7269046" y="2794657"/>
+            <a:ext cx="245915" cy="285421"/>
+          </a:xfrm>
+          <a:prstGeom prst="rect">
+            <a:avLst/>
+          </a:prstGeom>
+          <a:solidFill>
+            <a:srgbClr val="CDEB8B"/>
+          </a:solidFill>
+          <a:ln>
+            <a:solidFill>
+              <a:srgbClr val="696A6F"/>
+            </a:solidFill>
+          </a:ln>
+        </p:spPr>
+        <p:style>
+          <a:lnRef idx="2">
+            <a:schemeClr val="accent1">
+              <a:shade val="50000"/>
+            </a:schemeClr>
+          </a:lnRef>
+          <a:fillRef idx="1">
+            <a:schemeClr val="accent1"/>
+          </a:fillRef>
+          <a:effectRef idx="0">
+            <a:schemeClr val="accent1"/>
+          </a:effectRef>
+          <a:fontRef idx="minor">
+            <a:schemeClr val="lt1"/>
+          </a:fontRef>
+        </p:style>
+        <p:txBody>
+          <a:bodyPr rtlCol="0" anchor="ctr"/>
+          <a:lstStyle/>
+          <a:p>
+            <a:pPr algn="ctr"/>
+            <a:r>
+              <a:rPr lang="en-US" altLang="zh-CN" sz="1346" dirty="0">
+                <a:solidFill>
+                  <a:schemeClr val="tx1"/>
+                </a:solidFill>
+                <a:latin typeface="宋体" panose="02010600030101010101" pitchFamily="2" charset="-122"/>
+                <a:ea typeface="宋体" panose="02010600030101010101" pitchFamily="2" charset="-122"/>
+              </a:rPr>
+              <a:t>K</a:t>
+            </a:r>
+            <a:endParaRPr lang="zh-CN" altLang="en-US" sz="1346" dirty="0">
+              <a:solidFill>
+                <a:schemeClr val="tx1"/>
+              </a:solidFill>
+              <a:latin typeface="宋体" panose="02010600030101010101" pitchFamily="2" charset="-122"/>
+              <a:ea typeface="宋体" panose="02010600030101010101" pitchFamily="2" charset="-122"/>
+            </a:endParaRPr>
+          </a:p>
+        </p:txBody>
+      </p:sp>
+      <p:sp>
+        <p:nvSpPr>
+          <p:cNvPr id="54" name="矩形 53">
+            <a:extLst>
+              <a:ext uri="{FF2B5EF4-FFF2-40B4-BE49-F238E27FC236}">
+                <a16:creationId xmlns:a16="http://schemas.microsoft.com/office/drawing/2014/main" id="{353B08B5-77A6-4C33-A952-DA90E1AEE964}"/>
+              </a:ext>
+            </a:extLst>
+          </p:cNvPr>
+          <p:cNvSpPr/>
+          <p:nvPr/>
+        </p:nvSpPr>
+        <p:spPr>
+          <a:xfrm>
+            <a:off x="7670056" y="3232991"/>
+            <a:ext cx="245915" cy="285421"/>
+          </a:xfrm>
+          <a:prstGeom prst="rect">
+            <a:avLst/>
+          </a:prstGeom>
+          <a:solidFill>
+            <a:srgbClr val="CDEB8B"/>
+          </a:solidFill>
+          <a:ln>
+            <a:solidFill>
+              <a:srgbClr val="696A6F"/>
+            </a:solidFill>
+          </a:ln>
+        </p:spPr>
+        <p:style>
+          <a:lnRef idx="2">
+            <a:schemeClr val="accent1">
+              <a:shade val="50000"/>
+            </a:schemeClr>
+          </a:lnRef>
+          <a:fillRef idx="1">
+            <a:schemeClr val="accent1"/>
+          </a:fillRef>
+          <a:effectRef idx="0">
+            <a:schemeClr val="accent1"/>
+          </a:effectRef>
+          <a:fontRef idx="minor">
+            <a:schemeClr val="lt1"/>
+          </a:fontRef>
+        </p:style>
+        <p:txBody>
+          <a:bodyPr rtlCol="0" anchor="ctr"/>
+          <a:lstStyle/>
+          <a:p>
+            <a:pPr algn="ctr"/>
+            <a:r>
+              <a:rPr lang="en-US" altLang="zh-CN" sz="1346" dirty="0">
+                <a:solidFill>
+                  <a:schemeClr val="tx1"/>
+                </a:solidFill>
+                <a:latin typeface="宋体" panose="02010600030101010101" pitchFamily="2" charset="-122"/>
+                <a:ea typeface="宋体" panose="02010600030101010101" pitchFamily="2" charset="-122"/>
+              </a:rPr>
+              <a:t>V</a:t>
+            </a:r>
+            <a:endParaRPr lang="zh-CN" altLang="en-US" sz="1346" dirty="0">
+              <a:solidFill>
+                <a:schemeClr val="tx1"/>
+              </a:solidFill>
+              <a:latin typeface="宋体" panose="02010600030101010101" pitchFamily="2" charset="-122"/>
+              <a:ea typeface="宋体" panose="02010600030101010101" pitchFamily="2" charset="-122"/>
+            </a:endParaRPr>
+          </a:p>
+        </p:txBody>
+      </p:sp>
+      <p:sp>
+        <p:nvSpPr>
+          <p:cNvPr id="55" name="矩形 54">
+            <a:extLst>
+              <a:ext uri="{FF2B5EF4-FFF2-40B4-BE49-F238E27FC236}">
+                <a16:creationId xmlns:a16="http://schemas.microsoft.com/office/drawing/2014/main" id="{B108B99F-4036-4A19-B721-77AF3FCE8ED3}"/>
+              </a:ext>
+            </a:extLst>
+          </p:cNvPr>
+          <p:cNvSpPr/>
+          <p:nvPr/>
+        </p:nvSpPr>
+        <p:spPr>
+          <a:xfrm>
+            <a:off x="7258893" y="1726631"/>
+            <a:ext cx="245915" cy="285421"/>
+          </a:xfrm>
+          <a:prstGeom prst="rect">
+            <a:avLst/>
+          </a:prstGeom>
+          <a:solidFill>
+            <a:srgbClr val="FFCCCC"/>
+          </a:solidFill>
+          <a:ln>
+            <a:solidFill>
+              <a:srgbClr val="696A6F"/>
+            </a:solidFill>
+          </a:ln>
+        </p:spPr>
+        <p:style>
+          <a:lnRef idx="2">
+            <a:schemeClr val="accent1">
+              <a:shade val="50000"/>
+            </a:schemeClr>
+          </a:lnRef>
+          <a:fillRef idx="1">
+            <a:schemeClr val="accent1"/>
+          </a:fillRef>
+          <a:effectRef idx="0">
+            <a:schemeClr val="accent1"/>
+          </a:effectRef>
+          <a:fontRef idx="minor">
+            <a:schemeClr val="lt1"/>
+          </a:fontRef>
+        </p:style>
+        <p:txBody>
+          <a:bodyPr rtlCol="0" anchor="ctr"/>
+          <a:lstStyle/>
+          <a:p>
+            <a:pPr algn="ctr"/>
+            <a:r>
+              <a:rPr lang="el-GR" altLang="zh-CN" sz="1346" dirty="0">
+                <a:solidFill>
+                  <a:schemeClr val="tx1"/>
+                </a:solidFill>
+                <a:latin typeface="宋体" panose="02010600030101010101" pitchFamily="2" charset="-122"/>
+                <a:ea typeface="宋体" panose="02010600030101010101" pitchFamily="2" charset="-122"/>
+              </a:rPr>
+              <a:t>σ</a:t>
+            </a:r>
+            <a:endParaRPr lang="zh-CN" altLang="en-US" sz="1346" dirty="0">
+              <a:solidFill>
+                <a:schemeClr val="tx1"/>
+              </a:solidFill>
+              <a:latin typeface="宋体" panose="02010600030101010101" pitchFamily="2" charset="-122"/>
+              <a:ea typeface="宋体" panose="02010600030101010101" pitchFamily="2" charset="-122"/>
+            </a:endParaRPr>
+          </a:p>
+        </p:txBody>
+      </p:sp>
+      <p:cxnSp>
+        <p:nvCxnSpPr>
+          <p:cNvPr id="56" name="直接箭头连接符 55">
+            <a:extLst>
+              <a:ext uri="{FF2B5EF4-FFF2-40B4-BE49-F238E27FC236}">
+                <a16:creationId xmlns:a16="http://schemas.microsoft.com/office/drawing/2014/main" id="{ECAFC462-45B8-4EEE-849B-90AB0BEB1303}"/>
+              </a:ext>
+            </a:extLst>
+          </p:cNvPr>
+          <p:cNvCxnSpPr>
+            <a:cxnSpLocks/>
+            <a:stCxn id="47" idx="3"/>
+            <a:endCxn id="54" idx="1"/>
+          </p:cNvCxnSpPr>
+          <p:nvPr/>
+        </p:nvCxnSpPr>
+        <p:spPr>
+          <a:xfrm>
+            <a:off x="7033722" y="3369050"/>
+            <a:ext cx="636334" cy="6652"/>
+          </a:xfrm>
+          <a:prstGeom prst="straightConnector1">
+            <a:avLst/>
+          </a:prstGeom>
+          <a:ln w="12700">
+            <a:tailEnd type="triangle"/>
+          </a:ln>
+        </p:spPr>
+        <p:style>
+          <a:lnRef idx="1">
+            <a:schemeClr val="dk1"/>
+          </a:lnRef>
+          <a:fillRef idx="0">
+            <a:schemeClr val="dk1"/>
+          </a:fillRef>
+          <a:effectRef idx="0">
+            <a:schemeClr val="dk1"/>
+          </a:effectRef>
+          <a:fontRef idx="minor">
+            <a:schemeClr val="tx1"/>
+          </a:fontRef>
+        </p:style>
+      </p:cxnSp>
+      <p:cxnSp>
+        <p:nvCxnSpPr>
+          <p:cNvPr id="58" name="连接符: 肘形 57">
+            <a:extLst>
+              <a:ext uri="{FF2B5EF4-FFF2-40B4-BE49-F238E27FC236}">
+                <a16:creationId xmlns:a16="http://schemas.microsoft.com/office/drawing/2014/main" id="{6C113867-CFF6-4634-9740-5659EB57F279}"/>
+              </a:ext>
+            </a:extLst>
+          </p:cNvPr>
+          <p:cNvCxnSpPr>
+            <a:cxnSpLocks/>
+            <a:stCxn id="47" idx="0"/>
+            <a:endCxn id="55" idx="1"/>
+          </p:cNvCxnSpPr>
+          <p:nvPr/>
+        </p:nvCxnSpPr>
+        <p:spPr>
+          <a:xfrm rot="5400000" flipH="1" flipV="1">
+            <a:off x="6287418" y="2247855"/>
+            <a:ext cx="1349987" cy="592963"/>
+          </a:xfrm>
+          <a:prstGeom prst="bentConnector2">
+            <a:avLst/>
+          </a:prstGeom>
+          <a:ln w="12700">
+            <a:tailEnd type="triangle"/>
+          </a:ln>
+        </p:spPr>
+        <p:style>
+          <a:lnRef idx="1">
+            <a:schemeClr val="dk1"/>
+          </a:lnRef>
+          <a:fillRef idx="0">
+            <a:schemeClr val="dk1"/>
+          </a:fillRef>
+          <a:effectRef idx="0">
+            <a:schemeClr val="dk1"/>
+          </a:effectRef>
+          <a:fontRef idx="minor">
+            <a:schemeClr val="tx1"/>
+          </a:fontRef>
+        </p:style>
+      </p:cxnSp>
+      <p:cxnSp>
+        <p:nvCxnSpPr>
+          <p:cNvPr id="60" name="连接符: 肘形 59">
+            <a:extLst>
+              <a:ext uri="{FF2B5EF4-FFF2-40B4-BE49-F238E27FC236}">
+                <a16:creationId xmlns:a16="http://schemas.microsoft.com/office/drawing/2014/main" id="{6919FD25-64B8-4027-9A9F-D84A8EC89EE4}"/>
+              </a:ext>
+            </a:extLst>
+          </p:cNvPr>
+          <p:cNvCxnSpPr>
+            <a:cxnSpLocks/>
+            <a:stCxn id="47" idx="0"/>
+            <a:endCxn id="52" idx="1"/>
+          </p:cNvCxnSpPr>
+          <p:nvPr/>
+        </p:nvCxnSpPr>
+        <p:spPr>
+          <a:xfrm rot="5400000" flipH="1" flipV="1">
+            <a:off x="6585831" y="2536114"/>
+            <a:ext cx="763315" cy="603116"/>
+          </a:xfrm>
+          <a:prstGeom prst="bentConnector2">
+            <a:avLst/>
+          </a:prstGeom>
+          <a:ln w="12700">
+            <a:tailEnd type="triangle"/>
+          </a:ln>
+        </p:spPr>
+        <p:style>
+          <a:lnRef idx="1">
+            <a:schemeClr val="dk1"/>
+          </a:lnRef>
+          <a:fillRef idx="0">
+            <a:schemeClr val="dk1"/>
+          </a:fillRef>
+          <a:effectRef idx="0">
+            <a:schemeClr val="dk1"/>
+          </a:effectRef>
+          <a:fontRef idx="minor">
+            <a:schemeClr val="tx1"/>
+          </a:fontRef>
+        </p:style>
+      </p:cxnSp>
+      <p:cxnSp>
+        <p:nvCxnSpPr>
+          <p:cNvPr id="62" name="连接符: 肘形 61">
+            <a:extLst>
+              <a:ext uri="{FF2B5EF4-FFF2-40B4-BE49-F238E27FC236}">
+                <a16:creationId xmlns:a16="http://schemas.microsoft.com/office/drawing/2014/main" id="{930086E1-4484-4A28-8B8B-32848ED3632C}"/>
+              </a:ext>
+            </a:extLst>
+          </p:cNvPr>
+          <p:cNvCxnSpPr>
+            <a:cxnSpLocks/>
+            <a:stCxn id="47" idx="0"/>
+            <a:endCxn id="53" idx="1"/>
+          </p:cNvCxnSpPr>
+          <p:nvPr/>
+        </p:nvCxnSpPr>
+        <p:spPr>
+          <a:xfrm rot="5400000" flipH="1" flipV="1">
+            <a:off x="6826508" y="2776791"/>
+            <a:ext cx="281961" cy="603116"/>
+          </a:xfrm>
+          <a:prstGeom prst="bentConnector2">
+            <a:avLst/>
+          </a:prstGeom>
+          <a:ln w="12700">
+            <a:tailEnd type="triangle"/>
+          </a:ln>
+        </p:spPr>
+        <p:style>
+          <a:lnRef idx="1">
+            <a:schemeClr val="dk1"/>
+          </a:lnRef>
+          <a:fillRef idx="0">
+            <a:schemeClr val="dk1"/>
+          </a:fillRef>
+          <a:effectRef idx="0">
+            <a:schemeClr val="dk1"/>
+          </a:effectRef>
+          <a:fontRef idx="minor">
+            <a:schemeClr val="tx1"/>
+          </a:fontRef>
+        </p:style>
+      </p:cxnSp>
+      <p:cxnSp>
+        <p:nvCxnSpPr>
+          <p:cNvPr id="63" name="直接箭头连接符 62">
+            <a:extLst>
+              <a:ext uri="{FF2B5EF4-FFF2-40B4-BE49-F238E27FC236}">
+                <a16:creationId xmlns:a16="http://schemas.microsoft.com/office/drawing/2014/main" id="{EB7060DB-F7E8-44D1-B835-AB93B7A3807B}"/>
+              </a:ext>
+            </a:extLst>
+          </p:cNvPr>
+          <p:cNvCxnSpPr>
+            <a:cxnSpLocks/>
+          </p:cNvCxnSpPr>
+          <p:nvPr/>
+        </p:nvCxnSpPr>
+        <p:spPr>
+          <a:xfrm flipV="1">
+            <a:off x="7506651" y="2931420"/>
+            <a:ext cx="367113" cy="10925"/>
+          </a:xfrm>
+          <a:prstGeom prst="straightConnector1">
+            <a:avLst/>
+          </a:prstGeom>
+          <a:ln w="12700">
+            <a:tailEnd type="triangle"/>
+          </a:ln>
+        </p:spPr>
+        <p:style>
+          <a:lnRef idx="1">
+            <a:schemeClr val="dk1"/>
+          </a:lnRef>
+          <a:fillRef idx="0">
+            <a:schemeClr val="dk1"/>
+          </a:fillRef>
+          <a:effectRef idx="0">
+            <a:schemeClr val="dk1"/>
+          </a:effectRef>
+          <a:fontRef idx="minor">
+            <a:schemeClr val="tx1"/>
+          </a:fontRef>
+        </p:style>
+      </p:cxnSp>
+      <p:cxnSp>
+        <p:nvCxnSpPr>
+          <p:cNvPr id="64" name="直接箭头连接符 63">
+            <a:extLst>
+              <a:ext uri="{FF2B5EF4-FFF2-40B4-BE49-F238E27FC236}">
+                <a16:creationId xmlns:a16="http://schemas.microsoft.com/office/drawing/2014/main" id="{6499BFD9-4EAB-498A-8DC8-F8752E785C02}"/>
+              </a:ext>
+            </a:extLst>
+          </p:cNvPr>
+          <p:cNvCxnSpPr>
+            <a:cxnSpLocks/>
+          </p:cNvCxnSpPr>
+          <p:nvPr/>
+        </p:nvCxnSpPr>
+        <p:spPr>
+          <a:xfrm flipV="1">
+            <a:off x="7506651" y="2441457"/>
+            <a:ext cx="367113" cy="10925"/>
+          </a:xfrm>
+          <a:prstGeom prst="straightConnector1">
+            <a:avLst/>
+          </a:prstGeom>
+          <a:ln w="12700">
+            <a:tailEnd type="triangle"/>
+          </a:ln>
+        </p:spPr>
+        <p:style>
+          <a:lnRef idx="1">
+            <a:schemeClr val="dk1"/>
+          </a:lnRef>
+          <a:fillRef idx="0">
+            <a:schemeClr val="dk1"/>
+          </a:fillRef>
+          <a:effectRef idx="0">
+            <a:schemeClr val="dk1"/>
+          </a:effectRef>
+          <a:fontRef idx="minor">
+            <a:schemeClr val="tx1"/>
+          </a:fontRef>
+        </p:style>
+      </p:cxnSp>
       <p:grpSp>
         <p:nvGrpSpPr>
-          <p:cNvPr id="303" name="组合 302">
+          <p:cNvPr id="77" name="组合 76">
             <a:extLst>
               <a:ext uri="{FF2B5EF4-FFF2-40B4-BE49-F238E27FC236}">
-                <a16:creationId xmlns:a16="http://schemas.microsoft.com/office/drawing/2014/main" id="{7664BF6A-65EA-4BB6-B489-360F40CEA9F5}"/>
+                <a16:creationId xmlns:a16="http://schemas.microsoft.com/office/drawing/2014/main" id="{6F2136EB-E502-4854-886E-8C12FDF857F6}"/>
               </a:ext>
             </a:extLst>
           </p:cNvPr>
@@ -4519,18 +5410,18 @@
         </p:nvGrpSpPr>
         <p:grpSpPr>
           <a:xfrm>
-            <a:off x="5993458" y="1076393"/>
-            <a:ext cx="5833654" cy="3032296"/>
-            <a:chOff x="6382887" y="1064292"/>
-            <a:chExt cx="5833654" cy="3032296"/>
+            <a:off x="7785151" y="2336298"/>
+            <a:ext cx="4041961" cy="1124148"/>
+            <a:chOff x="10445800" y="3108130"/>
+            <a:chExt cx="4141971" cy="992515"/>
           </a:xfrm>
         </p:grpSpPr>
         <p:sp>
           <p:nvSpPr>
-            <p:cNvPr id="35" name="矩形: 圆角 34">
+            <p:cNvPr id="71" name="矩形 70">
               <a:extLst>
                 <a:ext uri="{FF2B5EF4-FFF2-40B4-BE49-F238E27FC236}">
-                  <a16:creationId xmlns:a16="http://schemas.microsoft.com/office/drawing/2014/main" id="{A39DC109-C05C-41BA-8095-87F01261CE58}"/>
+                  <a16:creationId xmlns:a16="http://schemas.microsoft.com/office/drawing/2014/main" id="{1FD23761-3EB5-4922-AEE9-3AEC3A381F3B}"/>
                 </a:ext>
               </a:extLst>
             </p:cNvPr>
@@ -4539,2328 +5430,8 @@
           </p:nvSpPr>
           <p:spPr>
             <a:xfrm>
-              <a:off x="6462666" y="1064292"/>
-              <a:ext cx="5696108" cy="2693984"/>
-            </a:xfrm>
-            <a:prstGeom prst="roundRect">
-              <a:avLst/>
-            </a:prstGeom>
-            <a:noFill/>
-            <a:ln>
-              <a:solidFill>
-                <a:srgbClr val="7F7F7F"/>
-              </a:solidFill>
-              <a:prstDash val="dash"/>
-            </a:ln>
-          </p:spPr>
-          <p:style>
-            <a:lnRef idx="2">
-              <a:schemeClr val="accent1">
-                <a:shade val="50000"/>
-              </a:schemeClr>
-            </a:lnRef>
-            <a:fillRef idx="1">
-              <a:schemeClr val="accent1"/>
-            </a:fillRef>
-            <a:effectRef idx="0">
-              <a:schemeClr val="accent1"/>
-            </a:effectRef>
-            <a:fontRef idx="minor">
-              <a:schemeClr val="lt1"/>
-            </a:fontRef>
-          </p:style>
-          <p:txBody>
-            <a:bodyPr rtlCol="0" anchor="ctr"/>
-            <a:lstStyle/>
-            <a:p>
-              <a:pPr algn="ctr"/>
-              <a:endParaRPr lang="zh-CN" altLang="en-US" sz="2019"/>
-            </a:p>
-          </p:txBody>
-        </p:sp>
-        <p:sp>
-          <p:nvSpPr>
-            <p:cNvPr id="44" name="文本框 43">
-              <a:extLst>
-                <a:ext uri="{FF2B5EF4-FFF2-40B4-BE49-F238E27FC236}">
-                  <a16:creationId xmlns:a16="http://schemas.microsoft.com/office/drawing/2014/main" id="{0A195017-3FC9-4898-8B14-F8559D0FAFA4}"/>
-                </a:ext>
-              </a:extLst>
-            </p:cNvPr>
-            <p:cNvSpPr txBox="1"/>
-            <p:nvPr/>
-          </p:nvSpPr>
-          <p:spPr>
-            <a:xfrm>
-              <a:off x="6382887" y="3175748"/>
-              <a:ext cx="271228" cy="299441"/>
-            </a:xfrm>
-            <a:prstGeom prst="rect">
-              <a:avLst/>
-            </a:prstGeom>
-            <a:noFill/>
-          </p:spPr>
-          <p:txBody>
-            <a:bodyPr wrap="none" rtlCol="0">
-              <a:spAutoFit/>
-            </a:bodyPr>
-            <a:lstStyle/>
-            <a:p>
-              <a:r>
-                <a:rPr lang="en-US" altLang="zh-CN" sz="1346" dirty="0">
-                  <a:latin typeface="宋体" panose="02010600030101010101" pitchFamily="2" charset="-122"/>
-                  <a:ea typeface="宋体" panose="02010600030101010101" pitchFamily="2" charset="-122"/>
-                </a:rPr>
-                <a:t>x</a:t>
-              </a:r>
-              <a:endParaRPr lang="zh-CN" altLang="en-US" sz="1346" dirty="0">
-                <a:latin typeface="宋体" panose="02010600030101010101" pitchFamily="2" charset="-122"/>
-                <a:ea typeface="宋体" panose="02010600030101010101" pitchFamily="2" charset="-122"/>
-              </a:endParaRPr>
-            </a:p>
-          </p:txBody>
-        </p:sp>
-        <p:cxnSp>
-          <p:nvCxnSpPr>
-            <p:cNvPr id="49" name="直接箭头连接符 48">
-              <a:extLst>
-                <a:ext uri="{FF2B5EF4-FFF2-40B4-BE49-F238E27FC236}">
-                  <a16:creationId xmlns:a16="http://schemas.microsoft.com/office/drawing/2014/main" id="{1FF2D918-7419-4764-977A-2FC5CAEAE1B7}"/>
-                </a:ext>
-              </a:extLst>
-            </p:cNvPr>
-            <p:cNvCxnSpPr>
-              <a:cxnSpLocks/>
-              <a:stCxn id="44" idx="3"/>
-              <a:endCxn id="47" idx="1"/>
-            </p:cNvCxnSpPr>
-            <p:nvPr/>
-          </p:nvCxnSpPr>
-          <p:spPr>
-            <a:xfrm>
-              <a:off x="6654115" y="3325469"/>
-              <a:ext cx="124669" cy="6064"/>
-            </a:xfrm>
-            <a:prstGeom prst="straightConnector1">
-              <a:avLst/>
-            </a:prstGeom>
-            <a:ln w="12700">
-              <a:tailEnd type="triangle"/>
-            </a:ln>
-          </p:spPr>
-          <p:style>
-            <a:lnRef idx="1">
-              <a:schemeClr val="dk1"/>
-            </a:lnRef>
-            <a:fillRef idx="0">
-              <a:schemeClr val="dk1"/>
-            </a:fillRef>
-            <a:effectRef idx="0">
-              <a:schemeClr val="dk1"/>
-            </a:effectRef>
-            <a:fontRef idx="minor">
-              <a:schemeClr val="tx1"/>
-            </a:fontRef>
-          </p:style>
-        </p:cxnSp>
-        <p:sp>
-          <p:nvSpPr>
-            <p:cNvPr id="38" name="矩形: 圆角 37">
-              <a:extLst>
-                <a:ext uri="{FF2B5EF4-FFF2-40B4-BE49-F238E27FC236}">
-                  <a16:creationId xmlns:a16="http://schemas.microsoft.com/office/drawing/2014/main" id="{4A9E894A-7101-4A7B-A752-B7C5507090FB}"/>
-                </a:ext>
-              </a:extLst>
-            </p:cNvPr>
-            <p:cNvSpPr/>
-            <p:nvPr/>
-          </p:nvSpPr>
-          <p:spPr>
-            <a:xfrm>
-              <a:off x="6833285" y="1145710"/>
-              <a:ext cx="4922492" cy="2204145"/>
-            </a:xfrm>
-            <a:prstGeom prst="roundRect">
-              <a:avLst/>
-            </a:prstGeom>
-            <a:solidFill>
-              <a:srgbClr val="E6E6E6"/>
-            </a:solidFill>
-            <a:ln>
-              <a:solidFill>
-                <a:srgbClr val="787A7D"/>
-              </a:solidFill>
-            </a:ln>
-          </p:spPr>
-          <p:style>
-            <a:lnRef idx="2">
-              <a:schemeClr val="accent1">
-                <a:shade val="50000"/>
-              </a:schemeClr>
-            </a:lnRef>
-            <a:fillRef idx="1">
-              <a:schemeClr val="accent1"/>
-            </a:fillRef>
-            <a:effectRef idx="0">
-              <a:schemeClr val="accent1"/>
-            </a:effectRef>
-            <a:fontRef idx="minor">
-              <a:schemeClr val="lt1"/>
-            </a:fontRef>
-          </p:style>
-          <p:txBody>
-            <a:bodyPr rtlCol="0" anchor="ctr"/>
-            <a:lstStyle/>
-            <a:p>
-              <a:pPr algn="ctr"/>
-              <a:endParaRPr lang="zh-CN" altLang="en-US" sz="2019"/>
-            </a:p>
-          </p:txBody>
-        </p:sp>
-        <p:sp>
-          <p:nvSpPr>
-            <p:cNvPr id="39" name="矩形: 圆角 38">
-              <a:extLst>
-                <a:ext uri="{FF2B5EF4-FFF2-40B4-BE49-F238E27FC236}">
-                  <a16:creationId xmlns:a16="http://schemas.microsoft.com/office/drawing/2014/main" id="{2232AD07-8CB8-4EFD-833B-91572DFC2AD0}"/>
-                </a:ext>
-              </a:extLst>
-            </p:cNvPr>
-            <p:cNvSpPr/>
-            <p:nvPr/>
-          </p:nvSpPr>
-          <p:spPr>
-            <a:xfrm>
-              <a:off x="6743599" y="1260956"/>
-              <a:ext cx="4922492" cy="2204145"/>
-            </a:xfrm>
-            <a:prstGeom prst="roundRect">
-              <a:avLst/>
-            </a:prstGeom>
-            <a:solidFill>
-              <a:srgbClr val="E6E6E6"/>
-            </a:solidFill>
-            <a:ln>
-              <a:solidFill>
-                <a:srgbClr val="787A7D"/>
-              </a:solidFill>
-            </a:ln>
-          </p:spPr>
-          <p:style>
-            <a:lnRef idx="2">
-              <a:schemeClr val="accent1">
-                <a:shade val="50000"/>
-              </a:schemeClr>
-            </a:lnRef>
-            <a:fillRef idx="1">
-              <a:schemeClr val="accent1"/>
-            </a:fillRef>
-            <a:effectRef idx="0">
-              <a:schemeClr val="accent1"/>
-            </a:effectRef>
-            <a:fontRef idx="minor">
-              <a:schemeClr val="lt1"/>
-            </a:fontRef>
-          </p:style>
-          <p:txBody>
-            <a:bodyPr rtlCol="0" anchor="ctr"/>
-            <a:lstStyle/>
-            <a:p>
-              <a:pPr algn="ctr"/>
-              <a:endParaRPr lang="zh-CN" altLang="en-US" sz="2019"/>
-            </a:p>
-          </p:txBody>
-        </p:sp>
-        <p:sp>
-          <p:nvSpPr>
-            <p:cNvPr id="40" name="矩形: 圆角 39">
-              <a:extLst>
-                <a:ext uri="{FF2B5EF4-FFF2-40B4-BE49-F238E27FC236}">
-                  <a16:creationId xmlns:a16="http://schemas.microsoft.com/office/drawing/2014/main" id="{00C22531-D63B-44AA-BF94-1C2807C8EF56}"/>
-                </a:ext>
-              </a:extLst>
-            </p:cNvPr>
-            <p:cNvSpPr/>
-            <p:nvPr/>
-          </p:nvSpPr>
-          <p:spPr>
-            <a:xfrm>
-              <a:off x="6627182" y="1407084"/>
-              <a:ext cx="4922492" cy="2204145"/>
-            </a:xfrm>
-            <a:prstGeom prst="roundRect">
-              <a:avLst/>
-            </a:prstGeom>
-            <a:solidFill>
-              <a:srgbClr val="E6E6E6"/>
-            </a:solidFill>
-            <a:ln>
-              <a:solidFill>
-                <a:srgbClr val="787A7D"/>
-              </a:solidFill>
-            </a:ln>
-          </p:spPr>
-          <p:style>
-            <a:lnRef idx="2">
-              <a:schemeClr val="accent1">
-                <a:shade val="50000"/>
-              </a:schemeClr>
-            </a:lnRef>
-            <a:fillRef idx="1">
-              <a:schemeClr val="accent1"/>
-            </a:fillRef>
-            <a:effectRef idx="0">
-              <a:schemeClr val="accent1"/>
-            </a:effectRef>
-            <a:fontRef idx="minor">
-              <a:schemeClr val="lt1"/>
-            </a:fontRef>
-          </p:style>
-          <p:txBody>
-            <a:bodyPr rtlCol="0" anchor="ctr"/>
-            <a:lstStyle/>
-            <a:p>
-              <a:pPr algn="ctr"/>
-              <a:endParaRPr lang="zh-CN" altLang="en-US" sz="2019" dirty="0"/>
-            </a:p>
-          </p:txBody>
-        </p:sp>
-        <p:sp>
-          <p:nvSpPr>
-            <p:cNvPr id="47" name="矩形 46">
-              <a:extLst>
-                <a:ext uri="{FF2B5EF4-FFF2-40B4-BE49-F238E27FC236}">
-                  <a16:creationId xmlns:a16="http://schemas.microsoft.com/office/drawing/2014/main" id="{46A5A17E-59B5-4AF9-AF18-377E3E56D191}"/>
-                </a:ext>
-              </a:extLst>
-            </p:cNvPr>
-            <p:cNvSpPr/>
-            <p:nvPr/>
-          </p:nvSpPr>
-          <p:spPr>
-            <a:xfrm>
-              <a:off x="6778784" y="3150373"/>
-              <a:ext cx="735584" cy="362320"/>
-            </a:xfrm>
-            <a:prstGeom prst="rect">
-              <a:avLst/>
-            </a:prstGeom>
-            <a:solidFill>
-              <a:schemeClr val="bg1"/>
-            </a:solidFill>
-            <a:ln>
-              <a:solidFill>
-                <a:schemeClr val="tx1"/>
-              </a:solidFill>
-            </a:ln>
-          </p:spPr>
-          <p:style>
-            <a:lnRef idx="2">
-              <a:schemeClr val="accent1">
-                <a:shade val="50000"/>
-              </a:schemeClr>
-            </a:lnRef>
-            <a:fillRef idx="1">
-              <a:schemeClr val="accent1"/>
-            </a:fillRef>
-            <a:effectRef idx="0">
-              <a:schemeClr val="accent1"/>
-            </a:effectRef>
-            <a:fontRef idx="minor">
-              <a:schemeClr val="lt1"/>
-            </a:fontRef>
-          </p:style>
-          <p:txBody>
-            <a:bodyPr rtlCol="0" anchor="ctr"/>
-            <a:lstStyle/>
-            <a:p>
-              <a:pPr algn="ctr"/>
-              <a:r>
-                <a:rPr lang="en-US" altLang="zh-CN" sz="1346" dirty="0">
-                  <a:solidFill>
-                    <a:schemeClr val="tx1"/>
-                  </a:solidFill>
-                  <a:latin typeface="宋体" panose="02010600030101010101" pitchFamily="2" charset="-122"/>
-                  <a:ea typeface="宋体" panose="02010600030101010101" pitchFamily="2" charset="-122"/>
-                </a:rPr>
-                <a:t>Linear</a:t>
-              </a:r>
-              <a:endParaRPr lang="zh-CN" altLang="en-US" sz="1346" dirty="0">
-                <a:solidFill>
-                  <a:schemeClr val="tx1"/>
-                </a:solidFill>
-                <a:latin typeface="宋体" panose="02010600030101010101" pitchFamily="2" charset="-122"/>
-                <a:ea typeface="宋体" panose="02010600030101010101" pitchFamily="2" charset="-122"/>
-              </a:endParaRPr>
-            </a:p>
-          </p:txBody>
-        </p:sp>
-        <p:sp>
-          <p:nvSpPr>
-            <p:cNvPr id="52" name="矩形 51">
-              <a:extLst>
-                <a:ext uri="{FF2B5EF4-FFF2-40B4-BE49-F238E27FC236}">
-                  <a16:creationId xmlns:a16="http://schemas.microsoft.com/office/drawing/2014/main" id="{6F500114-770B-44FA-AFD9-C5647288D911}"/>
-                </a:ext>
-              </a:extLst>
-            </p:cNvPr>
-            <p:cNvSpPr/>
-            <p:nvPr/>
-          </p:nvSpPr>
-          <p:spPr>
-            <a:xfrm>
-              <a:off x="7658475" y="2301202"/>
-              <a:ext cx="245915" cy="285421"/>
-            </a:xfrm>
-            <a:prstGeom prst="rect">
-              <a:avLst/>
-            </a:prstGeom>
-            <a:solidFill>
-              <a:srgbClr val="CDEB8B"/>
-            </a:solidFill>
-            <a:ln>
-              <a:solidFill>
-                <a:srgbClr val="696A6F"/>
-              </a:solidFill>
-            </a:ln>
-          </p:spPr>
-          <p:style>
-            <a:lnRef idx="2">
-              <a:schemeClr val="accent1">
-                <a:shade val="50000"/>
-              </a:schemeClr>
-            </a:lnRef>
-            <a:fillRef idx="1">
-              <a:schemeClr val="accent1"/>
-            </a:fillRef>
-            <a:effectRef idx="0">
-              <a:schemeClr val="accent1"/>
-            </a:effectRef>
-            <a:fontRef idx="minor">
-              <a:schemeClr val="lt1"/>
-            </a:fontRef>
-          </p:style>
-          <p:txBody>
-            <a:bodyPr rtlCol="0" anchor="ctr"/>
-            <a:lstStyle/>
-            <a:p>
-              <a:pPr algn="ctr"/>
-              <a:r>
-                <a:rPr lang="en-US" altLang="zh-CN" sz="1346" dirty="0">
-                  <a:solidFill>
-                    <a:schemeClr val="tx1"/>
-                  </a:solidFill>
-                  <a:latin typeface="宋体" panose="02010600030101010101" pitchFamily="2" charset="-122"/>
-                  <a:ea typeface="宋体" panose="02010600030101010101" pitchFamily="2" charset="-122"/>
-                </a:rPr>
-                <a:t>Q</a:t>
-              </a:r>
-              <a:endParaRPr lang="zh-CN" altLang="en-US" sz="1346" dirty="0">
-                <a:solidFill>
-                  <a:schemeClr val="tx1"/>
-                </a:solidFill>
-                <a:latin typeface="宋体" panose="02010600030101010101" pitchFamily="2" charset="-122"/>
-                <a:ea typeface="宋体" panose="02010600030101010101" pitchFamily="2" charset="-122"/>
-              </a:endParaRPr>
-            </a:p>
-          </p:txBody>
-        </p:sp>
-        <p:sp>
-          <p:nvSpPr>
-            <p:cNvPr id="53" name="矩形 52">
-              <a:extLst>
-                <a:ext uri="{FF2B5EF4-FFF2-40B4-BE49-F238E27FC236}">
-                  <a16:creationId xmlns:a16="http://schemas.microsoft.com/office/drawing/2014/main" id="{161DCD0B-A9FE-4234-831B-B674DA1B2287}"/>
-                </a:ext>
-              </a:extLst>
-            </p:cNvPr>
-            <p:cNvSpPr/>
-            <p:nvPr/>
-          </p:nvSpPr>
-          <p:spPr>
-            <a:xfrm>
-              <a:off x="7658475" y="2782556"/>
-              <a:ext cx="245915" cy="285421"/>
-            </a:xfrm>
-            <a:prstGeom prst="rect">
-              <a:avLst/>
-            </a:prstGeom>
-            <a:solidFill>
-              <a:srgbClr val="CDEB8B"/>
-            </a:solidFill>
-            <a:ln>
-              <a:solidFill>
-                <a:srgbClr val="696A6F"/>
-              </a:solidFill>
-            </a:ln>
-          </p:spPr>
-          <p:style>
-            <a:lnRef idx="2">
-              <a:schemeClr val="accent1">
-                <a:shade val="50000"/>
-              </a:schemeClr>
-            </a:lnRef>
-            <a:fillRef idx="1">
-              <a:schemeClr val="accent1"/>
-            </a:fillRef>
-            <a:effectRef idx="0">
-              <a:schemeClr val="accent1"/>
-            </a:effectRef>
-            <a:fontRef idx="minor">
-              <a:schemeClr val="lt1"/>
-            </a:fontRef>
-          </p:style>
-          <p:txBody>
-            <a:bodyPr rtlCol="0" anchor="ctr"/>
-            <a:lstStyle/>
-            <a:p>
-              <a:pPr algn="ctr"/>
-              <a:r>
-                <a:rPr lang="en-US" altLang="zh-CN" sz="1346" dirty="0">
-                  <a:solidFill>
-                    <a:schemeClr val="tx1"/>
-                  </a:solidFill>
-                  <a:latin typeface="宋体" panose="02010600030101010101" pitchFamily="2" charset="-122"/>
-                  <a:ea typeface="宋体" panose="02010600030101010101" pitchFamily="2" charset="-122"/>
-                </a:rPr>
-                <a:t>K</a:t>
-              </a:r>
-              <a:endParaRPr lang="zh-CN" altLang="en-US" sz="1346" dirty="0">
-                <a:solidFill>
-                  <a:schemeClr val="tx1"/>
-                </a:solidFill>
-                <a:latin typeface="宋体" panose="02010600030101010101" pitchFamily="2" charset="-122"/>
-                <a:ea typeface="宋体" panose="02010600030101010101" pitchFamily="2" charset="-122"/>
-              </a:endParaRPr>
-            </a:p>
-          </p:txBody>
-        </p:sp>
-        <p:sp>
-          <p:nvSpPr>
-            <p:cNvPr id="54" name="矩形 53">
-              <a:extLst>
-                <a:ext uri="{FF2B5EF4-FFF2-40B4-BE49-F238E27FC236}">
-                  <a16:creationId xmlns:a16="http://schemas.microsoft.com/office/drawing/2014/main" id="{353B08B5-77A6-4C33-A952-DA90E1AEE964}"/>
-                </a:ext>
-              </a:extLst>
-            </p:cNvPr>
-            <p:cNvSpPr/>
-            <p:nvPr/>
-          </p:nvSpPr>
-          <p:spPr>
-            <a:xfrm>
-              <a:off x="8059485" y="3187026"/>
-              <a:ext cx="245915" cy="285421"/>
-            </a:xfrm>
-            <a:prstGeom prst="rect">
-              <a:avLst/>
-            </a:prstGeom>
-            <a:solidFill>
-              <a:srgbClr val="CDEB8B"/>
-            </a:solidFill>
-            <a:ln>
-              <a:solidFill>
-                <a:srgbClr val="696A6F"/>
-              </a:solidFill>
-            </a:ln>
-          </p:spPr>
-          <p:style>
-            <a:lnRef idx="2">
-              <a:schemeClr val="accent1">
-                <a:shade val="50000"/>
-              </a:schemeClr>
-            </a:lnRef>
-            <a:fillRef idx="1">
-              <a:schemeClr val="accent1"/>
-            </a:fillRef>
-            <a:effectRef idx="0">
-              <a:schemeClr val="accent1"/>
-            </a:effectRef>
-            <a:fontRef idx="minor">
-              <a:schemeClr val="lt1"/>
-            </a:fontRef>
-          </p:style>
-          <p:txBody>
-            <a:bodyPr rtlCol="0" anchor="ctr"/>
-            <a:lstStyle/>
-            <a:p>
-              <a:pPr algn="ctr"/>
-              <a:r>
-                <a:rPr lang="en-US" altLang="zh-CN" sz="1346" dirty="0">
-                  <a:solidFill>
-                    <a:schemeClr val="tx1"/>
-                  </a:solidFill>
-                  <a:latin typeface="宋体" panose="02010600030101010101" pitchFamily="2" charset="-122"/>
-                  <a:ea typeface="宋体" panose="02010600030101010101" pitchFamily="2" charset="-122"/>
-                </a:rPr>
-                <a:t>V</a:t>
-              </a:r>
-              <a:endParaRPr lang="zh-CN" altLang="en-US" sz="1346" dirty="0">
-                <a:solidFill>
-                  <a:schemeClr val="tx1"/>
-                </a:solidFill>
-                <a:latin typeface="宋体" panose="02010600030101010101" pitchFamily="2" charset="-122"/>
-                <a:ea typeface="宋体" panose="02010600030101010101" pitchFamily="2" charset="-122"/>
-              </a:endParaRPr>
-            </a:p>
-          </p:txBody>
-        </p:sp>
-        <p:sp>
-          <p:nvSpPr>
-            <p:cNvPr id="55" name="矩形 54">
-              <a:extLst>
-                <a:ext uri="{FF2B5EF4-FFF2-40B4-BE49-F238E27FC236}">
-                  <a16:creationId xmlns:a16="http://schemas.microsoft.com/office/drawing/2014/main" id="{B108B99F-4036-4A19-B721-77AF3FCE8ED3}"/>
-                </a:ext>
-              </a:extLst>
-            </p:cNvPr>
-            <p:cNvSpPr/>
-            <p:nvPr/>
-          </p:nvSpPr>
-          <p:spPr>
-            <a:xfrm>
-              <a:off x="7648322" y="1714530"/>
-              <a:ext cx="245915" cy="285421"/>
-            </a:xfrm>
-            <a:prstGeom prst="rect">
-              <a:avLst/>
-            </a:prstGeom>
-            <a:solidFill>
-              <a:srgbClr val="FFCCCC"/>
-            </a:solidFill>
-            <a:ln>
-              <a:solidFill>
-                <a:srgbClr val="696A6F"/>
-              </a:solidFill>
-            </a:ln>
-          </p:spPr>
-          <p:style>
-            <a:lnRef idx="2">
-              <a:schemeClr val="accent1">
-                <a:shade val="50000"/>
-              </a:schemeClr>
-            </a:lnRef>
-            <a:fillRef idx="1">
-              <a:schemeClr val="accent1"/>
-            </a:fillRef>
-            <a:effectRef idx="0">
-              <a:schemeClr val="accent1"/>
-            </a:effectRef>
-            <a:fontRef idx="minor">
-              <a:schemeClr val="lt1"/>
-            </a:fontRef>
-          </p:style>
-          <p:txBody>
-            <a:bodyPr rtlCol="0" anchor="ctr"/>
-            <a:lstStyle/>
-            <a:p>
-              <a:pPr algn="ctr"/>
-              <a:r>
-                <a:rPr lang="el-GR" altLang="zh-CN" sz="1346" dirty="0">
-                  <a:solidFill>
-                    <a:schemeClr val="tx1"/>
-                  </a:solidFill>
-                  <a:latin typeface="宋体" panose="02010600030101010101" pitchFamily="2" charset="-122"/>
-                  <a:ea typeface="宋体" panose="02010600030101010101" pitchFamily="2" charset="-122"/>
-                </a:rPr>
-                <a:t>σ</a:t>
-              </a:r>
-              <a:endParaRPr lang="zh-CN" altLang="en-US" sz="1346" dirty="0">
-                <a:solidFill>
-                  <a:schemeClr val="tx1"/>
-                </a:solidFill>
-                <a:latin typeface="宋体" panose="02010600030101010101" pitchFamily="2" charset="-122"/>
-                <a:ea typeface="宋体" panose="02010600030101010101" pitchFamily="2" charset="-122"/>
-              </a:endParaRPr>
-            </a:p>
-          </p:txBody>
-        </p:sp>
-        <p:cxnSp>
-          <p:nvCxnSpPr>
-            <p:cNvPr id="56" name="直接箭头连接符 55">
-              <a:extLst>
-                <a:ext uri="{FF2B5EF4-FFF2-40B4-BE49-F238E27FC236}">
-                  <a16:creationId xmlns:a16="http://schemas.microsoft.com/office/drawing/2014/main" id="{ECAFC462-45B8-4EEE-849B-90AB0BEB1303}"/>
-                </a:ext>
-              </a:extLst>
-            </p:cNvPr>
-            <p:cNvCxnSpPr>
-              <a:cxnSpLocks/>
-            </p:cNvCxnSpPr>
-            <p:nvPr/>
-          </p:nvCxnSpPr>
-          <p:spPr>
-            <a:xfrm>
-              <a:off x="7521380" y="3324604"/>
-              <a:ext cx="534303" cy="1"/>
-            </a:xfrm>
-            <a:prstGeom prst="straightConnector1">
-              <a:avLst/>
-            </a:prstGeom>
-            <a:ln w="12700">
-              <a:tailEnd type="triangle"/>
-            </a:ln>
-          </p:spPr>
-          <p:style>
-            <a:lnRef idx="1">
-              <a:schemeClr val="dk1"/>
-            </a:lnRef>
-            <a:fillRef idx="0">
-              <a:schemeClr val="dk1"/>
-            </a:fillRef>
-            <a:effectRef idx="0">
-              <a:schemeClr val="dk1"/>
-            </a:effectRef>
-            <a:fontRef idx="minor">
-              <a:schemeClr val="tx1"/>
-            </a:fontRef>
-          </p:style>
-        </p:cxnSp>
-        <p:cxnSp>
-          <p:nvCxnSpPr>
-            <p:cNvPr id="58" name="连接符: 肘形 57">
-              <a:extLst>
-                <a:ext uri="{FF2B5EF4-FFF2-40B4-BE49-F238E27FC236}">
-                  <a16:creationId xmlns:a16="http://schemas.microsoft.com/office/drawing/2014/main" id="{6C113867-CFF6-4634-9740-5659EB57F279}"/>
-                </a:ext>
-              </a:extLst>
-            </p:cNvPr>
-            <p:cNvCxnSpPr>
-              <a:cxnSpLocks/>
-              <a:stCxn id="47" idx="0"/>
-              <a:endCxn id="55" idx="1"/>
-            </p:cNvCxnSpPr>
-            <p:nvPr/>
-          </p:nvCxnSpPr>
-          <p:spPr>
-            <a:xfrm rot="5400000" flipH="1" flipV="1">
-              <a:off x="6750879" y="2252934"/>
-              <a:ext cx="1293136" cy="501742"/>
-            </a:xfrm>
-            <a:prstGeom prst="bentConnector2">
-              <a:avLst/>
-            </a:prstGeom>
-            <a:ln w="12700">
-              <a:tailEnd type="triangle"/>
-            </a:ln>
-          </p:spPr>
-          <p:style>
-            <a:lnRef idx="1">
-              <a:schemeClr val="dk1"/>
-            </a:lnRef>
-            <a:fillRef idx="0">
-              <a:schemeClr val="dk1"/>
-            </a:fillRef>
-            <a:effectRef idx="0">
-              <a:schemeClr val="dk1"/>
-            </a:effectRef>
-            <a:fontRef idx="minor">
-              <a:schemeClr val="tx1"/>
-            </a:fontRef>
-          </p:style>
-        </p:cxnSp>
-        <p:cxnSp>
-          <p:nvCxnSpPr>
-            <p:cNvPr id="60" name="连接符: 肘形 59">
-              <a:extLst>
-                <a:ext uri="{FF2B5EF4-FFF2-40B4-BE49-F238E27FC236}">
-                  <a16:creationId xmlns:a16="http://schemas.microsoft.com/office/drawing/2014/main" id="{6919FD25-64B8-4027-9A9F-D84A8EC89EE4}"/>
-                </a:ext>
-              </a:extLst>
-            </p:cNvPr>
-            <p:cNvCxnSpPr>
-              <a:cxnSpLocks/>
-              <a:stCxn id="47" idx="0"/>
-              <a:endCxn id="52" idx="1"/>
-            </p:cNvCxnSpPr>
-            <p:nvPr/>
-          </p:nvCxnSpPr>
-          <p:spPr>
-            <a:xfrm rot="5400000" flipH="1" flipV="1">
-              <a:off x="7049291" y="2541193"/>
-              <a:ext cx="706464" cy="511896"/>
-            </a:xfrm>
-            <a:prstGeom prst="bentConnector2">
-              <a:avLst/>
-            </a:prstGeom>
-            <a:ln w="12700">
-              <a:tailEnd type="triangle"/>
-            </a:ln>
-          </p:spPr>
-          <p:style>
-            <a:lnRef idx="1">
-              <a:schemeClr val="dk1"/>
-            </a:lnRef>
-            <a:fillRef idx="0">
-              <a:schemeClr val="dk1"/>
-            </a:fillRef>
-            <a:effectRef idx="0">
-              <a:schemeClr val="dk1"/>
-            </a:effectRef>
-            <a:fontRef idx="minor">
-              <a:schemeClr val="tx1"/>
-            </a:fontRef>
-          </p:style>
-        </p:cxnSp>
-        <p:cxnSp>
-          <p:nvCxnSpPr>
-            <p:cNvPr id="62" name="连接符: 肘形 61">
-              <a:extLst>
-                <a:ext uri="{FF2B5EF4-FFF2-40B4-BE49-F238E27FC236}">
-                  <a16:creationId xmlns:a16="http://schemas.microsoft.com/office/drawing/2014/main" id="{930086E1-4484-4A28-8B8B-32848ED3632C}"/>
-                </a:ext>
-              </a:extLst>
-            </p:cNvPr>
-            <p:cNvCxnSpPr>
-              <a:cxnSpLocks/>
-              <a:stCxn id="47" idx="0"/>
-              <a:endCxn id="53" idx="1"/>
-            </p:cNvCxnSpPr>
-            <p:nvPr/>
-          </p:nvCxnSpPr>
-          <p:spPr>
-            <a:xfrm rot="5400000" flipH="1" flipV="1">
-              <a:off x="7289969" y="2781871"/>
-              <a:ext cx="225110" cy="511896"/>
-            </a:xfrm>
-            <a:prstGeom prst="bentConnector2">
-              <a:avLst/>
-            </a:prstGeom>
-            <a:ln w="12700">
-              <a:tailEnd type="triangle"/>
-            </a:ln>
-          </p:spPr>
-          <p:style>
-            <a:lnRef idx="1">
-              <a:schemeClr val="dk1"/>
-            </a:lnRef>
-            <a:fillRef idx="0">
-              <a:schemeClr val="dk1"/>
-            </a:fillRef>
-            <a:effectRef idx="0">
-              <a:schemeClr val="dk1"/>
-            </a:effectRef>
-            <a:fontRef idx="minor">
-              <a:schemeClr val="tx1"/>
-            </a:fontRef>
-          </p:style>
-        </p:cxnSp>
-        <p:cxnSp>
-          <p:nvCxnSpPr>
-            <p:cNvPr id="63" name="直接箭头连接符 62">
-              <a:extLst>
-                <a:ext uri="{FF2B5EF4-FFF2-40B4-BE49-F238E27FC236}">
-                  <a16:creationId xmlns:a16="http://schemas.microsoft.com/office/drawing/2014/main" id="{EB7060DB-F7E8-44D1-B835-AB93B7A3807B}"/>
-                </a:ext>
-              </a:extLst>
-            </p:cNvPr>
-            <p:cNvCxnSpPr>
-              <a:cxnSpLocks/>
-            </p:cNvCxnSpPr>
-            <p:nvPr/>
-          </p:nvCxnSpPr>
-          <p:spPr>
-            <a:xfrm flipV="1">
-              <a:off x="7896080" y="2919319"/>
-              <a:ext cx="367113" cy="10925"/>
-            </a:xfrm>
-            <a:prstGeom prst="straightConnector1">
-              <a:avLst/>
-            </a:prstGeom>
-            <a:ln w="12700">
-              <a:tailEnd type="triangle"/>
-            </a:ln>
-          </p:spPr>
-          <p:style>
-            <a:lnRef idx="1">
-              <a:schemeClr val="dk1"/>
-            </a:lnRef>
-            <a:fillRef idx="0">
-              <a:schemeClr val="dk1"/>
-            </a:fillRef>
-            <a:effectRef idx="0">
-              <a:schemeClr val="dk1"/>
-            </a:effectRef>
-            <a:fontRef idx="minor">
-              <a:schemeClr val="tx1"/>
-            </a:fontRef>
-          </p:style>
-        </p:cxnSp>
-        <p:cxnSp>
-          <p:nvCxnSpPr>
-            <p:cNvPr id="64" name="直接箭头连接符 63">
-              <a:extLst>
-                <a:ext uri="{FF2B5EF4-FFF2-40B4-BE49-F238E27FC236}">
-                  <a16:creationId xmlns:a16="http://schemas.microsoft.com/office/drawing/2014/main" id="{6499BFD9-4EAB-498A-8DC8-F8752E785C02}"/>
-                </a:ext>
-              </a:extLst>
-            </p:cNvPr>
-            <p:cNvCxnSpPr>
-              <a:cxnSpLocks/>
-            </p:cNvCxnSpPr>
-            <p:nvPr/>
-          </p:nvCxnSpPr>
-          <p:spPr>
-            <a:xfrm flipV="1">
-              <a:off x="7896080" y="2429356"/>
-              <a:ext cx="367113" cy="10925"/>
-            </a:xfrm>
-            <a:prstGeom prst="straightConnector1">
-              <a:avLst/>
-            </a:prstGeom>
-            <a:ln w="12700">
-              <a:tailEnd type="triangle"/>
-            </a:ln>
-          </p:spPr>
-          <p:style>
-            <a:lnRef idx="1">
-              <a:schemeClr val="dk1"/>
-            </a:lnRef>
-            <a:fillRef idx="0">
-              <a:schemeClr val="dk1"/>
-            </a:fillRef>
-            <a:effectRef idx="0">
-              <a:schemeClr val="dk1"/>
-            </a:effectRef>
-            <a:fontRef idx="minor">
-              <a:schemeClr val="tx1"/>
-            </a:fontRef>
-          </p:style>
-        </p:cxnSp>
-        <p:grpSp>
-          <p:nvGrpSpPr>
-            <p:cNvPr id="77" name="组合 76">
-              <a:extLst>
-                <a:ext uri="{FF2B5EF4-FFF2-40B4-BE49-F238E27FC236}">
-                  <a16:creationId xmlns:a16="http://schemas.microsoft.com/office/drawing/2014/main" id="{6F2136EB-E502-4854-886E-8C12FDF857F6}"/>
-                </a:ext>
-              </a:extLst>
-            </p:cNvPr>
-            <p:cNvGrpSpPr/>
-            <p:nvPr/>
-          </p:nvGrpSpPr>
-          <p:grpSpPr>
-            <a:xfrm>
-              <a:off x="8174580" y="2324197"/>
-              <a:ext cx="4041961" cy="1124148"/>
-              <a:chOff x="10445800" y="3108130"/>
-              <a:chExt cx="4141971" cy="992515"/>
-            </a:xfrm>
-          </p:grpSpPr>
-          <p:sp>
-            <p:nvSpPr>
-              <p:cNvPr id="71" name="矩形 70">
-                <a:extLst>
-                  <a:ext uri="{FF2B5EF4-FFF2-40B4-BE49-F238E27FC236}">
-                    <a16:creationId xmlns:a16="http://schemas.microsoft.com/office/drawing/2014/main" id="{1FD23761-3EB5-4922-AEE9-3AEC3A381F3B}"/>
-                  </a:ext>
-                </a:extLst>
-              </p:cNvPr>
-              <p:cNvSpPr/>
-              <p:nvPr/>
-            </p:nvSpPr>
-            <p:spPr>
-              <a:xfrm>
-                <a:off x="10536602" y="3108130"/>
-                <a:ext cx="252000" cy="623741"/>
-              </a:xfrm>
-              <a:prstGeom prst="rect">
-                <a:avLst/>
-              </a:prstGeom>
-              <a:solidFill>
-                <a:srgbClr val="DAE8FC"/>
-              </a:solidFill>
-              <a:ln>
-                <a:solidFill>
-                  <a:srgbClr val="696A6F"/>
-                </a:solidFill>
-              </a:ln>
-            </p:spPr>
-            <p:style>
-              <a:lnRef idx="2">
-                <a:schemeClr val="accent1">
-                  <a:shade val="50000"/>
-                </a:schemeClr>
-              </a:lnRef>
-              <a:fillRef idx="1">
-                <a:schemeClr val="accent1"/>
-              </a:fillRef>
-              <a:effectRef idx="0">
-                <a:schemeClr val="accent1"/>
-              </a:effectRef>
-              <a:fontRef idx="minor">
-                <a:schemeClr val="lt1"/>
-              </a:fontRef>
-            </p:style>
-            <p:txBody>
-              <a:bodyPr rtlCol="0" anchor="ctr"/>
-              <a:lstStyle/>
-              <a:p>
-                <a:pPr algn="ctr"/>
-                <a:endParaRPr lang="zh-CN" altLang="en-US" sz="1346" dirty="0">
-                  <a:solidFill>
-                    <a:schemeClr val="tx1"/>
-                  </a:solidFill>
-                  <a:latin typeface="宋体" panose="02010600030101010101" pitchFamily="2" charset="-122"/>
-                  <a:ea typeface="宋体" panose="02010600030101010101" pitchFamily="2" charset="-122"/>
-                </a:endParaRPr>
-              </a:p>
-            </p:txBody>
-          </p:sp>
-          <p:sp>
-            <p:nvSpPr>
-              <p:cNvPr id="74" name="文本框 73">
-                <a:extLst>
-                  <a:ext uri="{FF2B5EF4-FFF2-40B4-BE49-F238E27FC236}">
-                    <a16:creationId xmlns:a16="http://schemas.microsoft.com/office/drawing/2014/main" id="{3335AA1F-69F0-441A-B4D1-B900036A0227}"/>
-                  </a:ext>
-                </a:extLst>
-              </p:cNvPr>
-              <p:cNvSpPr txBox="1"/>
-              <p:nvPr/>
-            </p:nvSpPr>
-            <p:spPr>
-              <a:xfrm>
-                <a:off x="10445800" y="3143001"/>
-                <a:ext cx="401468" cy="540078"/>
-              </a:xfrm>
-              <a:prstGeom prst="rect">
-                <a:avLst/>
-              </a:prstGeom>
-              <a:noFill/>
-            </p:spPr>
-            <p:txBody>
-              <a:bodyPr vert="eaVert" wrap="none" rtlCol="0">
-                <a:spAutoFit/>
-              </a:bodyPr>
-              <a:lstStyle/>
-              <a:p>
-                <a:r>
-                  <a:rPr lang="en-US" altLang="zh-CN" sz="1346" dirty="0">
-                    <a:latin typeface="宋体" panose="02010600030101010101" pitchFamily="2" charset="-122"/>
-                    <a:ea typeface="宋体" panose="02010600030101010101" pitchFamily="2" charset="-122"/>
-                  </a:rPr>
-                  <a:t>MatMul</a:t>
-                </a:r>
-                <a:endParaRPr lang="zh-CN" altLang="en-US" sz="1346" dirty="0">
-                  <a:latin typeface="宋体" panose="02010600030101010101" pitchFamily="2" charset="-122"/>
-                  <a:ea typeface="宋体" panose="02010600030101010101" pitchFamily="2" charset="-122"/>
-                </a:endParaRPr>
-              </a:p>
-            </p:txBody>
-          </p:sp>
-          <p:sp>
-            <p:nvSpPr>
-              <p:cNvPr id="170" name="文本框 169">
-                <a:extLst>
-                  <a:ext uri="{FF2B5EF4-FFF2-40B4-BE49-F238E27FC236}">
-                    <a16:creationId xmlns:a16="http://schemas.microsoft.com/office/drawing/2014/main" id="{A1CD4595-70F4-476C-90BE-CA72EB96A790}"/>
-                  </a:ext>
-                </a:extLst>
-              </p:cNvPr>
-              <p:cNvSpPr txBox="1"/>
-              <p:nvPr/>
-            </p:nvSpPr>
-            <p:spPr>
-              <a:xfrm>
-                <a:off x="14186303" y="3560567"/>
-                <a:ext cx="401468" cy="540078"/>
-              </a:xfrm>
-              <a:prstGeom prst="rect">
-                <a:avLst/>
-              </a:prstGeom>
-              <a:noFill/>
-            </p:spPr>
-            <p:txBody>
-              <a:bodyPr vert="eaVert" wrap="none" rtlCol="0">
-                <a:spAutoFit/>
-              </a:bodyPr>
-              <a:lstStyle/>
-              <a:p>
-                <a:r>
-                  <a:rPr lang="en-US" altLang="zh-CN" sz="1346" dirty="0">
-                    <a:latin typeface="宋体" panose="02010600030101010101" pitchFamily="2" charset="-122"/>
-                    <a:ea typeface="宋体" panose="02010600030101010101" pitchFamily="2" charset="-122"/>
-                  </a:rPr>
-                  <a:t>Linear</a:t>
-                </a:r>
-                <a:endParaRPr lang="zh-CN" altLang="en-US" sz="1346" dirty="0">
-                  <a:latin typeface="宋体" panose="02010600030101010101" pitchFamily="2" charset="-122"/>
-                  <a:ea typeface="宋体" panose="02010600030101010101" pitchFamily="2" charset="-122"/>
-                </a:endParaRPr>
-              </a:p>
-            </p:txBody>
-          </p:sp>
-        </p:grpSp>
-        <p:cxnSp>
-          <p:nvCxnSpPr>
-            <p:cNvPr id="75" name="直接箭头连接符 74">
-              <a:extLst>
-                <a:ext uri="{FF2B5EF4-FFF2-40B4-BE49-F238E27FC236}">
-                  <a16:creationId xmlns:a16="http://schemas.microsoft.com/office/drawing/2014/main" id="{E3513E37-6A75-48A7-B1BF-1A0775885895}"/>
-                </a:ext>
-              </a:extLst>
-            </p:cNvPr>
-            <p:cNvCxnSpPr>
-              <a:cxnSpLocks/>
-            </p:cNvCxnSpPr>
-            <p:nvPr/>
-          </p:nvCxnSpPr>
-          <p:spPr>
-            <a:xfrm>
-              <a:off x="8512355" y="2677427"/>
-              <a:ext cx="324414" cy="0"/>
-            </a:xfrm>
-            <a:prstGeom prst="straightConnector1">
-              <a:avLst/>
-            </a:prstGeom>
-            <a:ln w="12700">
-              <a:tailEnd type="triangle"/>
-            </a:ln>
-          </p:spPr>
-          <p:style>
-            <a:lnRef idx="1">
-              <a:schemeClr val="dk1"/>
-            </a:lnRef>
-            <a:fillRef idx="0">
-              <a:schemeClr val="dk1"/>
-            </a:fillRef>
-            <a:effectRef idx="0">
-              <a:schemeClr val="dk1"/>
-            </a:effectRef>
-            <a:fontRef idx="minor">
-              <a:schemeClr val="tx1"/>
-            </a:fontRef>
-          </p:style>
-        </p:cxnSp>
-        <p:grpSp>
-          <p:nvGrpSpPr>
-            <p:cNvPr id="78" name="组合 77">
-              <a:extLst>
-                <a:ext uri="{FF2B5EF4-FFF2-40B4-BE49-F238E27FC236}">
-                  <a16:creationId xmlns:a16="http://schemas.microsoft.com/office/drawing/2014/main" id="{9E50048C-E207-492D-87B1-1D572B33A360}"/>
-                </a:ext>
-              </a:extLst>
-            </p:cNvPr>
-            <p:cNvGrpSpPr/>
-            <p:nvPr/>
-          </p:nvGrpSpPr>
-          <p:grpSpPr>
-            <a:xfrm>
-              <a:off x="8749405" y="2324199"/>
-              <a:ext cx="391774" cy="706465"/>
-              <a:chOff x="10445800" y="3108130"/>
-              <a:chExt cx="401468" cy="623741"/>
-            </a:xfrm>
-            <a:solidFill>
-              <a:srgbClr val="E1D5E7"/>
-            </a:solidFill>
-          </p:grpSpPr>
-          <p:sp>
-            <p:nvSpPr>
-              <p:cNvPr id="79" name="矩形 78">
-                <a:extLst>
-                  <a:ext uri="{FF2B5EF4-FFF2-40B4-BE49-F238E27FC236}">
-                    <a16:creationId xmlns:a16="http://schemas.microsoft.com/office/drawing/2014/main" id="{93E60CBF-41BA-4CFC-ABE0-82BA4992BA2B}"/>
-                  </a:ext>
-                </a:extLst>
-              </p:cNvPr>
-              <p:cNvSpPr/>
-              <p:nvPr/>
-            </p:nvSpPr>
-            <p:spPr>
-              <a:xfrm>
-                <a:off x="10536602" y="3108130"/>
-                <a:ext cx="252000" cy="623741"/>
-              </a:xfrm>
-              <a:prstGeom prst="rect">
-                <a:avLst/>
-              </a:prstGeom>
-              <a:grpFill/>
-              <a:ln>
-                <a:solidFill>
-                  <a:srgbClr val="696A6F"/>
-                </a:solidFill>
-              </a:ln>
-            </p:spPr>
-            <p:style>
-              <a:lnRef idx="2">
-                <a:schemeClr val="accent1">
-                  <a:shade val="50000"/>
-                </a:schemeClr>
-              </a:lnRef>
-              <a:fillRef idx="1">
-                <a:schemeClr val="accent1"/>
-              </a:fillRef>
-              <a:effectRef idx="0">
-                <a:schemeClr val="accent1"/>
-              </a:effectRef>
-              <a:fontRef idx="minor">
-                <a:schemeClr val="lt1"/>
-              </a:fontRef>
-            </p:style>
-            <p:txBody>
-              <a:bodyPr rtlCol="0" anchor="ctr"/>
-              <a:lstStyle/>
-              <a:p>
-                <a:pPr algn="ctr"/>
-                <a:endParaRPr lang="zh-CN" altLang="en-US" sz="1346" dirty="0">
-                  <a:solidFill>
-                    <a:schemeClr val="tx1"/>
-                  </a:solidFill>
-                  <a:latin typeface="宋体" panose="02010600030101010101" pitchFamily="2" charset="-122"/>
-                  <a:ea typeface="宋体" panose="02010600030101010101" pitchFamily="2" charset="-122"/>
-                </a:endParaRPr>
-              </a:p>
-            </p:txBody>
-          </p:sp>
-          <p:sp>
-            <p:nvSpPr>
-              <p:cNvPr id="80" name="文本框 79">
-                <a:extLst>
-                  <a:ext uri="{FF2B5EF4-FFF2-40B4-BE49-F238E27FC236}">
-                    <a16:creationId xmlns:a16="http://schemas.microsoft.com/office/drawing/2014/main" id="{D992505B-EB2B-4D0C-8987-791A337B96DC}"/>
-                  </a:ext>
-                </a:extLst>
-              </p:cNvPr>
-              <p:cNvSpPr txBox="1"/>
-              <p:nvPr/>
-            </p:nvSpPr>
-            <p:spPr>
-              <a:xfrm>
-                <a:off x="10445800" y="3143001"/>
-                <a:ext cx="401468" cy="463652"/>
-              </a:xfrm>
-              <a:prstGeom prst="rect">
-                <a:avLst/>
-              </a:prstGeom>
-              <a:noFill/>
-            </p:spPr>
-            <p:txBody>
-              <a:bodyPr vert="eaVert" wrap="none" rtlCol="0">
-                <a:spAutoFit/>
-              </a:bodyPr>
-              <a:lstStyle/>
-              <a:p>
-                <a:r>
-                  <a:rPr lang="en-US" altLang="zh-CN" sz="1346" dirty="0">
-                    <a:latin typeface="宋体" panose="02010600030101010101" pitchFamily="2" charset="-122"/>
-                    <a:ea typeface="宋体" panose="02010600030101010101" pitchFamily="2" charset="-122"/>
-                  </a:rPr>
-                  <a:t>Scale</a:t>
-                </a:r>
-                <a:endParaRPr lang="zh-CN" altLang="en-US" sz="1346" dirty="0">
-                  <a:latin typeface="宋体" panose="02010600030101010101" pitchFamily="2" charset="-122"/>
-                  <a:ea typeface="宋体" panose="02010600030101010101" pitchFamily="2" charset="-122"/>
-                </a:endParaRPr>
-              </a:p>
-            </p:txBody>
-          </p:sp>
-        </p:grpSp>
-        <p:grpSp>
-          <p:nvGrpSpPr>
-            <p:cNvPr id="82" name="组合 81">
-              <a:extLst>
-                <a:ext uri="{FF2B5EF4-FFF2-40B4-BE49-F238E27FC236}">
-                  <a16:creationId xmlns:a16="http://schemas.microsoft.com/office/drawing/2014/main" id="{A16F286F-3AC1-4522-9AF4-31A7D119A4C6}"/>
-                </a:ext>
-              </a:extLst>
-            </p:cNvPr>
-            <p:cNvGrpSpPr/>
-            <p:nvPr/>
-          </p:nvGrpSpPr>
-          <p:grpSpPr>
-            <a:xfrm>
-              <a:off x="9333870" y="2319508"/>
-              <a:ext cx="391774" cy="737764"/>
-              <a:chOff x="10445800" y="3108130"/>
-              <a:chExt cx="401468" cy="651374"/>
-            </a:xfrm>
-            <a:solidFill>
-              <a:srgbClr val="FFCCCC"/>
-            </a:solidFill>
-          </p:grpSpPr>
-          <p:sp>
-            <p:nvSpPr>
-              <p:cNvPr id="83" name="矩形 82">
-                <a:extLst>
-                  <a:ext uri="{FF2B5EF4-FFF2-40B4-BE49-F238E27FC236}">
-                    <a16:creationId xmlns:a16="http://schemas.microsoft.com/office/drawing/2014/main" id="{D26CF560-C1F0-4674-8708-F1B3131BB3E4}"/>
-                  </a:ext>
-                </a:extLst>
-              </p:cNvPr>
-              <p:cNvSpPr/>
-              <p:nvPr/>
-            </p:nvSpPr>
-            <p:spPr>
-              <a:xfrm>
-                <a:off x="10536602" y="3108130"/>
-                <a:ext cx="252000" cy="623741"/>
-              </a:xfrm>
-              <a:prstGeom prst="rect">
-                <a:avLst/>
-              </a:prstGeom>
-              <a:grpFill/>
-              <a:ln>
-                <a:solidFill>
-                  <a:srgbClr val="696A6F"/>
-                </a:solidFill>
-              </a:ln>
-            </p:spPr>
-            <p:style>
-              <a:lnRef idx="2">
-                <a:schemeClr val="accent1">
-                  <a:shade val="50000"/>
-                </a:schemeClr>
-              </a:lnRef>
-              <a:fillRef idx="1">
-                <a:schemeClr val="accent1"/>
-              </a:fillRef>
-              <a:effectRef idx="0">
-                <a:schemeClr val="accent1"/>
-              </a:effectRef>
-              <a:fontRef idx="minor">
-                <a:schemeClr val="lt1"/>
-              </a:fontRef>
-            </p:style>
-            <p:txBody>
-              <a:bodyPr rtlCol="0" anchor="ctr"/>
-              <a:lstStyle/>
-              <a:p>
-                <a:pPr algn="ctr"/>
-                <a:endParaRPr lang="zh-CN" altLang="en-US" sz="1346" dirty="0">
-                  <a:solidFill>
-                    <a:schemeClr val="tx1"/>
-                  </a:solidFill>
-                  <a:latin typeface="宋体" panose="02010600030101010101" pitchFamily="2" charset="-122"/>
-                  <a:ea typeface="宋体" panose="02010600030101010101" pitchFamily="2" charset="-122"/>
-                </a:endParaRPr>
-              </a:p>
-            </p:txBody>
-          </p:sp>
-          <p:sp>
-            <p:nvSpPr>
-              <p:cNvPr id="84" name="文本框 83">
-                <a:extLst>
-                  <a:ext uri="{FF2B5EF4-FFF2-40B4-BE49-F238E27FC236}">
-                    <a16:creationId xmlns:a16="http://schemas.microsoft.com/office/drawing/2014/main" id="{6387428D-6ADD-42AF-93A2-6621D8AB0C27}"/>
-                  </a:ext>
-                </a:extLst>
-              </p:cNvPr>
-              <p:cNvSpPr txBox="1"/>
-              <p:nvPr/>
-            </p:nvSpPr>
-            <p:spPr>
-              <a:xfrm>
-                <a:off x="10445800" y="3143001"/>
-                <a:ext cx="401468" cy="616503"/>
-              </a:xfrm>
-              <a:prstGeom prst="rect">
-                <a:avLst/>
-              </a:prstGeom>
-              <a:noFill/>
-            </p:spPr>
-            <p:txBody>
-              <a:bodyPr vert="eaVert" wrap="none" rtlCol="0">
-                <a:spAutoFit/>
-              </a:bodyPr>
-              <a:lstStyle/>
-              <a:p>
-                <a:r>
-                  <a:rPr lang="en-US" altLang="zh-CN" sz="1346" dirty="0">
-                    <a:latin typeface="宋体" panose="02010600030101010101" pitchFamily="2" charset="-122"/>
-                    <a:ea typeface="宋体" panose="02010600030101010101" pitchFamily="2" charset="-122"/>
-                  </a:rPr>
-                  <a:t>SoftMax</a:t>
-                </a:r>
-                <a:endParaRPr lang="zh-CN" altLang="en-US" sz="1346" dirty="0">
-                  <a:latin typeface="宋体" panose="02010600030101010101" pitchFamily="2" charset="-122"/>
-                  <a:ea typeface="宋体" panose="02010600030101010101" pitchFamily="2" charset="-122"/>
-                </a:endParaRPr>
-              </a:p>
-            </p:txBody>
-          </p:sp>
-        </p:grpSp>
-        <p:cxnSp>
-          <p:nvCxnSpPr>
-            <p:cNvPr id="85" name="直接箭头连接符 84">
-              <a:extLst>
-                <a:ext uri="{FF2B5EF4-FFF2-40B4-BE49-F238E27FC236}">
-                  <a16:creationId xmlns:a16="http://schemas.microsoft.com/office/drawing/2014/main" id="{4CC4A59F-1304-42A7-81CB-71E61E76767B}"/>
-                </a:ext>
-              </a:extLst>
-            </p:cNvPr>
-            <p:cNvCxnSpPr>
-              <a:cxnSpLocks/>
-            </p:cNvCxnSpPr>
-            <p:nvPr/>
-          </p:nvCxnSpPr>
-          <p:spPr>
-            <a:xfrm>
-              <a:off x="9088401" y="2681274"/>
-              <a:ext cx="324414" cy="0"/>
-            </a:xfrm>
-            <a:prstGeom prst="straightConnector1">
-              <a:avLst/>
-            </a:prstGeom>
-            <a:ln w="12700">
-              <a:tailEnd type="triangle"/>
-            </a:ln>
-          </p:spPr>
-          <p:style>
-            <a:lnRef idx="1">
-              <a:schemeClr val="dk1"/>
-            </a:lnRef>
-            <a:fillRef idx="0">
-              <a:schemeClr val="dk1"/>
-            </a:fillRef>
-            <a:effectRef idx="0">
-              <a:schemeClr val="dk1"/>
-            </a:effectRef>
-            <a:fontRef idx="minor">
-              <a:schemeClr val="tx1"/>
-            </a:fontRef>
-          </p:style>
-        </p:cxnSp>
-        <p:grpSp>
-          <p:nvGrpSpPr>
-            <p:cNvPr id="90" name="组合 89">
-              <a:extLst>
-                <a:ext uri="{FF2B5EF4-FFF2-40B4-BE49-F238E27FC236}">
-                  <a16:creationId xmlns:a16="http://schemas.microsoft.com/office/drawing/2014/main" id="{33387893-BC40-4F55-93D3-6D4704EAE327}"/>
-                </a:ext>
-              </a:extLst>
-            </p:cNvPr>
-            <p:cNvGrpSpPr/>
-            <p:nvPr/>
-          </p:nvGrpSpPr>
-          <p:grpSpPr>
-            <a:xfrm>
-              <a:off x="8174553" y="1449445"/>
-              <a:ext cx="391774" cy="830426"/>
-              <a:chOff x="10445800" y="3108130"/>
-              <a:chExt cx="401468" cy="635099"/>
-            </a:xfrm>
-          </p:grpSpPr>
-          <p:sp>
-            <p:nvSpPr>
-              <p:cNvPr id="91" name="矩形 90">
-                <a:extLst>
-                  <a:ext uri="{FF2B5EF4-FFF2-40B4-BE49-F238E27FC236}">
-                    <a16:creationId xmlns:a16="http://schemas.microsoft.com/office/drawing/2014/main" id="{78C5BC86-2C82-4958-BB4C-229A7134D39C}"/>
-                  </a:ext>
-                </a:extLst>
-              </p:cNvPr>
-              <p:cNvSpPr/>
-              <p:nvPr/>
-            </p:nvSpPr>
-            <p:spPr>
-              <a:xfrm>
-                <a:off x="10536602" y="3108130"/>
-                <a:ext cx="252000" cy="623741"/>
-              </a:xfrm>
-              <a:prstGeom prst="rect">
-                <a:avLst/>
-              </a:prstGeom>
-              <a:solidFill>
-                <a:srgbClr val="DAE8FC"/>
-              </a:solidFill>
-              <a:ln>
-                <a:solidFill>
-                  <a:srgbClr val="696A6F"/>
-                </a:solidFill>
-              </a:ln>
-            </p:spPr>
-            <p:style>
-              <a:lnRef idx="2">
-                <a:schemeClr val="accent1">
-                  <a:shade val="50000"/>
-                </a:schemeClr>
-              </a:lnRef>
-              <a:fillRef idx="1">
-                <a:schemeClr val="accent1"/>
-              </a:fillRef>
-              <a:effectRef idx="0">
-                <a:schemeClr val="accent1"/>
-              </a:effectRef>
-              <a:fontRef idx="minor">
-                <a:schemeClr val="lt1"/>
-              </a:fontRef>
-            </p:style>
-            <p:txBody>
-              <a:bodyPr rtlCol="0" anchor="ctr"/>
-              <a:lstStyle/>
-              <a:p>
-                <a:pPr algn="ctr"/>
-                <a:endParaRPr lang="zh-CN" altLang="en-US" sz="1346" dirty="0">
-                  <a:solidFill>
-                    <a:schemeClr val="tx1"/>
-                  </a:solidFill>
-                  <a:latin typeface="宋体" panose="02010600030101010101" pitchFamily="2" charset="-122"/>
-                  <a:ea typeface="宋体" panose="02010600030101010101" pitchFamily="2" charset="-122"/>
-                </a:endParaRPr>
-              </a:p>
-            </p:txBody>
-          </p:sp>
-          <p:sp>
-            <p:nvSpPr>
-              <p:cNvPr id="92" name="文本框 91">
-                <a:extLst>
-                  <a:ext uri="{FF2B5EF4-FFF2-40B4-BE49-F238E27FC236}">
-                    <a16:creationId xmlns:a16="http://schemas.microsoft.com/office/drawing/2014/main" id="{B992A227-2841-40FC-B715-EDFEB4C7E30B}"/>
-                  </a:ext>
-                </a:extLst>
-              </p:cNvPr>
-              <p:cNvSpPr txBox="1"/>
-              <p:nvPr/>
-            </p:nvSpPr>
-            <p:spPr>
-              <a:xfrm>
-                <a:off x="10445800" y="3143001"/>
-                <a:ext cx="401468" cy="600228"/>
-              </a:xfrm>
-              <a:prstGeom prst="rect">
-                <a:avLst/>
-              </a:prstGeom>
-              <a:noFill/>
-            </p:spPr>
-            <p:txBody>
-              <a:bodyPr vert="eaVert" wrap="none" rtlCol="0">
-                <a:spAutoFit/>
-              </a:bodyPr>
-              <a:lstStyle/>
-              <a:p>
-                <a:r>
-                  <a:rPr lang="en-US" altLang="zh-CN" sz="1346" dirty="0">
-                    <a:latin typeface="宋体" panose="02010600030101010101" pitchFamily="2" charset="-122"/>
-                    <a:ea typeface="宋体" panose="02010600030101010101" pitchFamily="2" charset="-122"/>
-                  </a:rPr>
-                  <a:t>Gaussian</a:t>
-                </a:r>
-                <a:endParaRPr lang="zh-CN" altLang="en-US" sz="1346" dirty="0">
-                  <a:latin typeface="宋体" panose="02010600030101010101" pitchFamily="2" charset="-122"/>
-                  <a:ea typeface="宋体" panose="02010600030101010101" pitchFamily="2" charset="-122"/>
-                </a:endParaRPr>
-              </a:p>
-            </p:txBody>
-          </p:sp>
-        </p:grpSp>
-        <p:cxnSp>
-          <p:nvCxnSpPr>
-            <p:cNvPr id="94" name="直接箭头连接符 93">
-              <a:extLst>
-                <a:ext uri="{FF2B5EF4-FFF2-40B4-BE49-F238E27FC236}">
-                  <a16:creationId xmlns:a16="http://schemas.microsoft.com/office/drawing/2014/main" id="{3BF42F79-1C8B-493C-B374-7DED857759B0}"/>
-                </a:ext>
-              </a:extLst>
-            </p:cNvPr>
-            <p:cNvCxnSpPr>
-              <a:cxnSpLocks/>
-            </p:cNvCxnSpPr>
-            <p:nvPr/>
-          </p:nvCxnSpPr>
-          <p:spPr>
-            <a:xfrm flipV="1">
-              <a:off x="7885695" y="1857163"/>
-              <a:ext cx="367113" cy="10925"/>
-            </a:xfrm>
-            <a:prstGeom prst="straightConnector1">
-              <a:avLst/>
-            </a:prstGeom>
-            <a:ln w="12700">
-              <a:tailEnd type="triangle"/>
-            </a:ln>
-          </p:spPr>
-          <p:style>
-            <a:lnRef idx="1">
-              <a:schemeClr val="dk1"/>
-            </a:lnRef>
-            <a:fillRef idx="0">
-              <a:schemeClr val="dk1"/>
-            </a:fillRef>
-            <a:effectRef idx="0">
-              <a:schemeClr val="dk1"/>
-            </a:effectRef>
-            <a:fontRef idx="minor">
-              <a:schemeClr val="tx1"/>
-            </a:fontRef>
-          </p:style>
-        </p:cxnSp>
-        <p:cxnSp>
-          <p:nvCxnSpPr>
-            <p:cNvPr id="95" name="直接箭头连接符 94">
-              <a:extLst>
-                <a:ext uri="{FF2B5EF4-FFF2-40B4-BE49-F238E27FC236}">
-                  <a16:creationId xmlns:a16="http://schemas.microsoft.com/office/drawing/2014/main" id="{D59A027B-83A1-4705-BC57-B97958C12052}"/>
-                </a:ext>
-              </a:extLst>
-            </p:cNvPr>
-            <p:cNvCxnSpPr>
-              <a:cxnSpLocks/>
-            </p:cNvCxnSpPr>
-            <p:nvPr/>
-          </p:nvCxnSpPr>
-          <p:spPr>
-            <a:xfrm flipV="1">
-              <a:off x="8512359" y="1848835"/>
-              <a:ext cx="571601" cy="6885"/>
-            </a:xfrm>
-            <a:prstGeom prst="straightConnector1">
-              <a:avLst/>
-            </a:prstGeom>
-            <a:ln w="12700">
-              <a:tailEnd type="triangle"/>
-            </a:ln>
-          </p:spPr>
-          <p:style>
-            <a:lnRef idx="1">
-              <a:schemeClr val="dk1"/>
-            </a:lnRef>
-            <a:fillRef idx="0">
-              <a:schemeClr val="dk1"/>
-            </a:fillRef>
-            <a:effectRef idx="0">
-              <a:schemeClr val="dk1"/>
-            </a:effectRef>
-            <a:fontRef idx="minor">
-              <a:schemeClr val="tx1"/>
-            </a:fontRef>
-          </p:style>
-        </p:cxnSp>
-        <p:grpSp>
-          <p:nvGrpSpPr>
-            <p:cNvPr id="96" name="组合 95">
-              <a:extLst>
-                <a:ext uri="{FF2B5EF4-FFF2-40B4-BE49-F238E27FC236}">
-                  <a16:creationId xmlns:a16="http://schemas.microsoft.com/office/drawing/2014/main" id="{D549B15C-C6EA-486C-8503-F8AF5F5DCA2B}"/>
-                </a:ext>
-              </a:extLst>
-            </p:cNvPr>
-            <p:cNvGrpSpPr/>
-            <p:nvPr/>
-          </p:nvGrpSpPr>
-          <p:grpSpPr>
-            <a:xfrm>
-              <a:off x="9005990" y="1486571"/>
-              <a:ext cx="391774" cy="737764"/>
-              <a:chOff x="10445800" y="3108130"/>
-              <a:chExt cx="401468" cy="651374"/>
-            </a:xfrm>
-            <a:solidFill>
-              <a:srgbClr val="E1D5E7"/>
-            </a:solidFill>
-          </p:grpSpPr>
-          <p:sp>
-            <p:nvSpPr>
-              <p:cNvPr id="97" name="矩形 96">
-                <a:extLst>
-                  <a:ext uri="{FF2B5EF4-FFF2-40B4-BE49-F238E27FC236}">
-                    <a16:creationId xmlns:a16="http://schemas.microsoft.com/office/drawing/2014/main" id="{4C9583DB-603E-49BD-A9BD-8F170A89BE54}"/>
-                  </a:ext>
-                </a:extLst>
-              </p:cNvPr>
-              <p:cNvSpPr/>
-              <p:nvPr/>
-            </p:nvSpPr>
-            <p:spPr>
-              <a:xfrm>
-                <a:off x="10536602" y="3108130"/>
-                <a:ext cx="252000" cy="623741"/>
-              </a:xfrm>
-              <a:prstGeom prst="rect">
-                <a:avLst/>
-              </a:prstGeom>
-              <a:grpFill/>
-              <a:ln>
-                <a:solidFill>
-                  <a:srgbClr val="696A6F"/>
-                </a:solidFill>
-              </a:ln>
-            </p:spPr>
-            <p:style>
-              <a:lnRef idx="2">
-                <a:schemeClr val="accent1">
-                  <a:shade val="50000"/>
-                </a:schemeClr>
-              </a:lnRef>
-              <a:fillRef idx="1">
-                <a:schemeClr val="accent1"/>
-              </a:fillRef>
-              <a:effectRef idx="0">
-                <a:schemeClr val="accent1"/>
-              </a:effectRef>
-              <a:fontRef idx="minor">
-                <a:schemeClr val="lt1"/>
-              </a:fontRef>
-            </p:style>
-            <p:txBody>
-              <a:bodyPr rtlCol="0" anchor="ctr"/>
-              <a:lstStyle/>
-              <a:p>
-                <a:pPr algn="ctr"/>
-                <a:endParaRPr lang="zh-CN" altLang="en-US" sz="1346" dirty="0">
-                  <a:solidFill>
-                    <a:schemeClr val="tx1"/>
-                  </a:solidFill>
-                  <a:latin typeface="宋体" panose="02010600030101010101" pitchFamily="2" charset="-122"/>
-                  <a:ea typeface="宋体" panose="02010600030101010101" pitchFamily="2" charset="-122"/>
-                </a:endParaRPr>
-              </a:p>
-            </p:txBody>
-          </p:sp>
-          <p:sp>
-            <p:nvSpPr>
-              <p:cNvPr id="98" name="文本框 97">
-                <a:extLst>
-                  <a:ext uri="{FF2B5EF4-FFF2-40B4-BE49-F238E27FC236}">
-                    <a16:creationId xmlns:a16="http://schemas.microsoft.com/office/drawing/2014/main" id="{74170AB7-AC8B-46B4-A728-51834107C42E}"/>
-                  </a:ext>
-                </a:extLst>
-              </p:cNvPr>
-              <p:cNvSpPr txBox="1"/>
-              <p:nvPr/>
-            </p:nvSpPr>
-            <p:spPr>
-              <a:xfrm>
-                <a:off x="10445800" y="3143001"/>
-                <a:ext cx="401468" cy="616503"/>
-              </a:xfrm>
-              <a:prstGeom prst="rect">
-                <a:avLst/>
-              </a:prstGeom>
-              <a:noFill/>
-            </p:spPr>
-            <p:txBody>
-              <a:bodyPr vert="eaVert" wrap="none" rtlCol="0">
-                <a:spAutoFit/>
-              </a:bodyPr>
-              <a:lstStyle/>
-              <a:p>
-                <a:r>
-                  <a:rPr lang="en-US" altLang="zh-CN" sz="1346" dirty="0">
-                    <a:latin typeface="宋体" panose="02010600030101010101" pitchFamily="2" charset="-122"/>
-                    <a:ea typeface="宋体" panose="02010600030101010101" pitchFamily="2" charset="-122"/>
-                  </a:rPr>
-                  <a:t>Rescale</a:t>
-                </a:r>
-                <a:endParaRPr lang="zh-CN" altLang="en-US" sz="1346" dirty="0">
-                  <a:latin typeface="宋体" panose="02010600030101010101" pitchFamily="2" charset="-122"/>
-                  <a:ea typeface="宋体" panose="02010600030101010101" pitchFamily="2" charset="-122"/>
-                </a:endParaRPr>
-              </a:p>
-            </p:txBody>
-          </p:sp>
-        </p:grpSp>
-        <p:cxnSp>
-          <p:nvCxnSpPr>
-            <p:cNvPr id="100" name="直接箭头连接符 99">
-              <a:extLst>
-                <a:ext uri="{FF2B5EF4-FFF2-40B4-BE49-F238E27FC236}">
-                  <a16:creationId xmlns:a16="http://schemas.microsoft.com/office/drawing/2014/main" id="{C4EC3CBA-DE21-4136-A5CA-70D6633C75A6}"/>
-                </a:ext>
-              </a:extLst>
-            </p:cNvPr>
-            <p:cNvCxnSpPr>
-              <a:cxnSpLocks/>
-            </p:cNvCxnSpPr>
-            <p:nvPr/>
-          </p:nvCxnSpPr>
-          <p:spPr>
-            <a:xfrm flipV="1">
-              <a:off x="9351221" y="1839797"/>
-              <a:ext cx="502266" cy="2703"/>
-            </a:xfrm>
-            <a:prstGeom prst="straightConnector1">
-              <a:avLst/>
-            </a:prstGeom>
-            <a:ln w="12700">
-              <a:tailEnd type="triangle"/>
-            </a:ln>
-          </p:spPr>
-          <p:style>
-            <a:lnRef idx="1">
-              <a:schemeClr val="dk1"/>
-            </a:lnRef>
-            <a:fillRef idx="0">
-              <a:schemeClr val="dk1"/>
-            </a:fillRef>
-            <a:effectRef idx="0">
-              <a:schemeClr val="dk1"/>
-            </a:effectRef>
-            <a:fontRef idx="minor">
-              <a:schemeClr val="tx1"/>
-            </a:fontRef>
-          </p:style>
-        </p:cxnSp>
-        <p:cxnSp>
-          <p:nvCxnSpPr>
-            <p:cNvPr id="102" name="直接箭头连接符 101">
-              <a:extLst>
-                <a:ext uri="{FF2B5EF4-FFF2-40B4-BE49-F238E27FC236}">
-                  <a16:creationId xmlns:a16="http://schemas.microsoft.com/office/drawing/2014/main" id="{7F8274A2-8FE3-4E5D-A3D9-511F86F9D27A}"/>
-                </a:ext>
-              </a:extLst>
-            </p:cNvPr>
-            <p:cNvCxnSpPr>
-              <a:cxnSpLocks/>
-            </p:cNvCxnSpPr>
-            <p:nvPr/>
-          </p:nvCxnSpPr>
-          <p:spPr>
-            <a:xfrm>
-              <a:off x="9668421" y="2681274"/>
-              <a:ext cx="287530" cy="0"/>
-            </a:xfrm>
-            <a:prstGeom prst="straightConnector1">
-              <a:avLst/>
-            </a:prstGeom>
-            <a:ln w="12700">
-              <a:tailEnd type="triangle"/>
-            </a:ln>
-          </p:spPr>
-          <p:style>
-            <a:lnRef idx="1">
-              <a:schemeClr val="dk1"/>
-            </a:lnRef>
-            <a:fillRef idx="0">
-              <a:schemeClr val="dk1"/>
-            </a:fillRef>
-            <a:effectRef idx="0">
-              <a:schemeClr val="dk1"/>
-            </a:effectRef>
-            <a:fontRef idx="minor">
-              <a:schemeClr val="tx1"/>
-            </a:fontRef>
-          </p:style>
-        </p:cxnSp>
-        <p:sp>
-          <p:nvSpPr>
-            <p:cNvPr id="103" name="文本框 102">
-              <a:extLst>
-                <a:ext uri="{FF2B5EF4-FFF2-40B4-BE49-F238E27FC236}">
-                  <a16:creationId xmlns:a16="http://schemas.microsoft.com/office/drawing/2014/main" id="{208F714B-4883-4A2F-B933-378BBCFB381C}"/>
-                </a:ext>
-              </a:extLst>
-            </p:cNvPr>
-            <p:cNvSpPr txBox="1"/>
-            <p:nvPr/>
-          </p:nvSpPr>
-          <p:spPr>
-            <a:xfrm>
-              <a:off x="9816661" y="1578350"/>
-              <a:ext cx="687219" cy="506549"/>
-            </a:xfrm>
-            <a:prstGeom prst="rect">
-              <a:avLst/>
-            </a:prstGeom>
-            <a:noFill/>
-          </p:spPr>
-          <p:txBody>
-            <a:bodyPr wrap="square" rtlCol="0">
-              <a:spAutoFit/>
-            </a:bodyPr>
-            <a:lstStyle/>
-            <a:p>
-              <a:r>
-                <a:rPr lang="zh-CN" altLang="en-US" sz="1346" dirty="0">
-                  <a:solidFill>
-                    <a:srgbClr val="9D0D55"/>
-                  </a:solidFill>
-                  <a:latin typeface="宋体" panose="02010600030101010101" pitchFamily="2" charset="-122"/>
-                  <a:ea typeface="宋体" panose="02010600030101010101" pitchFamily="2" charset="-122"/>
-                </a:rPr>
-                <a:t>先验关联</a:t>
-              </a:r>
-            </a:p>
-          </p:txBody>
-        </p:sp>
-        <p:sp>
-          <p:nvSpPr>
-            <p:cNvPr id="105" name="文本框 104">
-              <a:extLst>
-                <a:ext uri="{FF2B5EF4-FFF2-40B4-BE49-F238E27FC236}">
-                  <a16:creationId xmlns:a16="http://schemas.microsoft.com/office/drawing/2014/main" id="{75E99DBC-2EF2-4A82-9734-2A53E6273479}"/>
-                </a:ext>
-              </a:extLst>
-            </p:cNvPr>
-            <p:cNvSpPr txBox="1"/>
-            <p:nvPr/>
-          </p:nvSpPr>
-          <p:spPr>
-            <a:xfrm>
-              <a:off x="9888415" y="2411287"/>
-              <a:ext cx="668320" cy="506549"/>
-            </a:xfrm>
-            <a:prstGeom prst="rect">
-              <a:avLst/>
-            </a:prstGeom>
-            <a:noFill/>
-          </p:spPr>
-          <p:txBody>
-            <a:bodyPr wrap="square" rtlCol="0">
-              <a:spAutoFit/>
-            </a:bodyPr>
-            <a:lstStyle/>
-            <a:p>
-              <a:r>
-                <a:rPr lang="zh-CN" altLang="en-US" sz="1346" dirty="0">
-                  <a:solidFill>
-                    <a:srgbClr val="5151B4"/>
-                  </a:solidFill>
-                  <a:latin typeface="宋体" panose="02010600030101010101" pitchFamily="2" charset="-122"/>
-                  <a:ea typeface="宋体" panose="02010600030101010101" pitchFamily="2" charset="-122"/>
-                </a:rPr>
-                <a:t>序列关联</a:t>
-              </a:r>
-            </a:p>
-          </p:txBody>
-        </p:sp>
-        <p:sp>
-          <p:nvSpPr>
-            <p:cNvPr id="106" name="文本框 105">
-              <a:extLst>
-                <a:ext uri="{FF2B5EF4-FFF2-40B4-BE49-F238E27FC236}">
-                  <a16:creationId xmlns:a16="http://schemas.microsoft.com/office/drawing/2014/main" id="{99B07157-56CB-46CF-A62D-850C213994C6}"/>
-                </a:ext>
-              </a:extLst>
-            </p:cNvPr>
-            <p:cNvSpPr txBox="1"/>
-            <p:nvPr/>
-          </p:nvSpPr>
-          <p:spPr>
-            <a:xfrm>
-              <a:off x="10886693" y="1578350"/>
-              <a:ext cx="762377" cy="506549"/>
-            </a:xfrm>
-            <a:prstGeom prst="rect">
-              <a:avLst/>
-            </a:prstGeom>
-            <a:noFill/>
-          </p:spPr>
-          <p:txBody>
-            <a:bodyPr wrap="square" rtlCol="0">
-              <a:spAutoFit/>
-            </a:bodyPr>
-            <a:lstStyle/>
-            <a:p>
-              <a:r>
-                <a:rPr lang="zh-CN" altLang="en-US" sz="1346" dirty="0">
-                  <a:latin typeface="宋体" panose="02010600030101010101" pitchFamily="2" charset="-122"/>
-                  <a:ea typeface="宋体" panose="02010600030101010101" pitchFamily="2" charset="-122"/>
-                </a:rPr>
-                <a:t>最小化阶段</a:t>
-              </a:r>
-            </a:p>
-          </p:txBody>
-        </p:sp>
-        <p:sp>
-          <p:nvSpPr>
-            <p:cNvPr id="107" name="文本框 106">
-              <a:extLst>
-                <a:ext uri="{FF2B5EF4-FFF2-40B4-BE49-F238E27FC236}">
-                  <a16:creationId xmlns:a16="http://schemas.microsoft.com/office/drawing/2014/main" id="{88766355-28B3-416B-B852-9C94D9F94EF5}"/>
-                </a:ext>
-              </a:extLst>
-            </p:cNvPr>
-            <p:cNvSpPr txBox="1"/>
-            <p:nvPr/>
-          </p:nvSpPr>
-          <p:spPr>
-            <a:xfrm>
-              <a:off x="10886694" y="2412711"/>
-              <a:ext cx="801170" cy="506549"/>
-            </a:xfrm>
-            <a:prstGeom prst="rect">
-              <a:avLst/>
-            </a:prstGeom>
-            <a:noFill/>
-          </p:spPr>
-          <p:txBody>
-            <a:bodyPr wrap="square" rtlCol="0">
-              <a:spAutoFit/>
-            </a:bodyPr>
-            <a:lstStyle/>
-            <a:p>
-              <a:r>
-                <a:rPr lang="zh-CN" altLang="en-US" sz="1346" dirty="0">
-                  <a:latin typeface="宋体" panose="02010600030101010101" pitchFamily="2" charset="-122"/>
-                  <a:ea typeface="宋体" panose="02010600030101010101" pitchFamily="2" charset="-122"/>
-                </a:rPr>
-                <a:t>最大化阶段</a:t>
-              </a:r>
-            </a:p>
-          </p:txBody>
-        </p:sp>
-        <p:cxnSp>
-          <p:nvCxnSpPr>
-            <p:cNvPr id="108" name="直接箭头连接符 107">
-              <a:extLst>
-                <a:ext uri="{FF2B5EF4-FFF2-40B4-BE49-F238E27FC236}">
-                  <a16:creationId xmlns:a16="http://schemas.microsoft.com/office/drawing/2014/main" id="{49FCF013-04CF-4B5C-BCD4-94D14CE7EEDF}"/>
-                </a:ext>
-              </a:extLst>
-            </p:cNvPr>
-            <p:cNvCxnSpPr>
-              <a:cxnSpLocks/>
-            </p:cNvCxnSpPr>
-            <p:nvPr/>
-          </p:nvCxnSpPr>
-          <p:spPr>
-            <a:xfrm flipV="1">
-              <a:off x="10314741" y="1963016"/>
-              <a:ext cx="502266" cy="2703"/>
-            </a:xfrm>
-            <a:prstGeom prst="straightConnector1">
-              <a:avLst/>
-            </a:prstGeom>
-            <a:ln w="12700">
-              <a:solidFill>
-                <a:srgbClr val="AD3E76"/>
-              </a:solidFill>
-              <a:tailEnd type="triangle"/>
-            </a:ln>
-          </p:spPr>
-          <p:style>
-            <a:lnRef idx="1">
-              <a:schemeClr val="dk1"/>
-            </a:lnRef>
-            <a:fillRef idx="0">
-              <a:schemeClr val="dk1"/>
-            </a:fillRef>
-            <a:effectRef idx="0">
-              <a:schemeClr val="dk1"/>
-            </a:effectRef>
-            <a:fontRef idx="minor">
-              <a:schemeClr val="tx1"/>
-            </a:fontRef>
-          </p:style>
-        </p:cxnSp>
-        <p:cxnSp>
-          <p:nvCxnSpPr>
-            <p:cNvPr id="109" name="直接箭头连接符 108">
-              <a:extLst>
-                <a:ext uri="{FF2B5EF4-FFF2-40B4-BE49-F238E27FC236}">
-                  <a16:creationId xmlns:a16="http://schemas.microsoft.com/office/drawing/2014/main" id="{DBE8C1A0-E6C2-44B3-B365-8E883C4AC92F}"/>
-                </a:ext>
-              </a:extLst>
-            </p:cNvPr>
-            <p:cNvCxnSpPr>
-              <a:cxnSpLocks/>
-            </p:cNvCxnSpPr>
-            <p:nvPr/>
-          </p:nvCxnSpPr>
-          <p:spPr>
-            <a:xfrm flipH="1">
-              <a:off x="10290526" y="1811721"/>
-              <a:ext cx="502266" cy="10328"/>
-            </a:xfrm>
-            <a:prstGeom prst="straightConnector1">
-              <a:avLst/>
-            </a:prstGeom>
-            <a:ln w="12700">
-              <a:solidFill>
-                <a:srgbClr val="AD3E76"/>
-              </a:solidFill>
-              <a:prstDash val="dash"/>
-              <a:tailEnd type="triangle"/>
-            </a:ln>
-          </p:spPr>
-          <p:style>
-            <a:lnRef idx="1">
-              <a:schemeClr val="dk1"/>
-            </a:lnRef>
-            <a:fillRef idx="0">
-              <a:schemeClr val="dk1"/>
-            </a:fillRef>
-            <a:effectRef idx="0">
-              <a:schemeClr val="dk1"/>
-            </a:effectRef>
-            <a:fontRef idx="minor">
-              <a:schemeClr val="tx1"/>
-            </a:fontRef>
-          </p:style>
-        </p:cxnSp>
-        <p:sp>
-          <p:nvSpPr>
-            <p:cNvPr id="115" name="文本框 114">
-              <a:extLst>
-                <a:ext uri="{FF2B5EF4-FFF2-40B4-BE49-F238E27FC236}">
-                  <a16:creationId xmlns:a16="http://schemas.microsoft.com/office/drawing/2014/main" id="{B828F2CA-9C5E-498B-A721-7BCCF859EC5F}"/>
-                </a:ext>
-              </a:extLst>
-            </p:cNvPr>
-            <p:cNvSpPr txBox="1"/>
-            <p:nvPr/>
-          </p:nvSpPr>
-          <p:spPr>
-            <a:xfrm>
-              <a:off x="10159890" y="1463103"/>
-              <a:ext cx="879106" cy="299441"/>
-            </a:xfrm>
-            <a:prstGeom prst="rect">
-              <a:avLst/>
-            </a:prstGeom>
-            <a:noFill/>
-          </p:spPr>
-          <p:txBody>
-            <a:bodyPr wrap="square" rtlCol="0">
-              <a:spAutoFit/>
-            </a:bodyPr>
-            <a:lstStyle/>
-            <a:p>
-              <a:r>
-                <a:rPr lang="zh-CN" altLang="en-US" sz="1346" dirty="0">
-                  <a:latin typeface="宋体" panose="02010600030101010101" pitchFamily="2" charset="-122"/>
-                  <a:ea typeface="宋体" panose="02010600030101010101" pitchFamily="2" charset="-122"/>
-                </a:rPr>
-                <a:t>梯度更新</a:t>
-              </a:r>
-            </a:p>
-          </p:txBody>
-        </p:sp>
-        <p:cxnSp>
-          <p:nvCxnSpPr>
-            <p:cNvPr id="116" name="直接箭头连接符 115">
-              <a:extLst>
-                <a:ext uri="{FF2B5EF4-FFF2-40B4-BE49-F238E27FC236}">
-                  <a16:creationId xmlns:a16="http://schemas.microsoft.com/office/drawing/2014/main" id="{EF625CD5-E91C-4E7B-AA26-133D8A3B6011}"/>
-                </a:ext>
-              </a:extLst>
-            </p:cNvPr>
-            <p:cNvCxnSpPr>
-              <a:cxnSpLocks/>
-            </p:cNvCxnSpPr>
-            <p:nvPr/>
-          </p:nvCxnSpPr>
-          <p:spPr>
-            <a:xfrm flipV="1">
-              <a:off x="10376261" y="2579849"/>
-              <a:ext cx="502266" cy="2703"/>
-            </a:xfrm>
-            <a:prstGeom prst="straightConnector1">
-              <a:avLst/>
-            </a:prstGeom>
-            <a:ln w="12700">
-              <a:solidFill>
-                <a:srgbClr val="5151B4"/>
-              </a:solidFill>
-              <a:tailEnd type="triangle"/>
-            </a:ln>
-          </p:spPr>
-          <p:style>
-            <a:lnRef idx="1">
-              <a:schemeClr val="dk1"/>
-            </a:lnRef>
-            <a:fillRef idx="0">
-              <a:schemeClr val="dk1"/>
-            </a:fillRef>
-            <a:effectRef idx="0">
-              <a:schemeClr val="dk1"/>
-            </a:effectRef>
-            <a:fontRef idx="minor">
-              <a:schemeClr val="tx1"/>
-            </a:fontRef>
-          </p:style>
-        </p:cxnSp>
-        <p:cxnSp>
-          <p:nvCxnSpPr>
-            <p:cNvPr id="117" name="直接箭头连接符 116">
-              <a:extLst>
-                <a:ext uri="{FF2B5EF4-FFF2-40B4-BE49-F238E27FC236}">
-                  <a16:creationId xmlns:a16="http://schemas.microsoft.com/office/drawing/2014/main" id="{6C06DB6F-34FC-4F7F-AF08-333E6F5FEC3C}"/>
-                </a:ext>
-              </a:extLst>
-            </p:cNvPr>
-            <p:cNvCxnSpPr>
-              <a:cxnSpLocks/>
-            </p:cNvCxnSpPr>
-            <p:nvPr/>
-          </p:nvCxnSpPr>
-          <p:spPr>
-            <a:xfrm flipH="1">
-              <a:off x="10352939" y="2795395"/>
-              <a:ext cx="502266" cy="10328"/>
-            </a:xfrm>
-            <a:prstGeom prst="straightConnector1">
-              <a:avLst/>
-            </a:prstGeom>
-            <a:ln w="12700">
-              <a:solidFill>
-                <a:srgbClr val="5151B4"/>
-              </a:solidFill>
-              <a:prstDash val="dash"/>
-              <a:tailEnd type="triangle"/>
-            </a:ln>
-          </p:spPr>
-          <p:style>
-            <a:lnRef idx="1">
-              <a:schemeClr val="dk1"/>
-            </a:lnRef>
-            <a:fillRef idx="0">
-              <a:schemeClr val="dk1"/>
-            </a:fillRef>
-            <a:effectRef idx="0">
-              <a:schemeClr val="dk1"/>
-            </a:effectRef>
-            <a:fontRef idx="minor">
-              <a:schemeClr val="tx1"/>
-            </a:fontRef>
-          </p:style>
-        </p:cxnSp>
-        <p:sp>
-          <p:nvSpPr>
-            <p:cNvPr id="118" name="文本框 117">
-              <a:extLst>
-                <a:ext uri="{FF2B5EF4-FFF2-40B4-BE49-F238E27FC236}">
-                  <a16:creationId xmlns:a16="http://schemas.microsoft.com/office/drawing/2014/main" id="{7273B439-CD38-4E95-AEF4-82CA06A81945}"/>
-                </a:ext>
-              </a:extLst>
-            </p:cNvPr>
-            <p:cNvSpPr txBox="1"/>
-            <p:nvPr/>
-          </p:nvSpPr>
-          <p:spPr>
-            <a:xfrm>
-              <a:off x="10232686" y="2827569"/>
-              <a:ext cx="922438" cy="299441"/>
-            </a:xfrm>
-            <a:prstGeom prst="rect">
-              <a:avLst/>
-            </a:prstGeom>
-            <a:noFill/>
-          </p:spPr>
-          <p:txBody>
-            <a:bodyPr wrap="square" rtlCol="0">
-              <a:spAutoFit/>
-            </a:bodyPr>
-            <a:lstStyle/>
-            <a:p>
-              <a:r>
-                <a:rPr lang="zh-CN" altLang="en-US" sz="1346" dirty="0">
-                  <a:latin typeface="宋体" panose="02010600030101010101" pitchFamily="2" charset="-122"/>
-                  <a:ea typeface="宋体" panose="02010600030101010101" pitchFamily="2" charset="-122"/>
-                </a:rPr>
-                <a:t>梯度更新</a:t>
-              </a:r>
-            </a:p>
-          </p:txBody>
-        </p:sp>
-        <p:sp>
-          <p:nvSpPr>
-            <p:cNvPr id="119" name="弧形 118">
-              <a:extLst>
-                <a:ext uri="{FF2B5EF4-FFF2-40B4-BE49-F238E27FC236}">
-                  <a16:creationId xmlns:a16="http://schemas.microsoft.com/office/drawing/2014/main" id="{C5916F63-1357-4AA7-8A79-CCDB9B562F2B}"/>
-                </a:ext>
-              </a:extLst>
-            </p:cNvPr>
-            <p:cNvSpPr/>
-            <p:nvPr/>
-          </p:nvSpPr>
-          <p:spPr>
-            <a:xfrm>
-              <a:off x="9355643" y="2008231"/>
-              <a:ext cx="1830896" cy="933087"/>
-            </a:xfrm>
-            <a:prstGeom prst="arc">
-              <a:avLst/>
-            </a:prstGeom>
-            <a:ln>
-              <a:solidFill>
-                <a:srgbClr val="AD3E76"/>
-              </a:solidFill>
-              <a:tailEnd type="triangle"/>
-            </a:ln>
-          </p:spPr>
-          <p:style>
-            <a:lnRef idx="1">
-              <a:schemeClr val="dk1"/>
-            </a:lnRef>
-            <a:fillRef idx="0">
-              <a:schemeClr val="dk1"/>
-            </a:fillRef>
-            <a:effectRef idx="0">
-              <a:schemeClr val="dk1"/>
-            </a:effectRef>
-            <a:fontRef idx="minor">
-              <a:schemeClr val="tx1"/>
-            </a:fontRef>
-          </p:style>
-          <p:txBody>
-            <a:bodyPr rtlCol="0" anchor="ctr"/>
-            <a:lstStyle/>
-            <a:p>
-              <a:pPr algn="ctr"/>
-              <a:endParaRPr lang="zh-CN" altLang="en-US" sz="2019"/>
-            </a:p>
-          </p:txBody>
-        </p:sp>
-        <p:sp>
-          <p:nvSpPr>
-            <p:cNvPr id="120" name="弧形 119">
-              <a:extLst>
-                <a:ext uri="{FF2B5EF4-FFF2-40B4-BE49-F238E27FC236}">
-                  <a16:creationId xmlns:a16="http://schemas.microsoft.com/office/drawing/2014/main" id="{96698B7E-4B59-4CE1-995B-EF9E002C2573}"/>
-                </a:ext>
-              </a:extLst>
-            </p:cNvPr>
-            <p:cNvSpPr/>
-            <p:nvPr/>
-          </p:nvSpPr>
-          <p:spPr>
-            <a:xfrm flipV="1">
-              <a:off x="9455040" y="1505384"/>
-              <a:ext cx="1731498" cy="1032266"/>
-            </a:xfrm>
-            <a:prstGeom prst="arc">
-              <a:avLst/>
-            </a:prstGeom>
-            <a:ln>
-              <a:solidFill>
-                <a:srgbClr val="5151B4"/>
-              </a:solidFill>
-              <a:tailEnd type="triangle"/>
-            </a:ln>
-          </p:spPr>
-          <p:style>
-            <a:lnRef idx="1">
-              <a:schemeClr val="dk1"/>
-            </a:lnRef>
-            <a:fillRef idx="0">
-              <a:schemeClr val="dk1"/>
-            </a:fillRef>
-            <a:effectRef idx="0">
-              <a:schemeClr val="dk1"/>
-            </a:effectRef>
-            <a:fontRef idx="minor">
-              <a:schemeClr val="tx1"/>
-            </a:fontRef>
-          </p:style>
-          <p:txBody>
-            <a:bodyPr rtlCol="0" anchor="ctr"/>
-            <a:lstStyle/>
-            <a:p>
-              <a:pPr algn="ctr"/>
-              <a:endParaRPr lang="zh-CN" altLang="en-US" sz="2019"/>
-            </a:p>
-          </p:txBody>
-        </p:sp>
-        <p:sp>
-          <p:nvSpPr>
-            <p:cNvPr id="154" name="矩形 153">
-              <a:extLst>
-                <a:ext uri="{FF2B5EF4-FFF2-40B4-BE49-F238E27FC236}">
-                  <a16:creationId xmlns:a16="http://schemas.microsoft.com/office/drawing/2014/main" id="{9020E91E-2046-43CA-92C6-2F256B06F82A}"/>
-                </a:ext>
-              </a:extLst>
-            </p:cNvPr>
-            <p:cNvSpPr/>
-            <p:nvPr/>
-          </p:nvSpPr>
-          <p:spPr>
-            <a:xfrm>
-              <a:off x="9807927" y="3198864"/>
-              <a:ext cx="633150" cy="287829"/>
+              <a:off x="10536602" y="3108130"/>
+              <a:ext cx="252000" cy="623741"/>
             </a:xfrm>
             <a:prstGeom prst="rect">
               <a:avLst/>
@@ -6907,10 +5478,10 @@
         </p:sp>
         <p:sp>
           <p:nvSpPr>
-            <p:cNvPr id="156" name="文本框 155">
+            <p:cNvPr id="74" name="文本框 73">
               <a:extLst>
                 <a:ext uri="{FF2B5EF4-FFF2-40B4-BE49-F238E27FC236}">
-                  <a16:creationId xmlns:a16="http://schemas.microsoft.com/office/drawing/2014/main" id="{B47100EF-058B-43D7-9C8B-B7D1B9FD7396}"/>
+                  <a16:creationId xmlns:a16="http://schemas.microsoft.com/office/drawing/2014/main" id="{3335AA1F-69F0-441A-B4D1-B900036A0227}"/>
                 </a:ext>
               </a:extLst>
             </p:cNvPr>
@@ -6919,8 +5490,8 @@
           </p:nvSpPr>
           <p:spPr>
             <a:xfrm>
-              <a:off x="9785208" y="3177373"/>
-              <a:ext cx="1031799" cy="299441"/>
+              <a:off x="10445800" y="3143001"/>
+              <a:ext cx="401468" cy="540078"/>
             </a:xfrm>
             <a:prstGeom prst="rect">
               <a:avLst/>
@@ -6928,7 +5499,7 @@
             <a:noFill/>
           </p:spPr>
           <p:txBody>
-            <a:bodyPr wrap="square" rtlCol="0">
+            <a:bodyPr vert="eaVert" wrap="none" rtlCol="0">
               <a:spAutoFit/>
             </a:bodyPr>
             <a:lstStyle/>
@@ -6947,230 +5518,12 @@
             </a:p>
           </p:txBody>
         </p:sp>
-        <p:cxnSp>
-          <p:nvCxnSpPr>
-            <p:cNvPr id="157" name="直接箭头连接符 156">
+        <p:sp>
+          <p:nvSpPr>
+            <p:cNvPr id="170" name="文本框 169">
               <a:extLst>
                 <a:ext uri="{FF2B5EF4-FFF2-40B4-BE49-F238E27FC236}">
-                  <a16:creationId xmlns:a16="http://schemas.microsoft.com/office/drawing/2014/main" id="{1AB92DC6-D59C-4F8A-AD97-F0CB84DD2568}"/>
-                </a:ext>
-              </a:extLst>
-            </p:cNvPr>
-            <p:cNvCxnSpPr>
-              <a:cxnSpLocks/>
-              <a:endCxn id="156" idx="1"/>
-            </p:cNvCxnSpPr>
-            <p:nvPr/>
-          </p:nvCxnSpPr>
-          <p:spPr>
-            <a:xfrm flipV="1">
-              <a:off x="8312403" y="3327094"/>
-              <a:ext cx="1472805" cy="5345"/>
-            </a:xfrm>
-            <a:prstGeom prst="straightConnector1">
-              <a:avLst/>
-            </a:prstGeom>
-            <a:ln w="12700">
-              <a:tailEnd type="triangle"/>
-            </a:ln>
-          </p:spPr>
-          <p:style>
-            <a:lnRef idx="1">
-              <a:schemeClr val="dk1"/>
-            </a:lnRef>
-            <a:fillRef idx="0">
-              <a:schemeClr val="dk1"/>
-            </a:fillRef>
-            <a:effectRef idx="0">
-              <a:schemeClr val="dk1"/>
-            </a:effectRef>
-            <a:fontRef idx="minor">
-              <a:schemeClr val="tx1"/>
-            </a:fontRef>
-          </p:style>
-        </p:cxnSp>
-        <p:cxnSp>
-          <p:nvCxnSpPr>
-            <p:cNvPr id="159" name="直接箭头连接符 158">
-              <a:extLst>
-                <a:ext uri="{FF2B5EF4-FFF2-40B4-BE49-F238E27FC236}">
-                  <a16:creationId xmlns:a16="http://schemas.microsoft.com/office/drawing/2014/main" id="{B32022F0-A0D4-4BAD-9C33-9CE3267EF815}"/>
-                </a:ext>
-              </a:extLst>
-            </p:cNvPr>
-            <p:cNvCxnSpPr>
-              <a:cxnSpLocks/>
-            </p:cNvCxnSpPr>
-            <p:nvPr/>
-          </p:nvCxnSpPr>
-          <p:spPr>
-            <a:xfrm>
-              <a:off x="10128718" y="2904018"/>
-              <a:ext cx="0" cy="264249"/>
-            </a:xfrm>
-            <a:prstGeom prst="straightConnector1">
-              <a:avLst/>
-            </a:prstGeom>
-            <a:ln w="12700">
-              <a:tailEnd type="triangle"/>
-            </a:ln>
-          </p:spPr>
-          <p:style>
-            <a:lnRef idx="1">
-              <a:schemeClr val="dk1"/>
-            </a:lnRef>
-            <a:fillRef idx="0">
-              <a:schemeClr val="dk1"/>
-            </a:fillRef>
-            <a:effectRef idx="0">
-              <a:schemeClr val="dk1"/>
-            </a:effectRef>
-            <a:fontRef idx="minor">
-              <a:schemeClr val="tx1"/>
-            </a:fontRef>
-          </p:style>
-        </p:cxnSp>
-        <p:cxnSp>
-          <p:nvCxnSpPr>
-            <p:cNvPr id="161" name="直接箭头连接符 160">
-              <a:extLst>
-                <a:ext uri="{FF2B5EF4-FFF2-40B4-BE49-F238E27FC236}">
-                  <a16:creationId xmlns:a16="http://schemas.microsoft.com/office/drawing/2014/main" id="{BD418802-8E90-4534-8FC8-32B8A62CD33C}"/>
-                </a:ext>
-              </a:extLst>
-            </p:cNvPr>
-            <p:cNvCxnSpPr>
-              <a:cxnSpLocks/>
-            </p:cNvCxnSpPr>
-            <p:nvPr/>
-          </p:nvCxnSpPr>
-          <p:spPr>
-            <a:xfrm>
-              <a:off x="10463796" y="3324600"/>
-              <a:ext cx="1475825" cy="0"/>
-            </a:xfrm>
-            <a:prstGeom prst="straightConnector1">
-              <a:avLst/>
-            </a:prstGeom>
-            <a:ln w="12700">
-              <a:tailEnd type="triangle"/>
-            </a:ln>
-          </p:spPr>
-          <p:style>
-            <a:lnRef idx="1">
-              <a:schemeClr val="dk1"/>
-            </a:lnRef>
-            <a:fillRef idx="0">
-              <a:schemeClr val="dk1"/>
-            </a:fillRef>
-            <a:effectRef idx="0">
-              <a:schemeClr val="dk1"/>
-            </a:effectRef>
-            <a:fontRef idx="minor">
-              <a:schemeClr val="tx1"/>
-            </a:fontRef>
-          </p:style>
-        </p:cxnSp>
-        <p:cxnSp>
-          <p:nvCxnSpPr>
-            <p:cNvPr id="164" name="直接箭头连接符 163">
-              <a:extLst>
-                <a:ext uri="{FF2B5EF4-FFF2-40B4-BE49-F238E27FC236}">
-                  <a16:creationId xmlns:a16="http://schemas.microsoft.com/office/drawing/2014/main" id="{8FF01081-6C20-457E-B00F-94B779B4FC61}"/>
-                </a:ext>
-              </a:extLst>
-            </p:cNvPr>
-            <p:cNvCxnSpPr>
-              <a:cxnSpLocks/>
-            </p:cNvCxnSpPr>
-            <p:nvPr/>
-          </p:nvCxnSpPr>
-          <p:spPr>
-            <a:xfrm>
-              <a:off x="11549963" y="3137523"/>
-              <a:ext cx="380721" cy="12853"/>
-            </a:xfrm>
-            <a:prstGeom prst="straightConnector1">
-              <a:avLst/>
-            </a:prstGeom>
-            <a:ln w="12700">
-              <a:solidFill>
-                <a:schemeClr val="bg1">
-                  <a:lumMod val="50000"/>
-                </a:schemeClr>
-              </a:solidFill>
-              <a:prstDash val="dash"/>
-              <a:tailEnd type="triangle"/>
-            </a:ln>
-          </p:spPr>
-          <p:style>
-            <a:lnRef idx="1">
-              <a:schemeClr val="dk1"/>
-            </a:lnRef>
-            <a:fillRef idx="0">
-              <a:schemeClr val="dk1"/>
-            </a:fillRef>
-            <a:effectRef idx="0">
-              <a:schemeClr val="dk1"/>
-            </a:effectRef>
-            <a:fontRef idx="minor">
-              <a:schemeClr val="tx1"/>
-            </a:fontRef>
-          </p:style>
-        </p:cxnSp>
-        <p:cxnSp>
-          <p:nvCxnSpPr>
-            <p:cNvPr id="167" name="直接箭头连接符 166">
-              <a:extLst>
-                <a:ext uri="{FF2B5EF4-FFF2-40B4-BE49-F238E27FC236}">
-                  <a16:creationId xmlns:a16="http://schemas.microsoft.com/office/drawing/2014/main" id="{D4E18100-DF71-4794-8F5C-DE223C34468E}"/>
-                </a:ext>
-              </a:extLst>
-            </p:cNvPr>
-            <p:cNvCxnSpPr>
-              <a:cxnSpLocks/>
-            </p:cNvCxnSpPr>
-            <p:nvPr/>
-          </p:nvCxnSpPr>
-          <p:spPr>
-            <a:xfrm>
-              <a:off x="11668737" y="2971584"/>
-              <a:ext cx="261944" cy="12853"/>
-            </a:xfrm>
-            <a:prstGeom prst="straightConnector1">
-              <a:avLst/>
-            </a:prstGeom>
-            <a:ln w="12700">
-              <a:solidFill>
-                <a:schemeClr val="bg1">
-                  <a:lumMod val="50000"/>
-                </a:schemeClr>
-              </a:solidFill>
-              <a:prstDash val="dash"/>
-              <a:tailEnd type="triangle"/>
-            </a:ln>
-          </p:spPr>
-          <p:style>
-            <a:lnRef idx="1">
-              <a:schemeClr val="dk1"/>
-            </a:lnRef>
-            <a:fillRef idx="0">
-              <a:schemeClr val="dk1"/>
-            </a:fillRef>
-            <a:effectRef idx="0">
-              <a:schemeClr val="dk1"/>
-            </a:effectRef>
-            <a:fontRef idx="minor">
-              <a:schemeClr val="tx1"/>
-            </a:fontRef>
-          </p:style>
-        </p:cxnSp>
-        <p:sp>
-          <p:nvSpPr>
-            <p:cNvPr id="258" name="文本框 257">
-              <a:extLst>
-                <a:ext uri="{FF2B5EF4-FFF2-40B4-BE49-F238E27FC236}">
-                  <a16:creationId xmlns:a16="http://schemas.microsoft.com/office/drawing/2014/main" id="{3FD92B6C-5915-46B0-8F73-6B21E96EB289}"/>
+                  <a16:creationId xmlns:a16="http://schemas.microsoft.com/office/drawing/2014/main" id="{A1CD4595-70F4-476C-90BE-CA72EB96A790}"/>
                 </a:ext>
               </a:extLst>
             </p:cNvPr>
@@ -7179,8 +5532,8 @@
           </p:nvSpPr>
           <p:spPr>
             <a:xfrm>
-              <a:off x="6820219" y="3797147"/>
-              <a:ext cx="2089034" cy="299441"/>
+              <a:off x="14186303" y="3560567"/>
+              <a:ext cx="401468" cy="540078"/>
             </a:xfrm>
             <a:prstGeom prst="rect">
               <a:avLst/>
@@ -7188,18 +5541,17 @@
             <a:noFill/>
           </p:spPr>
           <p:txBody>
-            <a:bodyPr wrap="none" rtlCol="0">
+            <a:bodyPr vert="eaVert" wrap="none" rtlCol="0">
               <a:spAutoFit/>
             </a:bodyPr>
             <a:lstStyle/>
             <a:p>
-              <a:pPr algn="ctr"/>
               <a:r>
                 <a:rPr lang="en-US" altLang="zh-CN" sz="1346" dirty="0">
                   <a:latin typeface="宋体" panose="02010600030101010101" pitchFamily="2" charset="-122"/>
                   <a:ea typeface="宋体" panose="02010600030101010101" pitchFamily="2" charset="-122"/>
                 </a:rPr>
-                <a:t>(c)Anomaly Transformer</a:t>
+                <a:t>Linear</a:t>
               </a:r>
               <a:endParaRPr lang="zh-CN" altLang="en-US" sz="1346" dirty="0">
                 <a:latin typeface="宋体" panose="02010600030101010101" pitchFamily="2" charset="-122"/>
@@ -7209,12 +5561,1165 @@
           </p:txBody>
         </p:sp>
       </p:grpSp>
-      <p:sp>
-        <p:nvSpPr>
-          <p:cNvPr id="185" name="矩形: 圆角 184">
+      <p:cxnSp>
+        <p:nvCxnSpPr>
+          <p:cNvPr id="75" name="直接箭头连接符 74">
             <a:extLst>
               <a:ext uri="{FF2B5EF4-FFF2-40B4-BE49-F238E27FC236}">
-                <a16:creationId xmlns:a16="http://schemas.microsoft.com/office/drawing/2014/main" id="{F567E3D4-7A99-4AB3-A068-7D742AF500B4}"/>
+                <a16:creationId xmlns:a16="http://schemas.microsoft.com/office/drawing/2014/main" id="{E3513E37-6A75-48A7-B1BF-1A0775885895}"/>
+              </a:ext>
+            </a:extLst>
+          </p:cNvPr>
+          <p:cNvCxnSpPr>
+            <a:cxnSpLocks/>
+          </p:cNvCxnSpPr>
+          <p:nvPr/>
+        </p:nvCxnSpPr>
+        <p:spPr>
+          <a:xfrm>
+            <a:off x="8122926" y="2689528"/>
+            <a:ext cx="324414" cy="0"/>
+          </a:xfrm>
+          <a:prstGeom prst="straightConnector1">
+            <a:avLst/>
+          </a:prstGeom>
+          <a:ln w="12700">
+            <a:tailEnd type="triangle"/>
+          </a:ln>
+        </p:spPr>
+        <p:style>
+          <a:lnRef idx="1">
+            <a:schemeClr val="dk1"/>
+          </a:lnRef>
+          <a:fillRef idx="0">
+            <a:schemeClr val="dk1"/>
+          </a:fillRef>
+          <a:effectRef idx="0">
+            <a:schemeClr val="dk1"/>
+          </a:effectRef>
+          <a:fontRef idx="minor">
+            <a:schemeClr val="tx1"/>
+          </a:fontRef>
+        </p:style>
+      </p:cxnSp>
+      <p:grpSp>
+        <p:nvGrpSpPr>
+          <p:cNvPr id="78" name="组合 77">
+            <a:extLst>
+              <a:ext uri="{FF2B5EF4-FFF2-40B4-BE49-F238E27FC236}">
+                <a16:creationId xmlns:a16="http://schemas.microsoft.com/office/drawing/2014/main" id="{9E50048C-E207-492D-87B1-1D572B33A360}"/>
+              </a:ext>
+            </a:extLst>
+          </p:cNvPr>
+          <p:cNvGrpSpPr/>
+          <p:nvPr/>
+        </p:nvGrpSpPr>
+        <p:grpSpPr>
+          <a:xfrm>
+            <a:off x="8359976" y="2336300"/>
+            <a:ext cx="391774" cy="706465"/>
+            <a:chOff x="10445800" y="3108130"/>
+            <a:chExt cx="401468" cy="623741"/>
+          </a:xfrm>
+          <a:solidFill>
+            <a:srgbClr val="E1D5E7"/>
+          </a:solidFill>
+        </p:grpSpPr>
+        <p:sp>
+          <p:nvSpPr>
+            <p:cNvPr id="79" name="矩形 78">
+              <a:extLst>
+                <a:ext uri="{FF2B5EF4-FFF2-40B4-BE49-F238E27FC236}">
+                  <a16:creationId xmlns:a16="http://schemas.microsoft.com/office/drawing/2014/main" id="{93E60CBF-41BA-4CFC-ABE0-82BA4992BA2B}"/>
+                </a:ext>
+              </a:extLst>
+            </p:cNvPr>
+            <p:cNvSpPr/>
+            <p:nvPr/>
+          </p:nvSpPr>
+          <p:spPr>
+            <a:xfrm>
+              <a:off x="10536602" y="3108130"/>
+              <a:ext cx="252000" cy="623741"/>
+            </a:xfrm>
+            <a:prstGeom prst="rect">
+              <a:avLst/>
+            </a:prstGeom>
+            <a:grpFill/>
+            <a:ln>
+              <a:solidFill>
+                <a:srgbClr val="696A6F"/>
+              </a:solidFill>
+            </a:ln>
+          </p:spPr>
+          <p:style>
+            <a:lnRef idx="2">
+              <a:schemeClr val="accent1">
+                <a:shade val="50000"/>
+              </a:schemeClr>
+            </a:lnRef>
+            <a:fillRef idx="1">
+              <a:schemeClr val="accent1"/>
+            </a:fillRef>
+            <a:effectRef idx="0">
+              <a:schemeClr val="accent1"/>
+            </a:effectRef>
+            <a:fontRef idx="minor">
+              <a:schemeClr val="lt1"/>
+            </a:fontRef>
+          </p:style>
+          <p:txBody>
+            <a:bodyPr rtlCol="0" anchor="ctr"/>
+            <a:lstStyle/>
+            <a:p>
+              <a:pPr algn="ctr"/>
+              <a:endParaRPr lang="zh-CN" altLang="en-US" sz="1346" dirty="0">
+                <a:solidFill>
+                  <a:schemeClr val="tx1"/>
+                </a:solidFill>
+                <a:latin typeface="宋体" panose="02010600030101010101" pitchFamily="2" charset="-122"/>
+                <a:ea typeface="宋体" panose="02010600030101010101" pitchFamily="2" charset="-122"/>
+              </a:endParaRPr>
+            </a:p>
+          </p:txBody>
+        </p:sp>
+        <p:sp>
+          <p:nvSpPr>
+            <p:cNvPr id="80" name="文本框 79">
+              <a:extLst>
+                <a:ext uri="{FF2B5EF4-FFF2-40B4-BE49-F238E27FC236}">
+                  <a16:creationId xmlns:a16="http://schemas.microsoft.com/office/drawing/2014/main" id="{D992505B-EB2B-4D0C-8987-791A337B96DC}"/>
+                </a:ext>
+              </a:extLst>
+            </p:cNvPr>
+            <p:cNvSpPr txBox="1"/>
+            <p:nvPr/>
+          </p:nvSpPr>
+          <p:spPr>
+            <a:xfrm>
+              <a:off x="10445800" y="3143001"/>
+              <a:ext cx="401468" cy="463652"/>
+            </a:xfrm>
+            <a:prstGeom prst="rect">
+              <a:avLst/>
+            </a:prstGeom>
+            <a:noFill/>
+          </p:spPr>
+          <p:txBody>
+            <a:bodyPr vert="eaVert" wrap="none" rtlCol="0">
+              <a:spAutoFit/>
+            </a:bodyPr>
+            <a:lstStyle/>
+            <a:p>
+              <a:r>
+                <a:rPr lang="en-US" altLang="zh-CN" sz="1346" dirty="0">
+                  <a:latin typeface="宋体" panose="02010600030101010101" pitchFamily="2" charset="-122"/>
+                  <a:ea typeface="宋体" panose="02010600030101010101" pitchFamily="2" charset="-122"/>
+                </a:rPr>
+                <a:t>Scale</a:t>
+              </a:r>
+              <a:endParaRPr lang="zh-CN" altLang="en-US" sz="1346" dirty="0">
+                <a:latin typeface="宋体" panose="02010600030101010101" pitchFamily="2" charset="-122"/>
+                <a:ea typeface="宋体" panose="02010600030101010101" pitchFamily="2" charset="-122"/>
+              </a:endParaRPr>
+            </a:p>
+          </p:txBody>
+        </p:sp>
+      </p:grpSp>
+      <p:grpSp>
+        <p:nvGrpSpPr>
+          <p:cNvPr id="82" name="组合 81">
+            <a:extLst>
+              <a:ext uri="{FF2B5EF4-FFF2-40B4-BE49-F238E27FC236}">
+                <a16:creationId xmlns:a16="http://schemas.microsoft.com/office/drawing/2014/main" id="{A16F286F-3AC1-4522-9AF4-31A7D119A4C6}"/>
+              </a:ext>
+            </a:extLst>
+          </p:cNvPr>
+          <p:cNvGrpSpPr/>
+          <p:nvPr/>
+        </p:nvGrpSpPr>
+        <p:grpSpPr>
+          <a:xfrm>
+            <a:off x="8944441" y="2331609"/>
+            <a:ext cx="391774" cy="737764"/>
+            <a:chOff x="10445800" y="3108130"/>
+            <a:chExt cx="401468" cy="651374"/>
+          </a:xfrm>
+          <a:solidFill>
+            <a:srgbClr val="FFCCCC"/>
+          </a:solidFill>
+        </p:grpSpPr>
+        <p:sp>
+          <p:nvSpPr>
+            <p:cNvPr id="83" name="矩形 82">
+              <a:extLst>
+                <a:ext uri="{FF2B5EF4-FFF2-40B4-BE49-F238E27FC236}">
+                  <a16:creationId xmlns:a16="http://schemas.microsoft.com/office/drawing/2014/main" id="{D26CF560-C1F0-4674-8708-F1B3131BB3E4}"/>
+                </a:ext>
+              </a:extLst>
+            </p:cNvPr>
+            <p:cNvSpPr/>
+            <p:nvPr/>
+          </p:nvSpPr>
+          <p:spPr>
+            <a:xfrm>
+              <a:off x="10536602" y="3108130"/>
+              <a:ext cx="252000" cy="623741"/>
+            </a:xfrm>
+            <a:prstGeom prst="rect">
+              <a:avLst/>
+            </a:prstGeom>
+            <a:grpFill/>
+            <a:ln>
+              <a:solidFill>
+                <a:srgbClr val="696A6F"/>
+              </a:solidFill>
+            </a:ln>
+          </p:spPr>
+          <p:style>
+            <a:lnRef idx="2">
+              <a:schemeClr val="accent1">
+                <a:shade val="50000"/>
+              </a:schemeClr>
+            </a:lnRef>
+            <a:fillRef idx="1">
+              <a:schemeClr val="accent1"/>
+            </a:fillRef>
+            <a:effectRef idx="0">
+              <a:schemeClr val="accent1"/>
+            </a:effectRef>
+            <a:fontRef idx="minor">
+              <a:schemeClr val="lt1"/>
+            </a:fontRef>
+          </p:style>
+          <p:txBody>
+            <a:bodyPr rtlCol="0" anchor="ctr"/>
+            <a:lstStyle/>
+            <a:p>
+              <a:pPr algn="ctr"/>
+              <a:endParaRPr lang="zh-CN" altLang="en-US" sz="1346" dirty="0">
+                <a:solidFill>
+                  <a:schemeClr val="tx1"/>
+                </a:solidFill>
+                <a:latin typeface="宋体" panose="02010600030101010101" pitchFamily="2" charset="-122"/>
+                <a:ea typeface="宋体" panose="02010600030101010101" pitchFamily="2" charset="-122"/>
+              </a:endParaRPr>
+            </a:p>
+          </p:txBody>
+        </p:sp>
+        <p:sp>
+          <p:nvSpPr>
+            <p:cNvPr id="84" name="文本框 83">
+              <a:extLst>
+                <a:ext uri="{FF2B5EF4-FFF2-40B4-BE49-F238E27FC236}">
+                  <a16:creationId xmlns:a16="http://schemas.microsoft.com/office/drawing/2014/main" id="{6387428D-6ADD-42AF-93A2-6621D8AB0C27}"/>
+                </a:ext>
+              </a:extLst>
+            </p:cNvPr>
+            <p:cNvSpPr txBox="1"/>
+            <p:nvPr/>
+          </p:nvSpPr>
+          <p:spPr>
+            <a:xfrm>
+              <a:off x="10445800" y="3143001"/>
+              <a:ext cx="401468" cy="616503"/>
+            </a:xfrm>
+            <a:prstGeom prst="rect">
+              <a:avLst/>
+            </a:prstGeom>
+            <a:noFill/>
+          </p:spPr>
+          <p:txBody>
+            <a:bodyPr vert="eaVert" wrap="none" rtlCol="0">
+              <a:spAutoFit/>
+            </a:bodyPr>
+            <a:lstStyle/>
+            <a:p>
+              <a:r>
+                <a:rPr lang="en-US" altLang="zh-CN" sz="1346" dirty="0">
+                  <a:latin typeface="宋体" panose="02010600030101010101" pitchFamily="2" charset="-122"/>
+                  <a:ea typeface="宋体" panose="02010600030101010101" pitchFamily="2" charset="-122"/>
+                </a:rPr>
+                <a:t>SoftMax</a:t>
+              </a:r>
+              <a:endParaRPr lang="zh-CN" altLang="en-US" sz="1346" dirty="0">
+                <a:latin typeface="宋体" panose="02010600030101010101" pitchFamily="2" charset="-122"/>
+                <a:ea typeface="宋体" panose="02010600030101010101" pitchFamily="2" charset="-122"/>
+              </a:endParaRPr>
+            </a:p>
+          </p:txBody>
+        </p:sp>
+      </p:grpSp>
+      <p:cxnSp>
+        <p:nvCxnSpPr>
+          <p:cNvPr id="85" name="直接箭头连接符 84">
+            <a:extLst>
+              <a:ext uri="{FF2B5EF4-FFF2-40B4-BE49-F238E27FC236}">
+                <a16:creationId xmlns:a16="http://schemas.microsoft.com/office/drawing/2014/main" id="{4CC4A59F-1304-42A7-81CB-71E61E76767B}"/>
+              </a:ext>
+            </a:extLst>
+          </p:cNvPr>
+          <p:cNvCxnSpPr>
+            <a:cxnSpLocks/>
+          </p:cNvCxnSpPr>
+          <p:nvPr/>
+        </p:nvCxnSpPr>
+        <p:spPr>
+          <a:xfrm>
+            <a:off x="8698972" y="2693375"/>
+            <a:ext cx="324414" cy="0"/>
+          </a:xfrm>
+          <a:prstGeom prst="straightConnector1">
+            <a:avLst/>
+          </a:prstGeom>
+          <a:ln w="12700">
+            <a:tailEnd type="triangle"/>
+          </a:ln>
+        </p:spPr>
+        <p:style>
+          <a:lnRef idx="1">
+            <a:schemeClr val="dk1"/>
+          </a:lnRef>
+          <a:fillRef idx="0">
+            <a:schemeClr val="dk1"/>
+          </a:fillRef>
+          <a:effectRef idx="0">
+            <a:schemeClr val="dk1"/>
+          </a:effectRef>
+          <a:fontRef idx="minor">
+            <a:schemeClr val="tx1"/>
+          </a:fontRef>
+        </p:style>
+      </p:cxnSp>
+      <p:grpSp>
+        <p:nvGrpSpPr>
+          <p:cNvPr id="90" name="组合 89">
+            <a:extLst>
+              <a:ext uri="{FF2B5EF4-FFF2-40B4-BE49-F238E27FC236}">
+                <a16:creationId xmlns:a16="http://schemas.microsoft.com/office/drawing/2014/main" id="{33387893-BC40-4F55-93D3-6D4704EAE327}"/>
+              </a:ext>
+            </a:extLst>
+          </p:cNvPr>
+          <p:cNvGrpSpPr/>
+          <p:nvPr/>
+        </p:nvGrpSpPr>
+        <p:grpSpPr>
+          <a:xfrm>
+            <a:off x="7785124" y="1461546"/>
+            <a:ext cx="391774" cy="830426"/>
+            <a:chOff x="10445800" y="3108130"/>
+            <a:chExt cx="401468" cy="635099"/>
+          </a:xfrm>
+        </p:grpSpPr>
+        <p:sp>
+          <p:nvSpPr>
+            <p:cNvPr id="91" name="矩形 90">
+              <a:extLst>
+                <a:ext uri="{FF2B5EF4-FFF2-40B4-BE49-F238E27FC236}">
+                  <a16:creationId xmlns:a16="http://schemas.microsoft.com/office/drawing/2014/main" id="{78C5BC86-2C82-4958-BB4C-229A7134D39C}"/>
+                </a:ext>
+              </a:extLst>
+            </p:cNvPr>
+            <p:cNvSpPr/>
+            <p:nvPr/>
+          </p:nvSpPr>
+          <p:spPr>
+            <a:xfrm>
+              <a:off x="10536602" y="3108130"/>
+              <a:ext cx="252000" cy="623741"/>
+            </a:xfrm>
+            <a:prstGeom prst="rect">
+              <a:avLst/>
+            </a:prstGeom>
+            <a:solidFill>
+              <a:srgbClr val="DAE8FC"/>
+            </a:solidFill>
+            <a:ln>
+              <a:solidFill>
+                <a:srgbClr val="696A6F"/>
+              </a:solidFill>
+            </a:ln>
+          </p:spPr>
+          <p:style>
+            <a:lnRef idx="2">
+              <a:schemeClr val="accent1">
+                <a:shade val="50000"/>
+              </a:schemeClr>
+            </a:lnRef>
+            <a:fillRef idx="1">
+              <a:schemeClr val="accent1"/>
+            </a:fillRef>
+            <a:effectRef idx="0">
+              <a:schemeClr val="accent1"/>
+            </a:effectRef>
+            <a:fontRef idx="minor">
+              <a:schemeClr val="lt1"/>
+            </a:fontRef>
+          </p:style>
+          <p:txBody>
+            <a:bodyPr rtlCol="0" anchor="ctr"/>
+            <a:lstStyle/>
+            <a:p>
+              <a:pPr algn="ctr"/>
+              <a:endParaRPr lang="zh-CN" altLang="en-US" sz="1346" dirty="0">
+                <a:solidFill>
+                  <a:schemeClr val="tx1"/>
+                </a:solidFill>
+                <a:latin typeface="宋体" panose="02010600030101010101" pitchFamily="2" charset="-122"/>
+                <a:ea typeface="宋体" panose="02010600030101010101" pitchFamily="2" charset="-122"/>
+              </a:endParaRPr>
+            </a:p>
+          </p:txBody>
+        </p:sp>
+        <p:sp>
+          <p:nvSpPr>
+            <p:cNvPr id="92" name="文本框 91">
+              <a:extLst>
+                <a:ext uri="{FF2B5EF4-FFF2-40B4-BE49-F238E27FC236}">
+                  <a16:creationId xmlns:a16="http://schemas.microsoft.com/office/drawing/2014/main" id="{B992A227-2841-40FC-B715-EDFEB4C7E30B}"/>
+                </a:ext>
+              </a:extLst>
+            </p:cNvPr>
+            <p:cNvSpPr txBox="1"/>
+            <p:nvPr/>
+          </p:nvSpPr>
+          <p:spPr>
+            <a:xfrm>
+              <a:off x="10445800" y="3143001"/>
+              <a:ext cx="401468" cy="600228"/>
+            </a:xfrm>
+            <a:prstGeom prst="rect">
+              <a:avLst/>
+            </a:prstGeom>
+            <a:noFill/>
+          </p:spPr>
+          <p:txBody>
+            <a:bodyPr vert="eaVert" wrap="none" rtlCol="0">
+              <a:spAutoFit/>
+            </a:bodyPr>
+            <a:lstStyle/>
+            <a:p>
+              <a:r>
+                <a:rPr lang="en-US" altLang="zh-CN" sz="1346" dirty="0">
+                  <a:latin typeface="宋体" panose="02010600030101010101" pitchFamily="2" charset="-122"/>
+                  <a:ea typeface="宋体" panose="02010600030101010101" pitchFamily="2" charset="-122"/>
+                </a:rPr>
+                <a:t>Gaussian</a:t>
+              </a:r>
+              <a:endParaRPr lang="zh-CN" altLang="en-US" sz="1346" dirty="0">
+                <a:latin typeface="宋体" panose="02010600030101010101" pitchFamily="2" charset="-122"/>
+                <a:ea typeface="宋体" panose="02010600030101010101" pitchFamily="2" charset="-122"/>
+              </a:endParaRPr>
+            </a:p>
+          </p:txBody>
+        </p:sp>
+      </p:grpSp>
+      <p:cxnSp>
+        <p:nvCxnSpPr>
+          <p:cNvPr id="94" name="直接箭头连接符 93">
+            <a:extLst>
+              <a:ext uri="{FF2B5EF4-FFF2-40B4-BE49-F238E27FC236}">
+                <a16:creationId xmlns:a16="http://schemas.microsoft.com/office/drawing/2014/main" id="{3BF42F79-1C8B-493C-B374-7DED857759B0}"/>
+              </a:ext>
+            </a:extLst>
+          </p:cNvPr>
+          <p:cNvCxnSpPr>
+            <a:cxnSpLocks/>
+          </p:cNvCxnSpPr>
+          <p:nvPr/>
+        </p:nvCxnSpPr>
+        <p:spPr>
+          <a:xfrm flipV="1">
+            <a:off x="7496266" y="1869264"/>
+            <a:ext cx="367113" cy="10925"/>
+          </a:xfrm>
+          <a:prstGeom prst="straightConnector1">
+            <a:avLst/>
+          </a:prstGeom>
+          <a:ln w="12700">
+            <a:tailEnd type="triangle"/>
+          </a:ln>
+        </p:spPr>
+        <p:style>
+          <a:lnRef idx="1">
+            <a:schemeClr val="dk1"/>
+          </a:lnRef>
+          <a:fillRef idx="0">
+            <a:schemeClr val="dk1"/>
+          </a:fillRef>
+          <a:effectRef idx="0">
+            <a:schemeClr val="dk1"/>
+          </a:effectRef>
+          <a:fontRef idx="minor">
+            <a:schemeClr val="tx1"/>
+          </a:fontRef>
+        </p:style>
+      </p:cxnSp>
+      <p:cxnSp>
+        <p:nvCxnSpPr>
+          <p:cNvPr id="95" name="直接箭头连接符 94">
+            <a:extLst>
+              <a:ext uri="{FF2B5EF4-FFF2-40B4-BE49-F238E27FC236}">
+                <a16:creationId xmlns:a16="http://schemas.microsoft.com/office/drawing/2014/main" id="{D59A027B-83A1-4705-BC57-B97958C12052}"/>
+              </a:ext>
+            </a:extLst>
+          </p:cNvPr>
+          <p:cNvCxnSpPr>
+            <a:cxnSpLocks/>
+          </p:cNvCxnSpPr>
+          <p:nvPr/>
+        </p:nvCxnSpPr>
+        <p:spPr>
+          <a:xfrm flipV="1">
+            <a:off x="8122930" y="1860936"/>
+            <a:ext cx="571601" cy="6885"/>
+          </a:xfrm>
+          <a:prstGeom prst="straightConnector1">
+            <a:avLst/>
+          </a:prstGeom>
+          <a:ln w="12700">
+            <a:tailEnd type="triangle"/>
+          </a:ln>
+        </p:spPr>
+        <p:style>
+          <a:lnRef idx="1">
+            <a:schemeClr val="dk1"/>
+          </a:lnRef>
+          <a:fillRef idx="0">
+            <a:schemeClr val="dk1"/>
+          </a:fillRef>
+          <a:effectRef idx="0">
+            <a:schemeClr val="dk1"/>
+          </a:effectRef>
+          <a:fontRef idx="minor">
+            <a:schemeClr val="tx1"/>
+          </a:fontRef>
+        </p:style>
+      </p:cxnSp>
+      <p:grpSp>
+        <p:nvGrpSpPr>
+          <p:cNvPr id="96" name="组合 95">
+            <a:extLst>
+              <a:ext uri="{FF2B5EF4-FFF2-40B4-BE49-F238E27FC236}">
+                <a16:creationId xmlns:a16="http://schemas.microsoft.com/office/drawing/2014/main" id="{D549B15C-C6EA-486C-8503-F8AF5F5DCA2B}"/>
+              </a:ext>
+            </a:extLst>
+          </p:cNvPr>
+          <p:cNvGrpSpPr/>
+          <p:nvPr/>
+        </p:nvGrpSpPr>
+        <p:grpSpPr>
+          <a:xfrm>
+            <a:off x="8616561" y="1498672"/>
+            <a:ext cx="391774" cy="737764"/>
+            <a:chOff x="10445800" y="3108130"/>
+            <a:chExt cx="401468" cy="651374"/>
+          </a:xfrm>
+          <a:solidFill>
+            <a:srgbClr val="E1D5E7"/>
+          </a:solidFill>
+        </p:grpSpPr>
+        <p:sp>
+          <p:nvSpPr>
+            <p:cNvPr id="97" name="矩形 96">
+              <a:extLst>
+                <a:ext uri="{FF2B5EF4-FFF2-40B4-BE49-F238E27FC236}">
+                  <a16:creationId xmlns:a16="http://schemas.microsoft.com/office/drawing/2014/main" id="{4C9583DB-603E-49BD-A9BD-8F170A89BE54}"/>
+                </a:ext>
+              </a:extLst>
+            </p:cNvPr>
+            <p:cNvSpPr/>
+            <p:nvPr/>
+          </p:nvSpPr>
+          <p:spPr>
+            <a:xfrm>
+              <a:off x="10536602" y="3108130"/>
+              <a:ext cx="252000" cy="623741"/>
+            </a:xfrm>
+            <a:prstGeom prst="rect">
+              <a:avLst/>
+            </a:prstGeom>
+            <a:grpFill/>
+            <a:ln>
+              <a:solidFill>
+                <a:srgbClr val="696A6F"/>
+              </a:solidFill>
+            </a:ln>
+          </p:spPr>
+          <p:style>
+            <a:lnRef idx="2">
+              <a:schemeClr val="accent1">
+                <a:shade val="50000"/>
+              </a:schemeClr>
+            </a:lnRef>
+            <a:fillRef idx="1">
+              <a:schemeClr val="accent1"/>
+            </a:fillRef>
+            <a:effectRef idx="0">
+              <a:schemeClr val="accent1"/>
+            </a:effectRef>
+            <a:fontRef idx="minor">
+              <a:schemeClr val="lt1"/>
+            </a:fontRef>
+          </p:style>
+          <p:txBody>
+            <a:bodyPr rtlCol="0" anchor="ctr"/>
+            <a:lstStyle/>
+            <a:p>
+              <a:pPr algn="ctr"/>
+              <a:endParaRPr lang="zh-CN" altLang="en-US" sz="1346" dirty="0">
+                <a:solidFill>
+                  <a:schemeClr val="tx1"/>
+                </a:solidFill>
+                <a:latin typeface="宋体" panose="02010600030101010101" pitchFamily="2" charset="-122"/>
+                <a:ea typeface="宋体" panose="02010600030101010101" pitchFamily="2" charset="-122"/>
+              </a:endParaRPr>
+            </a:p>
+          </p:txBody>
+        </p:sp>
+        <p:sp>
+          <p:nvSpPr>
+            <p:cNvPr id="98" name="文本框 97">
+              <a:extLst>
+                <a:ext uri="{FF2B5EF4-FFF2-40B4-BE49-F238E27FC236}">
+                  <a16:creationId xmlns:a16="http://schemas.microsoft.com/office/drawing/2014/main" id="{74170AB7-AC8B-46B4-A728-51834107C42E}"/>
+                </a:ext>
+              </a:extLst>
+            </p:cNvPr>
+            <p:cNvSpPr txBox="1"/>
+            <p:nvPr/>
+          </p:nvSpPr>
+          <p:spPr>
+            <a:xfrm>
+              <a:off x="10445800" y="3143001"/>
+              <a:ext cx="401468" cy="616503"/>
+            </a:xfrm>
+            <a:prstGeom prst="rect">
+              <a:avLst/>
+            </a:prstGeom>
+            <a:noFill/>
+          </p:spPr>
+          <p:txBody>
+            <a:bodyPr vert="eaVert" wrap="none" rtlCol="0">
+              <a:spAutoFit/>
+            </a:bodyPr>
+            <a:lstStyle/>
+            <a:p>
+              <a:r>
+                <a:rPr lang="en-US" altLang="zh-CN" sz="1346" dirty="0">
+                  <a:latin typeface="宋体" panose="02010600030101010101" pitchFamily="2" charset="-122"/>
+                  <a:ea typeface="宋体" panose="02010600030101010101" pitchFamily="2" charset="-122"/>
+                </a:rPr>
+                <a:t>Rescale</a:t>
+              </a:r>
+              <a:endParaRPr lang="zh-CN" altLang="en-US" sz="1346" dirty="0">
+                <a:latin typeface="宋体" panose="02010600030101010101" pitchFamily="2" charset="-122"/>
+                <a:ea typeface="宋体" panose="02010600030101010101" pitchFamily="2" charset="-122"/>
+              </a:endParaRPr>
+            </a:p>
+          </p:txBody>
+        </p:sp>
+      </p:grpSp>
+      <p:cxnSp>
+        <p:nvCxnSpPr>
+          <p:cNvPr id="100" name="直接箭头连接符 99">
+            <a:extLst>
+              <a:ext uri="{FF2B5EF4-FFF2-40B4-BE49-F238E27FC236}">
+                <a16:creationId xmlns:a16="http://schemas.microsoft.com/office/drawing/2014/main" id="{C4EC3CBA-DE21-4136-A5CA-70D6633C75A6}"/>
+              </a:ext>
+            </a:extLst>
+          </p:cNvPr>
+          <p:cNvCxnSpPr>
+            <a:cxnSpLocks/>
+          </p:cNvCxnSpPr>
+          <p:nvPr/>
+        </p:nvCxnSpPr>
+        <p:spPr>
+          <a:xfrm flipV="1">
+            <a:off x="8961792" y="1851898"/>
+            <a:ext cx="502266" cy="2703"/>
+          </a:xfrm>
+          <a:prstGeom prst="straightConnector1">
+            <a:avLst/>
+          </a:prstGeom>
+          <a:ln w="12700">
+            <a:tailEnd type="triangle"/>
+          </a:ln>
+        </p:spPr>
+        <p:style>
+          <a:lnRef idx="1">
+            <a:schemeClr val="dk1"/>
+          </a:lnRef>
+          <a:fillRef idx="0">
+            <a:schemeClr val="dk1"/>
+          </a:fillRef>
+          <a:effectRef idx="0">
+            <a:schemeClr val="dk1"/>
+          </a:effectRef>
+          <a:fontRef idx="minor">
+            <a:schemeClr val="tx1"/>
+          </a:fontRef>
+        </p:style>
+      </p:cxnSp>
+      <p:cxnSp>
+        <p:nvCxnSpPr>
+          <p:cNvPr id="102" name="直接箭头连接符 101">
+            <a:extLst>
+              <a:ext uri="{FF2B5EF4-FFF2-40B4-BE49-F238E27FC236}">
+                <a16:creationId xmlns:a16="http://schemas.microsoft.com/office/drawing/2014/main" id="{7F8274A2-8FE3-4E5D-A3D9-511F86F9D27A}"/>
+              </a:ext>
+            </a:extLst>
+          </p:cNvPr>
+          <p:cNvCxnSpPr>
+            <a:cxnSpLocks/>
+          </p:cNvCxnSpPr>
+          <p:nvPr/>
+        </p:nvCxnSpPr>
+        <p:spPr>
+          <a:xfrm>
+            <a:off x="9278992" y="2693375"/>
+            <a:ext cx="287530" cy="0"/>
+          </a:xfrm>
+          <a:prstGeom prst="straightConnector1">
+            <a:avLst/>
+          </a:prstGeom>
+          <a:ln w="12700">
+            <a:tailEnd type="triangle"/>
+          </a:ln>
+        </p:spPr>
+        <p:style>
+          <a:lnRef idx="1">
+            <a:schemeClr val="dk1"/>
+          </a:lnRef>
+          <a:fillRef idx="0">
+            <a:schemeClr val="dk1"/>
+          </a:fillRef>
+          <a:effectRef idx="0">
+            <a:schemeClr val="dk1"/>
+          </a:effectRef>
+          <a:fontRef idx="minor">
+            <a:schemeClr val="tx1"/>
+          </a:fontRef>
+        </p:style>
+      </p:cxnSp>
+      <p:sp>
+        <p:nvSpPr>
+          <p:cNvPr id="103" name="文本框 102">
+            <a:extLst>
+              <a:ext uri="{FF2B5EF4-FFF2-40B4-BE49-F238E27FC236}">
+                <a16:creationId xmlns:a16="http://schemas.microsoft.com/office/drawing/2014/main" id="{208F714B-4883-4A2F-B933-378BBCFB381C}"/>
+              </a:ext>
+            </a:extLst>
+          </p:cNvPr>
+          <p:cNvSpPr txBox="1"/>
+          <p:nvPr/>
+        </p:nvSpPr>
+        <p:spPr>
+          <a:xfrm>
+            <a:off x="9427232" y="1590451"/>
+            <a:ext cx="687219" cy="506549"/>
+          </a:xfrm>
+          <a:prstGeom prst="rect">
+            <a:avLst/>
+          </a:prstGeom>
+          <a:noFill/>
+        </p:spPr>
+        <p:txBody>
+          <a:bodyPr wrap="square" rtlCol="0">
+            <a:spAutoFit/>
+          </a:bodyPr>
+          <a:lstStyle/>
+          <a:p>
+            <a:r>
+              <a:rPr lang="zh-CN" altLang="en-US" sz="1346" dirty="0">
+                <a:solidFill>
+                  <a:srgbClr val="9D0D55"/>
+                </a:solidFill>
+                <a:latin typeface="宋体" panose="02010600030101010101" pitchFamily="2" charset="-122"/>
+                <a:ea typeface="宋体" panose="02010600030101010101" pitchFamily="2" charset="-122"/>
+              </a:rPr>
+              <a:t>先验关联</a:t>
+            </a:r>
+          </a:p>
+        </p:txBody>
+      </p:sp>
+      <p:sp>
+        <p:nvSpPr>
+          <p:cNvPr id="105" name="文本框 104">
+            <a:extLst>
+              <a:ext uri="{FF2B5EF4-FFF2-40B4-BE49-F238E27FC236}">
+                <a16:creationId xmlns:a16="http://schemas.microsoft.com/office/drawing/2014/main" id="{75E99DBC-2EF2-4A82-9734-2A53E6273479}"/>
+              </a:ext>
+            </a:extLst>
+          </p:cNvPr>
+          <p:cNvSpPr txBox="1"/>
+          <p:nvPr/>
+        </p:nvSpPr>
+        <p:spPr>
+          <a:xfrm>
+            <a:off x="9498986" y="2423388"/>
+            <a:ext cx="668320" cy="506549"/>
+          </a:xfrm>
+          <a:prstGeom prst="rect">
+            <a:avLst/>
+          </a:prstGeom>
+          <a:noFill/>
+        </p:spPr>
+        <p:txBody>
+          <a:bodyPr wrap="square" rtlCol="0">
+            <a:spAutoFit/>
+          </a:bodyPr>
+          <a:lstStyle/>
+          <a:p>
+            <a:r>
+              <a:rPr lang="zh-CN" altLang="en-US" sz="1346" dirty="0">
+                <a:solidFill>
+                  <a:srgbClr val="5151B4"/>
+                </a:solidFill>
+                <a:latin typeface="宋体" panose="02010600030101010101" pitchFamily="2" charset="-122"/>
+                <a:ea typeface="宋体" panose="02010600030101010101" pitchFamily="2" charset="-122"/>
+              </a:rPr>
+              <a:t>序列关联</a:t>
+            </a:r>
+          </a:p>
+        </p:txBody>
+      </p:sp>
+      <p:sp>
+        <p:nvSpPr>
+          <p:cNvPr id="106" name="文本框 105">
+            <a:extLst>
+              <a:ext uri="{FF2B5EF4-FFF2-40B4-BE49-F238E27FC236}">
+                <a16:creationId xmlns:a16="http://schemas.microsoft.com/office/drawing/2014/main" id="{99B07157-56CB-46CF-A62D-850C213994C6}"/>
+              </a:ext>
+            </a:extLst>
+          </p:cNvPr>
+          <p:cNvSpPr txBox="1"/>
+          <p:nvPr/>
+        </p:nvSpPr>
+        <p:spPr>
+          <a:xfrm>
+            <a:off x="10497264" y="1590451"/>
+            <a:ext cx="762377" cy="506549"/>
+          </a:xfrm>
+          <a:prstGeom prst="rect">
+            <a:avLst/>
+          </a:prstGeom>
+          <a:noFill/>
+        </p:spPr>
+        <p:txBody>
+          <a:bodyPr wrap="square" rtlCol="0">
+            <a:spAutoFit/>
+          </a:bodyPr>
+          <a:lstStyle/>
+          <a:p>
+            <a:r>
+              <a:rPr lang="zh-CN" altLang="en-US" sz="1346" dirty="0">
+                <a:latin typeface="宋体" panose="02010600030101010101" pitchFamily="2" charset="-122"/>
+                <a:ea typeface="宋体" panose="02010600030101010101" pitchFamily="2" charset="-122"/>
+              </a:rPr>
+              <a:t>最小化阶段</a:t>
+            </a:r>
+          </a:p>
+        </p:txBody>
+      </p:sp>
+      <p:sp>
+        <p:nvSpPr>
+          <p:cNvPr id="107" name="文本框 106">
+            <a:extLst>
+              <a:ext uri="{FF2B5EF4-FFF2-40B4-BE49-F238E27FC236}">
+                <a16:creationId xmlns:a16="http://schemas.microsoft.com/office/drawing/2014/main" id="{88766355-28B3-416B-B852-9C94D9F94EF5}"/>
+              </a:ext>
+            </a:extLst>
+          </p:cNvPr>
+          <p:cNvSpPr txBox="1"/>
+          <p:nvPr/>
+        </p:nvSpPr>
+        <p:spPr>
+          <a:xfrm>
+            <a:off x="10497265" y="2424812"/>
+            <a:ext cx="801170" cy="506549"/>
+          </a:xfrm>
+          <a:prstGeom prst="rect">
+            <a:avLst/>
+          </a:prstGeom>
+          <a:noFill/>
+        </p:spPr>
+        <p:txBody>
+          <a:bodyPr wrap="square" rtlCol="0">
+            <a:spAutoFit/>
+          </a:bodyPr>
+          <a:lstStyle/>
+          <a:p>
+            <a:r>
+              <a:rPr lang="zh-CN" altLang="en-US" sz="1346" dirty="0">
+                <a:latin typeface="宋体" panose="02010600030101010101" pitchFamily="2" charset="-122"/>
+                <a:ea typeface="宋体" panose="02010600030101010101" pitchFamily="2" charset="-122"/>
+              </a:rPr>
+              <a:t>最大化阶段</a:t>
+            </a:r>
+          </a:p>
+        </p:txBody>
+      </p:sp>
+      <p:cxnSp>
+        <p:nvCxnSpPr>
+          <p:cNvPr id="108" name="直接箭头连接符 107">
+            <a:extLst>
+              <a:ext uri="{FF2B5EF4-FFF2-40B4-BE49-F238E27FC236}">
+                <a16:creationId xmlns:a16="http://schemas.microsoft.com/office/drawing/2014/main" id="{49FCF013-04CF-4B5C-BCD4-94D14CE7EEDF}"/>
+              </a:ext>
+            </a:extLst>
+          </p:cNvPr>
+          <p:cNvCxnSpPr>
+            <a:cxnSpLocks/>
+          </p:cNvCxnSpPr>
+          <p:nvPr/>
+        </p:nvCxnSpPr>
+        <p:spPr>
+          <a:xfrm flipV="1">
+            <a:off x="9925312" y="1975117"/>
+            <a:ext cx="502266" cy="2703"/>
+          </a:xfrm>
+          <a:prstGeom prst="straightConnector1">
+            <a:avLst/>
+          </a:prstGeom>
+          <a:ln w="12700">
+            <a:solidFill>
+              <a:srgbClr val="AD3E76"/>
+            </a:solidFill>
+            <a:tailEnd type="triangle"/>
+          </a:ln>
+        </p:spPr>
+        <p:style>
+          <a:lnRef idx="1">
+            <a:schemeClr val="dk1"/>
+          </a:lnRef>
+          <a:fillRef idx="0">
+            <a:schemeClr val="dk1"/>
+          </a:fillRef>
+          <a:effectRef idx="0">
+            <a:schemeClr val="dk1"/>
+          </a:effectRef>
+          <a:fontRef idx="minor">
+            <a:schemeClr val="tx1"/>
+          </a:fontRef>
+        </p:style>
+      </p:cxnSp>
+      <p:cxnSp>
+        <p:nvCxnSpPr>
+          <p:cNvPr id="109" name="直接箭头连接符 108">
+            <a:extLst>
+              <a:ext uri="{FF2B5EF4-FFF2-40B4-BE49-F238E27FC236}">
+                <a16:creationId xmlns:a16="http://schemas.microsoft.com/office/drawing/2014/main" id="{DBE8C1A0-E6C2-44B3-B365-8E883C4AC92F}"/>
+              </a:ext>
+            </a:extLst>
+          </p:cNvPr>
+          <p:cNvCxnSpPr>
+            <a:cxnSpLocks/>
+          </p:cNvCxnSpPr>
+          <p:nvPr/>
+        </p:nvCxnSpPr>
+        <p:spPr>
+          <a:xfrm flipH="1">
+            <a:off x="9901097" y="1823822"/>
+            <a:ext cx="502266" cy="10328"/>
+          </a:xfrm>
+          <a:prstGeom prst="straightConnector1">
+            <a:avLst/>
+          </a:prstGeom>
+          <a:ln w="12700">
+            <a:solidFill>
+              <a:srgbClr val="AD3E76"/>
+            </a:solidFill>
+            <a:prstDash val="dash"/>
+            <a:tailEnd type="triangle"/>
+          </a:ln>
+        </p:spPr>
+        <p:style>
+          <a:lnRef idx="1">
+            <a:schemeClr val="dk1"/>
+          </a:lnRef>
+          <a:fillRef idx="0">
+            <a:schemeClr val="dk1"/>
+          </a:fillRef>
+          <a:effectRef idx="0">
+            <a:schemeClr val="dk1"/>
+          </a:effectRef>
+          <a:fontRef idx="minor">
+            <a:schemeClr val="tx1"/>
+          </a:fontRef>
+        </p:style>
+      </p:cxnSp>
+      <p:sp>
+        <p:nvSpPr>
+          <p:cNvPr id="115" name="文本框 114">
+            <a:extLst>
+              <a:ext uri="{FF2B5EF4-FFF2-40B4-BE49-F238E27FC236}">
+                <a16:creationId xmlns:a16="http://schemas.microsoft.com/office/drawing/2014/main" id="{B828F2CA-9C5E-498B-A721-7BCCF859EC5F}"/>
+              </a:ext>
+            </a:extLst>
+          </p:cNvPr>
+          <p:cNvSpPr txBox="1"/>
+          <p:nvPr/>
+        </p:nvSpPr>
+        <p:spPr>
+          <a:xfrm>
+            <a:off x="9770461" y="1475204"/>
+            <a:ext cx="879106" cy="299441"/>
+          </a:xfrm>
+          <a:prstGeom prst="rect">
+            <a:avLst/>
+          </a:prstGeom>
+          <a:noFill/>
+        </p:spPr>
+        <p:txBody>
+          <a:bodyPr wrap="square" rtlCol="0">
+            <a:spAutoFit/>
+          </a:bodyPr>
+          <a:lstStyle/>
+          <a:p>
+            <a:r>
+              <a:rPr lang="zh-CN" altLang="en-US" sz="1346" dirty="0">
+                <a:latin typeface="宋体" panose="02010600030101010101" pitchFamily="2" charset="-122"/>
+                <a:ea typeface="宋体" panose="02010600030101010101" pitchFamily="2" charset="-122"/>
+              </a:rPr>
+              <a:t>梯度更新</a:t>
+            </a:r>
+          </a:p>
+        </p:txBody>
+      </p:sp>
+      <p:cxnSp>
+        <p:nvCxnSpPr>
+          <p:cNvPr id="116" name="直接箭头连接符 115">
+            <a:extLst>
+              <a:ext uri="{FF2B5EF4-FFF2-40B4-BE49-F238E27FC236}">
+                <a16:creationId xmlns:a16="http://schemas.microsoft.com/office/drawing/2014/main" id="{EF625CD5-E91C-4E7B-AA26-133D8A3B6011}"/>
+              </a:ext>
+            </a:extLst>
+          </p:cNvPr>
+          <p:cNvCxnSpPr>
+            <a:cxnSpLocks/>
+          </p:cNvCxnSpPr>
+          <p:nvPr/>
+        </p:nvCxnSpPr>
+        <p:spPr>
+          <a:xfrm flipV="1">
+            <a:off x="9986832" y="2591950"/>
+            <a:ext cx="502266" cy="2703"/>
+          </a:xfrm>
+          <a:prstGeom prst="straightConnector1">
+            <a:avLst/>
+          </a:prstGeom>
+          <a:ln w="12700">
+            <a:solidFill>
+              <a:srgbClr val="5151B4"/>
+            </a:solidFill>
+            <a:tailEnd type="triangle"/>
+          </a:ln>
+        </p:spPr>
+        <p:style>
+          <a:lnRef idx="1">
+            <a:schemeClr val="dk1"/>
+          </a:lnRef>
+          <a:fillRef idx="0">
+            <a:schemeClr val="dk1"/>
+          </a:fillRef>
+          <a:effectRef idx="0">
+            <a:schemeClr val="dk1"/>
+          </a:effectRef>
+          <a:fontRef idx="minor">
+            <a:schemeClr val="tx1"/>
+          </a:fontRef>
+        </p:style>
+      </p:cxnSp>
+      <p:cxnSp>
+        <p:nvCxnSpPr>
+          <p:cNvPr id="117" name="直接箭头连接符 116">
+            <a:extLst>
+              <a:ext uri="{FF2B5EF4-FFF2-40B4-BE49-F238E27FC236}">
+                <a16:creationId xmlns:a16="http://schemas.microsoft.com/office/drawing/2014/main" id="{6C06DB6F-34FC-4F7F-AF08-333E6F5FEC3C}"/>
+              </a:ext>
+            </a:extLst>
+          </p:cNvPr>
+          <p:cNvCxnSpPr>
+            <a:cxnSpLocks/>
+          </p:cNvCxnSpPr>
+          <p:nvPr/>
+        </p:nvCxnSpPr>
+        <p:spPr>
+          <a:xfrm flipH="1">
+            <a:off x="9963510" y="2807496"/>
+            <a:ext cx="502266" cy="10328"/>
+          </a:xfrm>
+          <a:prstGeom prst="straightConnector1">
+            <a:avLst/>
+          </a:prstGeom>
+          <a:ln w="12700">
+            <a:solidFill>
+              <a:srgbClr val="5151B4"/>
+            </a:solidFill>
+            <a:prstDash val="dash"/>
+            <a:tailEnd type="triangle"/>
+          </a:ln>
+        </p:spPr>
+        <p:style>
+          <a:lnRef idx="1">
+            <a:schemeClr val="dk1"/>
+          </a:lnRef>
+          <a:fillRef idx="0">
+            <a:schemeClr val="dk1"/>
+          </a:fillRef>
+          <a:effectRef idx="0">
+            <a:schemeClr val="dk1"/>
+          </a:effectRef>
+          <a:fontRef idx="minor">
+            <a:schemeClr val="tx1"/>
+          </a:fontRef>
+        </p:style>
+      </p:cxnSp>
+      <p:sp>
+        <p:nvSpPr>
+          <p:cNvPr id="118" name="文本框 117">
+            <a:extLst>
+              <a:ext uri="{FF2B5EF4-FFF2-40B4-BE49-F238E27FC236}">
+                <a16:creationId xmlns:a16="http://schemas.microsoft.com/office/drawing/2014/main" id="{7273B439-CD38-4E95-AEF4-82CA06A81945}"/>
+              </a:ext>
+            </a:extLst>
+          </p:cNvPr>
+          <p:cNvSpPr txBox="1"/>
+          <p:nvPr/>
+        </p:nvSpPr>
+        <p:spPr>
+          <a:xfrm>
+            <a:off x="9843257" y="2839670"/>
+            <a:ext cx="922438" cy="299441"/>
+          </a:xfrm>
+          <a:prstGeom prst="rect">
+            <a:avLst/>
+          </a:prstGeom>
+          <a:noFill/>
+        </p:spPr>
+        <p:txBody>
+          <a:bodyPr wrap="square" rtlCol="0">
+            <a:spAutoFit/>
+          </a:bodyPr>
+          <a:lstStyle/>
+          <a:p>
+            <a:r>
+              <a:rPr lang="zh-CN" altLang="en-US" sz="1346" dirty="0">
+                <a:latin typeface="宋体" panose="02010600030101010101" pitchFamily="2" charset="-122"/>
+                <a:ea typeface="宋体" panose="02010600030101010101" pitchFamily="2" charset="-122"/>
+              </a:rPr>
+              <a:t>梯度更新</a:t>
+            </a:r>
+          </a:p>
+        </p:txBody>
+      </p:sp>
+      <p:sp>
+        <p:nvSpPr>
+          <p:cNvPr id="119" name="弧形 118">
+            <a:extLst>
+              <a:ext uri="{FF2B5EF4-FFF2-40B4-BE49-F238E27FC236}">
+                <a16:creationId xmlns:a16="http://schemas.microsoft.com/office/drawing/2014/main" id="{C5916F63-1357-4AA7-8A79-CCDB9B562F2B}"/>
               </a:ext>
             </a:extLst>
           </p:cNvPr>
@@ -7223,20 +6728,119 @@
         </p:nvSpPr>
         <p:spPr>
           <a:xfrm>
-            <a:off x="26431" y="61358"/>
-            <a:ext cx="3146241" cy="4876384"/>
-          </a:xfrm>
-          <a:prstGeom prst="roundRect">
+            <a:off x="8966214" y="2020332"/>
+            <a:ext cx="1830896" cy="933087"/>
+          </a:xfrm>
+          <a:prstGeom prst="arc">
             <a:avLst/>
           </a:prstGeom>
-          <a:noFill/>
           <a:ln>
             <a:solidFill>
-              <a:schemeClr val="bg1">
-                <a:lumMod val="50000"/>
-              </a:schemeClr>
+              <a:srgbClr val="AD3E76"/>
             </a:solidFill>
-            <a:prstDash val="dash"/>
+            <a:tailEnd type="triangle"/>
+          </a:ln>
+        </p:spPr>
+        <p:style>
+          <a:lnRef idx="1">
+            <a:schemeClr val="dk1"/>
+          </a:lnRef>
+          <a:fillRef idx="0">
+            <a:schemeClr val="dk1"/>
+          </a:fillRef>
+          <a:effectRef idx="0">
+            <a:schemeClr val="dk1"/>
+          </a:effectRef>
+          <a:fontRef idx="minor">
+            <a:schemeClr val="tx1"/>
+          </a:fontRef>
+        </p:style>
+        <p:txBody>
+          <a:bodyPr rtlCol="0" anchor="ctr"/>
+          <a:lstStyle/>
+          <a:p>
+            <a:pPr algn="ctr"/>
+            <a:endParaRPr lang="zh-CN" altLang="en-US" sz="2019"/>
+          </a:p>
+        </p:txBody>
+      </p:sp>
+      <p:sp>
+        <p:nvSpPr>
+          <p:cNvPr id="120" name="弧形 119">
+            <a:extLst>
+              <a:ext uri="{FF2B5EF4-FFF2-40B4-BE49-F238E27FC236}">
+                <a16:creationId xmlns:a16="http://schemas.microsoft.com/office/drawing/2014/main" id="{96698B7E-4B59-4CE1-995B-EF9E002C2573}"/>
+              </a:ext>
+            </a:extLst>
+          </p:cNvPr>
+          <p:cNvSpPr/>
+          <p:nvPr/>
+        </p:nvSpPr>
+        <p:spPr>
+          <a:xfrm flipV="1">
+            <a:off x="9065611" y="1517485"/>
+            <a:ext cx="1731498" cy="1032266"/>
+          </a:xfrm>
+          <a:prstGeom prst="arc">
+            <a:avLst/>
+          </a:prstGeom>
+          <a:ln>
+            <a:solidFill>
+              <a:srgbClr val="5151B4"/>
+            </a:solidFill>
+            <a:tailEnd type="triangle"/>
+          </a:ln>
+        </p:spPr>
+        <p:style>
+          <a:lnRef idx="1">
+            <a:schemeClr val="dk1"/>
+          </a:lnRef>
+          <a:fillRef idx="0">
+            <a:schemeClr val="dk1"/>
+          </a:fillRef>
+          <a:effectRef idx="0">
+            <a:schemeClr val="dk1"/>
+          </a:effectRef>
+          <a:fontRef idx="minor">
+            <a:schemeClr val="tx1"/>
+          </a:fontRef>
+        </p:style>
+        <p:txBody>
+          <a:bodyPr rtlCol="0" anchor="ctr"/>
+          <a:lstStyle/>
+          <a:p>
+            <a:pPr algn="ctr"/>
+            <a:endParaRPr lang="zh-CN" altLang="en-US" sz="2019"/>
+          </a:p>
+        </p:txBody>
+      </p:sp>
+      <p:sp>
+        <p:nvSpPr>
+          <p:cNvPr id="154" name="矩形 153">
+            <a:extLst>
+              <a:ext uri="{FF2B5EF4-FFF2-40B4-BE49-F238E27FC236}">
+                <a16:creationId xmlns:a16="http://schemas.microsoft.com/office/drawing/2014/main" id="{9020E91E-2046-43CA-92C6-2F256B06F82A}"/>
+              </a:ext>
+            </a:extLst>
+          </p:cNvPr>
+          <p:cNvSpPr/>
+          <p:nvPr/>
+        </p:nvSpPr>
+        <p:spPr>
+          <a:xfrm>
+            <a:off x="9418498" y="3210965"/>
+            <a:ext cx="633150" cy="287829"/>
+          </a:xfrm>
+          <a:prstGeom prst="rect">
+            <a:avLst/>
+          </a:prstGeom>
+          <a:solidFill>
+            <a:srgbClr val="DAE8FC"/>
+          </a:solidFill>
+          <a:ln>
+            <a:solidFill>
+              <a:srgbClr val="696A6F"/>
+            </a:solidFill>
           </a:ln>
         </p:spPr>
         <p:style>
@@ -7260,12 +6864,376 @@
           <a:lstStyle/>
           <a:p>
             <a:pPr algn="ctr"/>
+            <a:endParaRPr lang="zh-CN" altLang="en-US" sz="1346" dirty="0">
+              <a:solidFill>
+                <a:schemeClr val="tx1"/>
+              </a:solidFill>
+              <a:latin typeface="宋体" panose="02010600030101010101" pitchFamily="2" charset="-122"/>
+              <a:ea typeface="宋体" panose="02010600030101010101" pitchFamily="2" charset="-122"/>
+            </a:endParaRPr>
+          </a:p>
+        </p:txBody>
+      </p:sp>
+      <p:sp>
+        <p:nvSpPr>
+          <p:cNvPr id="156" name="文本框 155">
+            <a:extLst>
+              <a:ext uri="{FF2B5EF4-FFF2-40B4-BE49-F238E27FC236}">
+                <a16:creationId xmlns:a16="http://schemas.microsoft.com/office/drawing/2014/main" id="{B47100EF-058B-43D7-9C8B-B7D1B9FD7396}"/>
+              </a:ext>
+            </a:extLst>
+          </p:cNvPr>
+          <p:cNvSpPr txBox="1"/>
+          <p:nvPr/>
+        </p:nvSpPr>
+        <p:spPr>
+          <a:xfrm>
+            <a:off x="9395779" y="3189474"/>
+            <a:ext cx="1031799" cy="299441"/>
+          </a:xfrm>
+          <a:prstGeom prst="rect">
+            <a:avLst/>
+          </a:prstGeom>
+          <a:noFill/>
+        </p:spPr>
+        <p:txBody>
+          <a:bodyPr wrap="square" rtlCol="0">
+            <a:spAutoFit/>
+          </a:bodyPr>
+          <a:lstStyle/>
+          <a:p>
+            <a:r>
+              <a:rPr lang="en-US" altLang="zh-CN" sz="1346" dirty="0">
+                <a:latin typeface="宋体" panose="02010600030101010101" pitchFamily="2" charset="-122"/>
+                <a:ea typeface="宋体" panose="02010600030101010101" pitchFamily="2" charset="-122"/>
+              </a:rPr>
+              <a:t>MatMul</a:t>
+            </a:r>
+            <a:endParaRPr lang="zh-CN" altLang="en-US" sz="1346" dirty="0">
+              <a:latin typeface="宋体" panose="02010600030101010101" pitchFamily="2" charset="-122"/>
+              <a:ea typeface="宋体" panose="02010600030101010101" pitchFamily="2" charset="-122"/>
+            </a:endParaRPr>
+          </a:p>
+        </p:txBody>
+      </p:sp>
+      <p:cxnSp>
+        <p:nvCxnSpPr>
+          <p:cNvPr id="157" name="直接箭头连接符 156">
+            <a:extLst>
+              <a:ext uri="{FF2B5EF4-FFF2-40B4-BE49-F238E27FC236}">
+                <a16:creationId xmlns:a16="http://schemas.microsoft.com/office/drawing/2014/main" id="{1AB92DC6-D59C-4F8A-AD97-F0CB84DD2568}"/>
+              </a:ext>
+            </a:extLst>
+          </p:cNvPr>
+          <p:cNvCxnSpPr>
+            <a:cxnSpLocks/>
+            <a:endCxn id="156" idx="1"/>
+          </p:cNvCxnSpPr>
+          <p:nvPr/>
+        </p:nvCxnSpPr>
+        <p:spPr>
+          <a:xfrm flipV="1">
+            <a:off x="7922974" y="3339195"/>
+            <a:ext cx="1472805" cy="5345"/>
+          </a:xfrm>
+          <a:prstGeom prst="straightConnector1">
+            <a:avLst/>
+          </a:prstGeom>
+          <a:ln w="12700">
+            <a:tailEnd type="triangle"/>
+          </a:ln>
+        </p:spPr>
+        <p:style>
+          <a:lnRef idx="1">
+            <a:schemeClr val="dk1"/>
+          </a:lnRef>
+          <a:fillRef idx="0">
+            <a:schemeClr val="dk1"/>
+          </a:fillRef>
+          <a:effectRef idx="0">
+            <a:schemeClr val="dk1"/>
+          </a:effectRef>
+          <a:fontRef idx="minor">
+            <a:schemeClr val="tx1"/>
+          </a:fontRef>
+        </p:style>
+      </p:cxnSp>
+      <p:cxnSp>
+        <p:nvCxnSpPr>
+          <p:cNvPr id="159" name="直接箭头连接符 158">
+            <a:extLst>
+              <a:ext uri="{FF2B5EF4-FFF2-40B4-BE49-F238E27FC236}">
+                <a16:creationId xmlns:a16="http://schemas.microsoft.com/office/drawing/2014/main" id="{B32022F0-A0D4-4BAD-9C33-9CE3267EF815}"/>
+              </a:ext>
+            </a:extLst>
+          </p:cNvPr>
+          <p:cNvCxnSpPr>
+            <a:cxnSpLocks/>
+          </p:cNvCxnSpPr>
+          <p:nvPr/>
+        </p:nvCxnSpPr>
+        <p:spPr>
+          <a:xfrm>
+            <a:off x="9739289" y="2916119"/>
+            <a:ext cx="0" cy="264249"/>
+          </a:xfrm>
+          <a:prstGeom prst="straightConnector1">
+            <a:avLst/>
+          </a:prstGeom>
+          <a:ln w="12700">
+            <a:tailEnd type="triangle"/>
+          </a:ln>
+        </p:spPr>
+        <p:style>
+          <a:lnRef idx="1">
+            <a:schemeClr val="dk1"/>
+          </a:lnRef>
+          <a:fillRef idx="0">
+            <a:schemeClr val="dk1"/>
+          </a:fillRef>
+          <a:effectRef idx="0">
+            <a:schemeClr val="dk1"/>
+          </a:effectRef>
+          <a:fontRef idx="minor">
+            <a:schemeClr val="tx1"/>
+          </a:fontRef>
+        </p:style>
+      </p:cxnSp>
+      <p:cxnSp>
+        <p:nvCxnSpPr>
+          <p:cNvPr id="161" name="直接箭头连接符 160">
+            <a:extLst>
+              <a:ext uri="{FF2B5EF4-FFF2-40B4-BE49-F238E27FC236}">
+                <a16:creationId xmlns:a16="http://schemas.microsoft.com/office/drawing/2014/main" id="{BD418802-8E90-4534-8FC8-32B8A62CD33C}"/>
+              </a:ext>
+            </a:extLst>
+          </p:cNvPr>
+          <p:cNvCxnSpPr>
+            <a:cxnSpLocks/>
+          </p:cNvCxnSpPr>
+          <p:nvPr/>
+        </p:nvCxnSpPr>
+        <p:spPr>
+          <a:xfrm>
+            <a:off x="10074367" y="3336701"/>
+            <a:ext cx="1475825" cy="0"/>
+          </a:xfrm>
+          <a:prstGeom prst="straightConnector1">
+            <a:avLst/>
+          </a:prstGeom>
+          <a:ln w="12700">
+            <a:tailEnd type="triangle"/>
+          </a:ln>
+        </p:spPr>
+        <p:style>
+          <a:lnRef idx="1">
+            <a:schemeClr val="dk1"/>
+          </a:lnRef>
+          <a:fillRef idx="0">
+            <a:schemeClr val="dk1"/>
+          </a:fillRef>
+          <a:effectRef idx="0">
+            <a:schemeClr val="dk1"/>
+          </a:effectRef>
+          <a:fontRef idx="minor">
+            <a:schemeClr val="tx1"/>
+          </a:fontRef>
+        </p:style>
+      </p:cxnSp>
+      <p:cxnSp>
+        <p:nvCxnSpPr>
+          <p:cNvPr id="164" name="直接箭头连接符 163">
+            <a:extLst>
+              <a:ext uri="{FF2B5EF4-FFF2-40B4-BE49-F238E27FC236}">
+                <a16:creationId xmlns:a16="http://schemas.microsoft.com/office/drawing/2014/main" id="{8FF01081-6C20-457E-B00F-94B779B4FC61}"/>
+              </a:ext>
+            </a:extLst>
+          </p:cNvPr>
+          <p:cNvCxnSpPr>
+            <a:cxnSpLocks/>
+          </p:cNvCxnSpPr>
+          <p:nvPr/>
+        </p:nvCxnSpPr>
+        <p:spPr>
+          <a:xfrm>
+            <a:off x="11160534" y="3149624"/>
+            <a:ext cx="380721" cy="12853"/>
+          </a:xfrm>
+          <a:prstGeom prst="straightConnector1">
+            <a:avLst/>
+          </a:prstGeom>
+          <a:ln w="12700">
+            <a:solidFill>
+              <a:schemeClr val="bg1">
+                <a:lumMod val="50000"/>
+              </a:schemeClr>
+            </a:solidFill>
+            <a:prstDash val="dash"/>
+            <a:tailEnd type="triangle"/>
+          </a:ln>
+        </p:spPr>
+        <p:style>
+          <a:lnRef idx="1">
+            <a:schemeClr val="dk1"/>
+          </a:lnRef>
+          <a:fillRef idx="0">
+            <a:schemeClr val="dk1"/>
+          </a:fillRef>
+          <a:effectRef idx="0">
+            <a:schemeClr val="dk1"/>
+          </a:effectRef>
+          <a:fontRef idx="minor">
+            <a:schemeClr val="tx1"/>
+          </a:fontRef>
+        </p:style>
+      </p:cxnSp>
+      <p:cxnSp>
+        <p:nvCxnSpPr>
+          <p:cNvPr id="167" name="直接箭头连接符 166">
+            <a:extLst>
+              <a:ext uri="{FF2B5EF4-FFF2-40B4-BE49-F238E27FC236}">
+                <a16:creationId xmlns:a16="http://schemas.microsoft.com/office/drawing/2014/main" id="{D4E18100-DF71-4794-8F5C-DE223C34468E}"/>
+              </a:ext>
+            </a:extLst>
+          </p:cNvPr>
+          <p:cNvCxnSpPr>
+            <a:cxnSpLocks/>
+          </p:cNvCxnSpPr>
+          <p:nvPr/>
+        </p:nvCxnSpPr>
+        <p:spPr>
+          <a:xfrm>
+            <a:off x="11279308" y="2983685"/>
+            <a:ext cx="261944" cy="12853"/>
+          </a:xfrm>
+          <a:prstGeom prst="straightConnector1">
+            <a:avLst/>
+          </a:prstGeom>
+          <a:ln w="12700">
+            <a:solidFill>
+              <a:schemeClr val="bg1">
+                <a:lumMod val="50000"/>
+              </a:schemeClr>
+            </a:solidFill>
+            <a:prstDash val="dash"/>
+            <a:tailEnd type="triangle"/>
+          </a:ln>
+        </p:spPr>
+        <p:style>
+          <a:lnRef idx="1">
+            <a:schemeClr val="dk1"/>
+          </a:lnRef>
+          <a:fillRef idx="0">
+            <a:schemeClr val="dk1"/>
+          </a:fillRef>
+          <a:effectRef idx="0">
+            <a:schemeClr val="dk1"/>
+          </a:effectRef>
+          <a:fontRef idx="minor">
+            <a:schemeClr val="tx1"/>
+          </a:fontRef>
+        </p:style>
+      </p:cxnSp>
+      <p:sp>
+        <p:nvSpPr>
+          <p:cNvPr id="258" name="文本框 257">
+            <a:extLst>
+              <a:ext uri="{FF2B5EF4-FFF2-40B4-BE49-F238E27FC236}">
+                <a16:creationId xmlns:a16="http://schemas.microsoft.com/office/drawing/2014/main" id="{3FD92B6C-5915-46B0-8F73-6B21E96EB289}"/>
+              </a:ext>
+            </a:extLst>
+          </p:cNvPr>
+          <p:cNvSpPr txBox="1"/>
+          <p:nvPr/>
+        </p:nvSpPr>
+        <p:spPr>
+          <a:xfrm>
+            <a:off x="6430790" y="3809248"/>
+            <a:ext cx="2089034" cy="299441"/>
+          </a:xfrm>
+          <a:prstGeom prst="rect">
+            <a:avLst/>
+          </a:prstGeom>
+          <a:noFill/>
+        </p:spPr>
+        <p:txBody>
+          <a:bodyPr wrap="none" rtlCol="0">
+            <a:spAutoFit/>
+          </a:bodyPr>
+          <a:lstStyle/>
+          <a:p>
+            <a:pPr algn="ctr"/>
+            <a:r>
+              <a:rPr lang="en-US" altLang="zh-CN" sz="1346" dirty="0">
+                <a:latin typeface="宋体" panose="02010600030101010101" pitchFamily="2" charset="-122"/>
+                <a:ea typeface="宋体" panose="02010600030101010101" pitchFamily="2" charset="-122"/>
+              </a:rPr>
+              <a:t>(c)Anomaly Transformer</a:t>
+            </a:r>
+            <a:endParaRPr lang="zh-CN" altLang="en-US" sz="1346" dirty="0">
+              <a:latin typeface="宋体" panose="02010600030101010101" pitchFamily="2" charset="-122"/>
+              <a:ea typeface="宋体" panose="02010600030101010101" pitchFamily="2" charset="-122"/>
+            </a:endParaRPr>
+          </a:p>
+        </p:txBody>
+      </p:sp>
+      <p:sp>
+        <p:nvSpPr>
+          <p:cNvPr id="185" name="矩形: 圆角 184">
+            <a:extLst>
+              <a:ext uri="{FF2B5EF4-FFF2-40B4-BE49-F238E27FC236}">
+                <a16:creationId xmlns:a16="http://schemas.microsoft.com/office/drawing/2014/main" id="{F567E3D4-7A99-4AB3-A068-7D742AF500B4}"/>
+              </a:ext>
+            </a:extLst>
+          </p:cNvPr>
+          <p:cNvSpPr/>
+          <p:nvPr/>
+        </p:nvSpPr>
+        <p:spPr>
+          <a:xfrm>
+            <a:off x="26431" y="61358"/>
+            <a:ext cx="3146241" cy="4876384"/>
+          </a:xfrm>
+          <a:prstGeom prst="roundRect">
+            <a:avLst/>
+          </a:prstGeom>
+          <a:noFill/>
+          <a:ln>
+            <a:solidFill>
+              <a:schemeClr val="bg1">
+                <a:lumMod val="50000"/>
+              </a:schemeClr>
+            </a:solidFill>
+            <a:prstDash val="dash"/>
+          </a:ln>
+        </p:spPr>
+        <p:style>
+          <a:lnRef idx="2">
+            <a:schemeClr val="accent1">
+              <a:shade val="50000"/>
+            </a:schemeClr>
+          </a:lnRef>
+          <a:fillRef idx="1">
+            <a:schemeClr val="accent1"/>
+          </a:fillRef>
+          <a:effectRef idx="0">
+            <a:schemeClr val="accent1"/>
+          </a:effectRef>
+          <a:fontRef idx="minor">
+            <a:schemeClr val="lt1"/>
+          </a:fontRef>
+        </p:style>
+        <p:txBody>
+          <a:bodyPr rtlCol="0" anchor="ctr"/>
+          <a:lstStyle/>
+          <a:p>
+            <a:pPr algn="ctr"/>
             <a:endParaRPr lang="zh-CN" altLang="en-US" sz="2019"/>
           </a:p>
         </p:txBody>
       </p:sp>
-      <mc:AlternateContent xmlns:mc="http://schemas.openxmlformats.org/markup-compatibility/2006">
-        <mc:Choice xmlns:a14="http://schemas.microsoft.com/office/drawing/2010/main" Requires="a14">
+      <mc:AlternateContent xmlns:mc="http://schemas.openxmlformats.org/markup-compatibility/2006" xmlns:a14="http://schemas.microsoft.com/office/drawing/2010/main">
+        <mc:Choice Requires="a14">
           <p:sp>
             <p:nvSpPr>
               <p:cNvPr id="190" name="文本框 189">
@@ -7318,7 +7286,7 @@
             </p:txBody>
           </p:sp>
         </mc:Choice>
-        <mc:Fallback>
+        <mc:Fallback xmlns="">
           <p:sp>
             <p:nvSpPr>
               <p:cNvPr id="190" name="文本框 189">
@@ -7706,8 +7674,8 @@
           </a:p>
         </p:txBody>
       </p:sp>
-      <mc:AlternateContent xmlns:mc="http://schemas.openxmlformats.org/markup-compatibility/2006">
-        <mc:Choice xmlns:a14="http://schemas.microsoft.com/office/drawing/2010/main" Requires="a14">
+      <mc:AlternateContent xmlns:mc="http://schemas.openxmlformats.org/markup-compatibility/2006" xmlns:a14="http://schemas.microsoft.com/office/drawing/2010/main">
+        <mc:Choice Requires="a14">
           <p:sp>
             <p:nvSpPr>
               <p:cNvPr id="213" name="文本框 212">
@@ -7804,7 +7772,7 @@
             </p:txBody>
           </p:sp>
         </mc:Choice>
-        <mc:Fallback>
+        <mc:Fallback xmlns="">
           <p:sp>
             <p:nvSpPr>
               <p:cNvPr id="213" name="文本框 212">
@@ -7849,8 +7817,8 @@
           </p:sp>
         </mc:Fallback>
       </mc:AlternateContent>
-      <mc:AlternateContent xmlns:mc="http://schemas.openxmlformats.org/markup-compatibility/2006">
-        <mc:Choice xmlns:a14="http://schemas.microsoft.com/office/drawing/2010/main" Requires="a14">
+      <mc:AlternateContent xmlns:mc="http://schemas.openxmlformats.org/markup-compatibility/2006" xmlns:a14="http://schemas.microsoft.com/office/drawing/2010/main">
+        <mc:Choice Requires="a14">
           <p:sp>
             <p:nvSpPr>
               <p:cNvPr id="214" name="文本框 213">
@@ -7947,7 +7915,7 @@
             </p:txBody>
           </p:sp>
         </mc:Choice>
-        <mc:Fallback>
+        <mc:Fallback xmlns="">
           <p:sp>
             <p:nvSpPr>
               <p:cNvPr id="214" name="文本框 213">
@@ -8033,375 +8001,354 @@
           </a:fontRef>
         </p:style>
       </p:cxnSp>
-      <p:grpSp>
-        <p:nvGrpSpPr>
-          <p:cNvPr id="239" name="组合 238">
+      <p:sp>
+        <p:nvSpPr>
+          <p:cNvPr id="216" name="矩形 215">
             <a:extLst>
               <a:ext uri="{FF2B5EF4-FFF2-40B4-BE49-F238E27FC236}">
-                <a16:creationId xmlns:a16="http://schemas.microsoft.com/office/drawing/2014/main" id="{C81106E6-9AC1-4A2A-8E58-EBFACA13215C}"/>
+                <a16:creationId xmlns:a16="http://schemas.microsoft.com/office/drawing/2014/main" id="{FEC2C082-296F-4E05-B1FF-B4E572319F03}"/>
               </a:ext>
             </a:extLst>
           </p:cNvPr>
-          <p:cNvGrpSpPr/>
+          <p:cNvSpPr/>
           <p:nvPr/>
-        </p:nvGrpSpPr>
-        <p:grpSpPr>
+        </p:nvSpPr>
+        <p:spPr>
           <a:xfrm>
             <a:off x="657151" y="400342"/>
-            <a:ext cx="2030978" cy="318548"/>
-            <a:chOff x="1906819" y="5890193"/>
-            <a:chExt cx="2081230" cy="281248"/>
-          </a:xfrm>
-        </p:grpSpPr>
-        <p:sp>
-          <p:nvSpPr>
-            <p:cNvPr id="216" name="矩形 215">
-              <a:extLst>
-                <a:ext uri="{FF2B5EF4-FFF2-40B4-BE49-F238E27FC236}">
-                  <a16:creationId xmlns:a16="http://schemas.microsoft.com/office/drawing/2014/main" id="{FEC2C082-296F-4E05-B1FF-B4E572319F03}"/>
-                </a:ext>
-              </a:extLst>
-            </p:cNvPr>
-            <p:cNvSpPr/>
-            <p:nvPr/>
-          </p:nvSpPr>
-          <p:spPr>
-            <a:xfrm>
-              <a:off x="1906819" y="5890193"/>
-              <a:ext cx="286511" cy="276999"/>
-            </a:xfrm>
-            <a:prstGeom prst="rect">
-              <a:avLst/>
-            </a:prstGeom>
-            <a:solidFill>
-              <a:srgbClr val="6C8DBD"/>
-            </a:solidFill>
-          </p:spPr>
-          <p:style>
-            <a:lnRef idx="2">
-              <a:schemeClr val="accent1">
-                <a:shade val="50000"/>
-              </a:schemeClr>
-            </a:lnRef>
-            <a:fillRef idx="1">
-              <a:schemeClr val="accent1"/>
-            </a:fillRef>
-            <a:effectRef idx="0">
-              <a:schemeClr val="accent1"/>
-            </a:effectRef>
-            <a:fontRef idx="minor">
-              <a:schemeClr val="lt1"/>
-            </a:fontRef>
-          </p:style>
-          <p:txBody>
-            <a:bodyPr rtlCol="0" anchor="ctr"/>
-            <a:lstStyle/>
-            <a:p>
-              <a:pPr algn="ctr"/>
-              <a:endParaRPr lang="zh-CN" altLang="en-US" sz="2019"/>
-            </a:p>
-          </p:txBody>
-        </p:sp>
-        <p:sp>
-          <p:nvSpPr>
-            <p:cNvPr id="217" name="矩形 216">
-              <a:extLst>
-                <a:ext uri="{FF2B5EF4-FFF2-40B4-BE49-F238E27FC236}">
-                  <a16:creationId xmlns:a16="http://schemas.microsoft.com/office/drawing/2014/main" id="{31221401-A66A-4B1E-A662-E9CF7279CF92}"/>
-                </a:ext>
-              </a:extLst>
-            </p:cNvPr>
-            <p:cNvSpPr/>
-            <p:nvPr/>
-          </p:nvSpPr>
-          <p:spPr>
-            <a:xfrm>
-              <a:off x="2205523" y="5890193"/>
-              <a:ext cx="286511" cy="276999"/>
-            </a:xfrm>
-            <a:prstGeom prst="rect">
-              <a:avLst/>
-            </a:prstGeom>
-            <a:solidFill>
-              <a:srgbClr val="C1A9C6"/>
-            </a:solidFill>
-          </p:spPr>
-          <p:style>
-            <a:lnRef idx="2">
-              <a:schemeClr val="accent1">
-                <a:shade val="50000"/>
-              </a:schemeClr>
-            </a:lnRef>
-            <a:fillRef idx="1">
-              <a:schemeClr val="accent1"/>
-            </a:fillRef>
-            <a:effectRef idx="0">
-              <a:schemeClr val="accent1"/>
-            </a:effectRef>
-            <a:fontRef idx="minor">
-              <a:schemeClr val="lt1"/>
-            </a:fontRef>
-          </p:style>
-          <p:txBody>
-            <a:bodyPr rtlCol="0" anchor="ctr"/>
-            <a:lstStyle/>
-            <a:p>
-              <a:pPr algn="ctr"/>
-              <a:endParaRPr lang="zh-CN" altLang="en-US" sz="2019"/>
-            </a:p>
-          </p:txBody>
-        </p:sp>
-        <p:sp>
-          <p:nvSpPr>
-            <p:cNvPr id="218" name="矩形 217">
-              <a:extLst>
-                <a:ext uri="{FF2B5EF4-FFF2-40B4-BE49-F238E27FC236}">
-                  <a16:creationId xmlns:a16="http://schemas.microsoft.com/office/drawing/2014/main" id="{6B5C2AFF-CC80-490D-B573-AB7CD4A8C016}"/>
-                </a:ext>
-              </a:extLst>
-            </p:cNvPr>
-            <p:cNvSpPr/>
-            <p:nvPr/>
-          </p:nvSpPr>
-          <p:spPr>
-            <a:xfrm>
-              <a:off x="2502818" y="5890193"/>
-              <a:ext cx="286511" cy="276999"/>
-            </a:xfrm>
-            <a:prstGeom prst="rect">
-              <a:avLst/>
-            </a:prstGeom>
-            <a:solidFill>
-              <a:srgbClr val="CAE0B0"/>
-            </a:solidFill>
-          </p:spPr>
-          <p:style>
-            <a:lnRef idx="2">
-              <a:schemeClr val="accent1">
-                <a:shade val="50000"/>
-              </a:schemeClr>
-            </a:lnRef>
-            <a:fillRef idx="1">
-              <a:schemeClr val="accent1"/>
-            </a:fillRef>
-            <a:effectRef idx="0">
-              <a:schemeClr val="accent1"/>
-            </a:effectRef>
-            <a:fontRef idx="minor">
-              <a:schemeClr val="lt1"/>
-            </a:fontRef>
-          </p:style>
-          <p:txBody>
-            <a:bodyPr rtlCol="0" anchor="ctr"/>
-            <a:lstStyle/>
-            <a:p>
-              <a:pPr algn="ctr"/>
-              <a:endParaRPr lang="zh-CN" altLang="en-US" sz="2019"/>
-            </a:p>
-          </p:txBody>
-        </p:sp>
-        <p:sp>
-          <p:nvSpPr>
-            <p:cNvPr id="219" name="矩形 218">
-              <a:extLst>
-                <a:ext uri="{FF2B5EF4-FFF2-40B4-BE49-F238E27FC236}">
-                  <a16:creationId xmlns:a16="http://schemas.microsoft.com/office/drawing/2014/main" id="{CF28B4AE-8701-4C26-9DF4-EACC55A2748E}"/>
-                </a:ext>
-              </a:extLst>
-            </p:cNvPr>
-            <p:cNvSpPr/>
-            <p:nvPr/>
-          </p:nvSpPr>
-          <p:spPr>
-            <a:xfrm>
-              <a:off x="2804108" y="5892350"/>
-              <a:ext cx="286511" cy="276999"/>
-            </a:xfrm>
-            <a:prstGeom prst="rect">
-              <a:avLst/>
-            </a:prstGeom>
-            <a:solidFill>
-              <a:srgbClr val="93BAD8"/>
-            </a:solidFill>
-          </p:spPr>
-          <p:style>
-            <a:lnRef idx="2">
-              <a:schemeClr val="accent1">
-                <a:shade val="50000"/>
-              </a:schemeClr>
-            </a:lnRef>
-            <a:fillRef idx="1">
-              <a:schemeClr val="accent1"/>
-            </a:fillRef>
-            <a:effectRef idx="0">
-              <a:schemeClr val="accent1"/>
-            </a:effectRef>
-            <a:fontRef idx="minor">
-              <a:schemeClr val="lt1"/>
-            </a:fontRef>
-          </p:style>
-          <p:txBody>
-            <a:bodyPr rtlCol="0" anchor="ctr"/>
-            <a:lstStyle/>
-            <a:p>
-              <a:pPr algn="ctr"/>
-              <a:endParaRPr lang="zh-CN" altLang="en-US" sz="2019"/>
-            </a:p>
-          </p:txBody>
-        </p:sp>
-        <p:sp>
-          <p:nvSpPr>
-            <p:cNvPr id="220" name="矩形 219">
-              <a:extLst>
-                <a:ext uri="{FF2B5EF4-FFF2-40B4-BE49-F238E27FC236}">
-                  <a16:creationId xmlns:a16="http://schemas.microsoft.com/office/drawing/2014/main" id="{30B7006A-27DE-4B4E-B8BC-F6EFFF4DDDD3}"/>
-                </a:ext>
-              </a:extLst>
-            </p:cNvPr>
-            <p:cNvSpPr/>
-            <p:nvPr/>
-          </p:nvSpPr>
-          <p:spPr>
-            <a:xfrm>
-              <a:off x="3103697" y="5892350"/>
-              <a:ext cx="286511" cy="276999"/>
-            </a:xfrm>
-            <a:prstGeom prst="rect">
-              <a:avLst/>
-            </a:prstGeom>
-            <a:solidFill>
-              <a:srgbClr val="918296"/>
-            </a:solidFill>
-          </p:spPr>
-          <p:style>
-            <a:lnRef idx="2">
-              <a:schemeClr val="accent1">
-                <a:shade val="50000"/>
-              </a:schemeClr>
-            </a:lnRef>
-            <a:fillRef idx="1">
-              <a:schemeClr val="accent1"/>
-            </a:fillRef>
-            <a:effectRef idx="0">
-              <a:schemeClr val="accent1"/>
-            </a:effectRef>
-            <a:fontRef idx="minor">
-              <a:schemeClr val="lt1"/>
-            </a:fontRef>
-          </p:style>
-          <p:txBody>
-            <a:bodyPr rtlCol="0" anchor="ctr"/>
-            <a:lstStyle/>
-            <a:p>
-              <a:pPr algn="ctr"/>
-              <a:endParaRPr lang="zh-CN" altLang="en-US" sz="2019"/>
-            </a:p>
-          </p:txBody>
-        </p:sp>
-        <p:sp>
-          <p:nvSpPr>
-            <p:cNvPr id="221" name="矩形 220">
-              <a:extLst>
-                <a:ext uri="{FF2B5EF4-FFF2-40B4-BE49-F238E27FC236}">
-                  <a16:creationId xmlns:a16="http://schemas.microsoft.com/office/drawing/2014/main" id="{BF604D8B-B5DA-4636-943D-3CA4208A4911}"/>
-                </a:ext>
-              </a:extLst>
-            </p:cNvPr>
-            <p:cNvSpPr/>
-            <p:nvPr/>
-          </p:nvSpPr>
-          <p:spPr>
-            <a:xfrm>
-              <a:off x="3400842" y="5892350"/>
-              <a:ext cx="286511" cy="276999"/>
-            </a:xfrm>
-            <a:prstGeom prst="rect">
-              <a:avLst/>
-            </a:prstGeom>
-            <a:solidFill>
-              <a:schemeClr val="accent4">
-                <a:lumMod val="20000"/>
-                <a:lumOff val="80000"/>
-              </a:schemeClr>
-            </a:solidFill>
-          </p:spPr>
-          <p:style>
-            <a:lnRef idx="2">
-              <a:schemeClr val="accent1">
-                <a:shade val="50000"/>
-              </a:schemeClr>
-            </a:lnRef>
-            <a:fillRef idx="1">
-              <a:schemeClr val="accent1"/>
-            </a:fillRef>
-            <a:effectRef idx="0">
-              <a:schemeClr val="accent1"/>
-            </a:effectRef>
-            <a:fontRef idx="minor">
-              <a:schemeClr val="lt1"/>
-            </a:fontRef>
-          </p:style>
-          <p:txBody>
-            <a:bodyPr rtlCol="0" anchor="ctr"/>
-            <a:lstStyle/>
-            <a:p>
-              <a:pPr algn="ctr"/>
-              <a:endParaRPr lang="zh-CN" altLang="en-US" sz="2019"/>
-            </a:p>
-          </p:txBody>
-        </p:sp>
-        <p:sp>
-          <p:nvSpPr>
-            <p:cNvPr id="238" name="矩形 237">
-              <a:extLst>
-                <a:ext uri="{FF2B5EF4-FFF2-40B4-BE49-F238E27FC236}">
-                  <a16:creationId xmlns:a16="http://schemas.microsoft.com/office/drawing/2014/main" id="{36ECE419-1F55-4263-AD90-BEEE36C9EF98}"/>
-                </a:ext>
-              </a:extLst>
-            </p:cNvPr>
-            <p:cNvSpPr/>
-            <p:nvPr/>
-          </p:nvSpPr>
-          <p:spPr>
-            <a:xfrm>
-              <a:off x="3701538" y="5894442"/>
-              <a:ext cx="286511" cy="276999"/>
-            </a:xfrm>
-            <a:prstGeom prst="rect">
-              <a:avLst/>
-            </a:prstGeom>
-            <a:solidFill>
-              <a:schemeClr val="bg2">
-                <a:lumMod val="75000"/>
-              </a:schemeClr>
-            </a:solidFill>
-          </p:spPr>
-          <p:style>
-            <a:lnRef idx="2">
-              <a:schemeClr val="accent1">
-                <a:shade val="50000"/>
-              </a:schemeClr>
-            </a:lnRef>
-            <a:fillRef idx="1">
-              <a:schemeClr val="accent1"/>
-            </a:fillRef>
-            <a:effectRef idx="0">
-              <a:schemeClr val="accent1"/>
-            </a:effectRef>
-            <a:fontRef idx="minor">
-              <a:schemeClr val="lt1"/>
-            </a:fontRef>
-          </p:style>
-          <p:txBody>
-            <a:bodyPr rtlCol="0" anchor="ctr"/>
-            <a:lstStyle/>
-            <a:p>
-              <a:pPr algn="ctr"/>
-              <a:endParaRPr lang="zh-CN" altLang="en-US" sz="2019"/>
-            </a:p>
-          </p:txBody>
-        </p:sp>
-      </p:grpSp>
+            <a:ext cx="279593" cy="313735"/>
+          </a:xfrm>
+          <a:prstGeom prst="rect">
+            <a:avLst/>
+          </a:prstGeom>
+          <a:solidFill>
+            <a:srgbClr val="6C8DBD"/>
+          </a:solidFill>
+        </p:spPr>
+        <p:style>
+          <a:lnRef idx="2">
+            <a:schemeClr val="accent1">
+              <a:shade val="50000"/>
+            </a:schemeClr>
+          </a:lnRef>
+          <a:fillRef idx="1">
+            <a:schemeClr val="accent1"/>
+          </a:fillRef>
+          <a:effectRef idx="0">
+            <a:schemeClr val="accent1"/>
+          </a:effectRef>
+          <a:fontRef idx="minor">
+            <a:schemeClr val="lt1"/>
+          </a:fontRef>
+        </p:style>
+        <p:txBody>
+          <a:bodyPr rtlCol="0" anchor="ctr"/>
+          <a:lstStyle/>
+          <a:p>
+            <a:pPr algn="ctr"/>
+            <a:endParaRPr lang="zh-CN" altLang="en-US" sz="2019"/>
+          </a:p>
+        </p:txBody>
+      </p:sp>
+      <p:sp>
+        <p:nvSpPr>
+          <p:cNvPr id="217" name="矩形 216">
+            <a:extLst>
+              <a:ext uri="{FF2B5EF4-FFF2-40B4-BE49-F238E27FC236}">
+                <a16:creationId xmlns:a16="http://schemas.microsoft.com/office/drawing/2014/main" id="{31221401-A66A-4B1E-A662-E9CF7279CF92}"/>
+              </a:ext>
+            </a:extLst>
+          </p:cNvPr>
+          <p:cNvSpPr/>
+          <p:nvPr/>
+        </p:nvSpPr>
+        <p:spPr>
+          <a:xfrm>
+            <a:off x="948643" y="400342"/>
+            <a:ext cx="279593" cy="313735"/>
+          </a:xfrm>
+          <a:prstGeom prst="rect">
+            <a:avLst/>
+          </a:prstGeom>
+          <a:solidFill>
+            <a:srgbClr val="C1A9C6"/>
+          </a:solidFill>
+        </p:spPr>
+        <p:style>
+          <a:lnRef idx="2">
+            <a:schemeClr val="accent1">
+              <a:shade val="50000"/>
+            </a:schemeClr>
+          </a:lnRef>
+          <a:fillRef idx="1">
+            <a:schemeClr val="accent1"/>
+          </a:fillRef>
+          <a:effectRef idx="0">
+            <a:schemeClr val="accent1"/>
+          </a:effectRef>
+          <a:fontRef idx="minor">
+            <a:schemeClr val="lt1"/>
+          </a:fontRef>
+        </p:style>
+        <p:txBody>
+          <a:bodyPr rtlCol="0" anchor="ctr"/>
+          <a:lstStyle/>
+          <a:p>
+            <a:pPr algn="ctr"/>
+            <a:endParaRPr lang="zh-CN" altLang="en-US" sz="2019"/>
+          </a:p>
+        </p:txBody>
+      </p:sp>
+      <p:sp>
+        <p:nvSpPr>
+          <p:cNvPr id="218" name="矩形 217">
+            <a:extLst>
+              <a:ext uri="{FF2B5EF4-FFF2-40B4-BE49-F238E27FC236}">
+                <a16:creationId xmlns:a16="http://schemas.microsoft.com/office/drawing/2014/main" id="{6B5C2AFF-CC80-490D-B573-AB7CD4A8C016}"/>
+              </a:ext>
+            </a:extLst>
+          </p:cNvPr>
+          <p:cNvSpPr/>
+          <p:nvPr/>
+        </p:nvSpPr>
+        <p:spPr>
+          <a:xfrm>
+            <a:off x="1238759" y="400342"/>
+            <a:ext cx="279593" cy="313735"/>
+          </a:xfrm>
+          <a:prstGeom prst="rect">
+            <a:avLst/>
+          </a:prstGeom>
+          <a:solidFill>
+            <a:srgbClr val="CAE0B0"/>
+          </a:solidFill>
+        </p:spPr>
+        <p:style>
+          <a:lnRef idx="2">
+            <a:schemeClr val="accent1">
+              <a:shade val="50000"/>
+            </a:schemeClr>
+          </a:lnRef>
+          <a:fillRef idx="1">
+            <a:schemeClr val="accent1"/>
+          </a:fillRef>
+          <a:effectRef idx="0">
+            <a:schemeClr val="accent1"/>
+          </a:effectRef>
+          <a:fontRef idx="minor">
+            <a:schemeClr val="lt1"/>
+          </a:fontRef>
+        </p:style>
+        <p:txBody>
+          <a:bodyPr rtlCol="0" anchor="ctr"/>
+          <a:lstStyle/>
+          <a:p>
+            <a:pPr algn="ctr"/>
+            <a:endParaRPr lang="zh-CN" altLang="en-US" sz="2019"/>
+          </a:p>
+        </p:txBody>
+      </p:sp>
+      <p:sp>
+        <p:nvSpPr>
+          <p:cNvPr id="219" name="矩形 218">
+            <a:extLst>
+              <a:ext uri="{FF2B5EF4-FFF2-40B4-BE49-F238E27FC236}">
+                <a16:creationId xmlns:a16="http://schemas.microsoft.com/office/drawing/2014/main" id="{CF28B4AE-8701-4C26-9DF4-EACC55A2748E}"/>
+              </a:ext>
+            </a:extLst>
+          </p:cNvPr>
+          <p:cNvSpPr/>
+          <p:nvPr/>
+        </p:nvSpPr>
+        <p:spPr>
+          <a:xfrm>
+            <a:off x="1532775" y="402785"/>
+            <a:ext cx="279593" cy="313735"/>
+          </a:xfrm>
+          <a:prstGeom prst="rect">
+            <a:avLst/>
+          </a:prstGeom>
+          <a:solidFill>
+            <a:srgbClr val="93BAD8"/>
+          </a:solidFill>
+        </p:spPr>
+        <p:style>
+          <a:lnRef idx="2">
+            <a:schemeClr val="accent1">
+              <a:shade val="50000"/>
+            </a:schemeClr>
+          </a:lnRef>
+          <a:fillRef idx="1">
+            <a:schemeClr val="accent1"/>
+          </a:fillRef>
+          <a:effectRef idx="0">
+            <a:schemeClr val="accent1"/>
+          </a:effectRef>
+          <a:fontRef idx="minor">
+            <a:schemeClr val="lt1"/>
+          </a:fontRef>
+        </p:style>
+        <p:txBody>
+          <a:bodyPr rtlCol="0" anchor="ctr"/>
+          <a:lstStyle/>
+          <a:p>
+            <a:pPr algn="ctr"/>
+            <a:endParaRPr lang="zh-CN" altLang="en-US" sz="2019"/>
+          </a:p>
+        </p:txBody>
+      </p:sp>
+      <p:sp>
+        <p:nvSpPr>
+          <p:cNvPr id="220" name="矩形 219">
+            <a:extLst>
+              <a:ext uri="{FF2B5EF4-FFF2-40B4-BE49-F238E27FC236}">
+                <a16:creationId xmlns:a16="http://schemas.microsoft.com/office/drawing/2014/main" id="{30B7006A-27DE-4B4E-B8BC-F6EFFF4DDDD3}"/>
+              </a:ext>
+            </a:extLst>
+          </p:cNvPr>
+          <p:cNvSpPr/>
+          <p:nvPr/>
+        </p:nvSpPr>
+        <p:spPr>
+          <a:xfrm>
+            <a:off x="1825130" y="402785"/>
+            <a:ext cx="279593" cy="313735"/>
+          </a:xfrm>
+          <a:prstGeom prst="rect">
+            <a:avLst/>
+          </a:prstGeom>
+          <a:solidFill>
+            <a:srgbClr val="918296"/>
+          </a:solidFill>
+        </p:spPr>
+        <p:style>
+          <a:lnRef idx="2">
+            <a:schemeClr val="accent1">
+              <a:shade val="50000"/>
+            </a:schemeClr>
+          </a:lnRef>
+          <a:fillRef idx="1">
+            <a:schemeClr val="accent1"/>
+          </a:fillRef>
+          <a:effectRef idx="0">
+            <a:schemeClr val="accent1"/>
+          </a:effectRef>
+          <a:fontRef idx="minor">
+            <a:schemeClr val="lt1"/>
+          </a:fontRef>
+        </p:style>
+        <p:txBody>
+          <a:bodyPr rtlCol="0" anchor="ctr"/>
+          <a:lstStyle/>
+          <a:p>
+            <a:pPr algn="ctr"/>
+            <a:endParaRPr lang="zh-CN" altLang="en-US" sz="2019"/>
+          </a:p>
+        </p:txBody>
+      </p:sp>
+      <p:sp>
+        <p:nvSpPr>
+          <p:cNvPr id="221" name="矩形 220">
+            <a:extLst>
+              <a:ext uri="{FF2B5EF4-FFF2-40B4-BE49-F238E27FC236}">
+                <a16:creationId xmlns:a16="http://schemas.microsoft.com/office/drawing/2014/main" id="{BF604D8B-B5DA-4636-943D-3CA4208A4911}"/>
+              </a:ext>
+            </a:extLst>
+          </p:cNvPr>
+          <p:cNvSpPr/>
+          <p:nvPr/>
+        </p:nvSpPr>
+        <p:spPr>
+          <a:xfrm>
+            <a:off x="2115100" y="402785"/>
+            <a:ext cx="279593" cy="313735"/>
+          </a:xfrm>
+          <a:prstGeom prst="rect">
+            <a:avLst/>
+          </a:prstGeom>
+          <a:solidFill>
+            <a:schemeClr val="accent4">
+              <a:lumMod val="20000"/>
+              <a:lumOff val="80000"/>
+            </a:schemeClr>
+          </a:solidFill>
+        </p:spPr>
+        <p:style>
+          <a:lnRef idx="2">
+            <a:schemeClr val="accent1">
+              <a:shade val="50000"/>
+            </a:schemeClr>
+          </a:lnRef>
+          <a:fillRef idx="1">
+            <a:schemeClr val="accent1"/>
+          </a:fillRef>
+          <a:effectRef idx="0">
+            <a:schemeClr val="accent1"/>
+          </a:effectRef>
+          <a:fontRef idx="minor">
+            <a:schemeClr val="lt1"/>
+          </a:fontRef>
+        </p:style>
+        <p:txBody>
+          <a:bodyPr rtlCol="0" anchor="ctr"/>
+          <a:lstStyle/>
+          <a:p>
+            <a:pPr algn="ctr"/>
+            <a:endParaRPr lang="zh-CN" altLang="en-US" sz="2019"/>
+          </a:p>
+        </p:txBody>
+      </p:sp>
+      <p:sp>
+        <p:nvSpPr>
+          <p:cNvPr id="238" name="矩形 237">
+            <a:extLst>
+              <a:ext uri="{FF2B5EF4-FFF2-40B4-BE49-F238E27FC236}">
+                <a16:creationId xmlns:a16="http://schemas.microsoft.com/office/drawing/2014/main" id="{36ECE419-1F55-4263-AD90-BEEE36C9EF98}"/>
+              </a:ext>
+            </a:extLst>
+          </p:cNvPr>
+          <p:cNvSpPr/>
+          <p:nvPr/>
+        </p:nvSpPr>
+        <p:spPr>
+          <a:xfrm>
+            <a:off x="2408536" y="405155"/>
+            <a:ext cx="279593" cy="313735"/>
+          </a:xfrm>
+          <a:prstGeom prst="rect">
+            <a:avLst/>
+          </a:prstGeom>
+          <a:solidFill>
+            <a:schemeClr val="bg2">
+              <a:lumMod val="75000"/>
+            </a:schemeClr>
+          </a:solidFill>
+        </p:spPr>
+        <p:style>
+          <a:lnRef idx="2">
+            <a:schemeClr val="accent1">
+              <a:shade val="50000"/>
+            </a:schemeClr>
+          </a:lnRef>
+          <a:fillRef idx="1">
+            <a:schemeClr val="accent1"/>
+          </a:fillRef>
+          <a:effectRef idx="0">
+            <a:schemeClr val="accent1"/>
+          </a:effectRef>
+          <a:fontRef idx="minor">
+            <a:schemeClr val="lt1"/>
+          </a:fontRef>
+        </p:style>
+        <p:txBody>
+          <a:bodyPr rtlCol="0" anchor="ctr"/>
+          <a:lstStyle/>
+          <a:p>
+            <a:pPr algn="ctr"/>
+            <a:endParaRPr lang="zh-CN" altLang="en-US" sz="2019"/>
+          </a:p>
+        </p:txBody>
+      </p:sp>
       <p:cxnSp>
         <p:nvCxnSpPr>
           <p:cNvPr id="241" name="连接符: 肘形 240">
@@ -8535,993 +8482,972 @@
           </a:p>
         </p:txBody>
       </p:sp>
-      <p:grpSp>
-        <p:nvGrpSpPr>
-          <p:cNvPr id="302" name="组合 301">
+      <p:sp>
+        <p:nvSpPr>
+          <p:cNvPr id="186" name="矩形: 圆角 185">
             <a:extLst>
               <a:ext uri="{FF2B5EF4-FFF2-40B4-BE49-F238E27FC236}">
-                <a16:creationId xmlns:a16="http://schemas.microsoft.com/office/drawing/2014/main" id="{355B9C50-F532-4B4C-8849-2A80B159AC8F}"/>
+                <a16:creationId xmlns:a16="http://schemas.microsoft.com/office/drawing/2014/main" id="{0CB0C907-AC84-4BFB-8CDD-D3EA100698CB}"/>
               </a:ext>
             </a:extLst>
           </p:cNvPr>
-          <p:cNvGrpSpPr/>
+          <p:cNvSpPr/>
           <p:nvPr/>
-        </p:nvGrpSpPr>
-        <p:grpSpPr>
+        </p:nvSpPr>
+        <p:spPr>
           <a:xfrm>
-            <a:off x="74045" y="2460173"/>
-            <a:ext cx="3186391" cy="2328706"/>
-            <a:chOff x="83212" y="2666592"/>
-            <a:chExt cx="3186391" cy="2328706"/>
-          </a:xfrm>
-        </p:grpSpPr>
-        <p:sp>
-          <p:nvSpPr>
-            <p:cNvPr id="186" name="矩形: 圆角 185">
-              <a:extLst>
-                <a:ext uri="{FF2B5EF4-FFF2-40B4-BE49-F238E27FC236}">
-                  <a16:creationId xmlns:a16="http://schemas.microsoft.com/office/drawing/2014/main" id="{0CB0C907-AC84-4BFB-8CDD-D3EA100698CB}"/>
-                </a:ext>
-              </a:extLst>
-            </p:cNvPr>
-            <p:cNvSpPr/>
-            <p:nvPr/>
-          </p:nvSpPr>
-          <p:spPr>
-            <a:xfrm>
-              <a:off x="393089" y="4410473"/>
-              <a:ext cx="2439012" cy="584825"/>
-            </a:xfrm>
-            <a:prstGeom prst="roundRect">
-              <a:avLst/>
-            </a:prstGeom>
+            <a:off x="383922" y="4204054"/>
+            <a:ext cx="2439012" cy="584825"/>
+          </a:xfrm>
+          <a:prstGeom prst="roundRect">
+            <a:avLst/>
+          </a:prstGeom>
+          <a:solidFill>
+            <a:srgbClr val="C7AECF"/>
+          </a:solidFill>
+          <a:ln>
             <a:solidFill>
-              <a:srgbClr val="C7AECF"/>
+              <a:schemeClr val="tx1"/>
             </a:solidFill>
-            <a:ln>
-              <a:solidFill>
-                <a:schemeClr val="tx1"/>
-              </a:solidFill>
-            </a:ln>
-          </p:spPr>
-          <p:style>
-            <a:lnRef idx="2">
-              <a:schemeClr val="accent1">
-                <a:shade val="50000"/>
-              </a:schemeClr>
-            </a:lnRef>
-            <a:fillRef idx="1">
-              <a:schemeClr val="accent1"/>
-            </a:fillRef>
-            <a:effectRef idx="0">
-              <a:schemeClr val="accent1"/>
-            </a:effectRef>
-            <a:fontRef idx="minor">
-              <a:schemeClr val="lt1"/>
-            </a:fontRef>
-          </p:style>
-          <p:txBody>
-            <a:bodyPr rtlCol="0" anchor="ctr"/>
-            <a:lstStyle/>
-            <a:p>
-              <a:pPr algn="ctr"/>
-              <a:endParaRPr lang="zh-CN" altLang="en-US" sz="2019" dirty="0"/>
-            </a:p>
-          </p:txBody>
-        </p:sp>
-        <p:sp>
-          <p:nvSpPr>
-            <p:cNvPr id="187" name="文本框 186">
-              <a:extLst>
-                <a:ext uri="{FF2B5EF4-FFF2-40B4-BE49-F238E27FC236}">
-                  <a16:creationId xmlns:a16="http://schemas.microsoft.com/office/drawing/2014/main" id="{09122E33-0A45-4E78-8266-A878EAB59795}"/>
-                </a:ext>
-              </a:extLst>
-            </p:cNvPr>
-            <p:cNvSpPr txBox="1"/>
-            <p:nvPr/>
-          </p:nvSpPr>
-          <p:spPr>
-            <a:xfrm>
-              <a:off x="654642" y="4401125"/>
-              <a:ext cx="1915909" cy="506549"/>
-            </a:xfrm>
-            <a:prstGeom prst="rect">
-              <a:avLst/>
-            </a:prstGeom>
-            <a:noFill/>
-          </p:spPr>
-          <p:txBody>
-            <a:bodyPr wrap="none" rtlCol="0">
-              <a:spAutoFit/>
-            </a:bodyPr>
-            <a:lstStyle/>
-            <a:p>
-              <a:pPr algn="ctr"/>
-              <a:r>
-                <a:rPr lang="en-US" altLang="zh-CN" sz="1346" dirty="0">
+          </a:ln>
+        </p:spPr>
+        <p:style>
+          <a:lnRef idx="2">
+            <a:schemeClr val="accent1">
+              <a:shade val="50000"/>
+            </a:schemeClr>
+          </a:lnRef>
+          <a:fillRef idx="1">
+            <a:schemeClr val="accent1"/>
+          </a:fillRef>
+          <a:effectRef idx="0">
+            <a:schemeClr val="accent1"/>
+          </a:effectRef>
+          <a:fontRef idx="minor">
+            <a:schemeClr val="lt1"/>
+          </a:fontRef>
+        </p:style>
+        <p:txBody>
+          <a:bodyPr rtlCol="0" anchor="ctr"/>
+          <a:lstStyle/>
+          <a:p>
+            <a:pPr algn="ctr"/>
+            <a:endParaRPr lang="zh-CN" altLang="en-US" sz="2019" dirty="0"/>
+          </a:p>
+        </p:txBody>
+      </p:sp>
+      <p:sp>
+        <p:nvSpPr>
+          <p:cNvPr id="187" name="文本框 186">
+            <a:extLst>
+              <a:ext uri="{FF2B5EF4-FFF2-40B4-BE49-F238E27FC236}">
+                <a16:creationId xmlns:a16="http://schemas.microsoft.com/office/drawing/2014/main" id="{09122E33-0A45-4E78-8266-A878EAB59795}"/>
+              </a:ext>
+            </a:extLst>
+          </p:cNvPr>
+          <p:cNvSpPr txBox="1"/>
+          <p:nvPr/>
+        </p:nvSpPr>
+        <p:spPr>
+          <a:xfrm>
+            <a:off x="645475" y="4194706"/>
+            <a:ext cx="1915909" cy="506549"/>
+          </a:xfrm>
+          <a:prstGeom prst="rect">
+            <a:avLst/>
+          </a:prstGeom>
+          <a:noFill/>
+        </p:spPr>
+        <p:txBody>
+          <a:bodyPr wrap="none" rtlCol="0">
+            <a:spAutoFit/>
+          </a:bodyPr>
+          <a:lstStyle/>
+          <a:p>
+            <a:pPr algn="ctr"/>
+            <a:r>
+              <a:rPr lang="en-US" altLang="zh-CN" sz="1346" dirty="0">
+                <a:latin typeface="宋体" panose="02010600030101010101" pitchFamily="2" charset="-122"/>
+                <a:ea typeface="宋体" panose="02010600030101010101" pitchFamily="2" charset="-122"/>
+              </a:rPr>
+              <a:t>DWT</a:t>
+            </a:r>
+          </a:p>
+          <a:p>
+            <a:pPr algn="ctr"/>
+            <a:r>
+              <a:rPr lang="zh-CN" altLang="en-US" sz="1346" dirty="0">
+                <a:latin typeface="宋体" panose="02010600030101010101" pitchFamily="2" charset="-122"/>
+                <a:ea typeface="宋体" panose="02010600030101010101" pitchFamily="2" charset="-122"/>
+              </a:rPr>
+              <a:t>（一维离散小波变换）</a:t>
+            </a:r>
+          </a:p>
+        </p:txBody>
+      </p:sp>
+      <p:sp>
+        <p:nvSpPr>
+          <p:cNvPr id="193" name="矩形: 圆角 192">
+            <a:extLst>
+              <a:ext uri="{FF2B5EF4-FFF2-40B4-BE49-F238E27FC236}">
+                <a16:creationId xmlns:a16="http://schemas.microsoft.com/office/drawing/2014/main" id="{C0287108-B32E-443E-B926-CD7F68F91427}"/>
+              </a:ext>
+            </a:extLst>
+          </p:cNvPr>
+          <p:cNvSpPr/>
+          <p:nvPr/>
+        </p:nvSpPr>
+        <p:spPr>
+          <a:xfrm>
+            <a:off x="250329" y="3126005"/>
+            <a:ext cx="1381725" cy="584825"/>
+          </a:xfrm>
+          <a:prstGeom prst="roundRect">
+            <a:avLst/>
+          </a:prstGeom>
+          <a:solidFill>
+            <a:srgbClr val="BBD4EC"/>
+          </a:solidFill>
+          <a:ln>
+            <a:solidFill>
+              <a:schemeClr val="tx1"/>
+            </a:solidFill>
+          </a:ln>
+        </p:spPr>
+        <p:style>
+          <a:lnRef idx="2">
+            <a:schemeClr val="accent1">
+              <a:shade val="50000"/>
+            </a:schemeClr>
+          </a:lnRef>
+          <a:fillRef idx="1">
+            <a:schemeClr val="accent1"/>
+          </a:fillRef>
+          <a:effectRef idx="0">
+            <a:schemeClr val="accent1"/>
+          </a:effectRef>
+          <a:fontRef idx="minor">
+            <a:schemeClr val="lt1"/>
+          </a:fontRef>
+        </p:style>
+        <p:txBody>
+          <a:bodyPr rtlCol="0" anchor="ctr"/>
+          <a:lstStyle/>
+          <a:p>
+            <a:pPr algn="ctr"/>
+            <a:endParaRPr lang="zh-CN" altLang="en-US" sz="2019"/>
+          </a:p>
+        </p:txBody>
+      </p:sp>
+      <p:sp>
+        <p:nvSpPr>
+          <p:cNvPr id="194" name="矩形: 圆角 193">
+            <a:extLst>
+              <a:ext uri="{FF2B5EF4-FFF2-40B4-BE49-F238E27FC236}">
+                <a16:creationId xmlns:a16="http://schemas.microsoft.com/office/drawing/2014/main" id="{C92CE03C-B025-4D5D-A26B-503B100AE3E7}"/>
+              </a:ext>
+            </a:extLst>
+          </p:cNvPr>
+          <p:cNvSpPr/>
+          <p:nvPr/>
+        </p:nvSpPr>
+        <p:spPr>
+          <a:xfrm>
+            <a:off x="1672527" y="3119099"/>
+            <a:ext cx="1430763" cy="584825"/>
+          </a:xfrm>
+          <a:prstGeom prst="roundRect">
+            <a:avLst/>
+          </a:prstGeom>
+          <a:solidFill>
+            <a:srgbClr val="F8D09E"/>
+          </a:solidFill>
+          <a:ln>
+            <a:solidFill>
+              <a:schemeClr val="tx1"/>
+            </a:solidFill>
+          </a:ln>
+        </p:spPr>
+        <p:style>
+          <a:lnRef idx="2">
+            <a:schemeClr val="accent1">
+              <a:shade val="50000"/>
+            </a:schemeClr>
+          </a:lnRef>
+          <a:fillRef idx="1">
+            <a:schemeClr val="accent1"/>
+          </a:fillRef>
+          <a:effectRef idx="0">
+            <a:schemeClr val="accent1"/>
+          </a:effectRef>
+          <a:fontRef idx="minor">
+            <a:schemeClr val="lt1"/>
+          </a:fontRef>
+        </p:style>
+        <p:txBody>
+          <a:bodyPr rtlCol="0" anchor="ctr"/>
+          <a:lstStyle/>
+          <a:p>
+            <a:pPr algn="ctr"/>
+            <a:endParaRPr lang="zh-CN" altLang="en-US" sz="2019"/>
+          </a:p>
+        </p:txBody>
+      </p:sp>
+      <mc:AlternateContent xmlns:mc="http://schemas.openxmlformats.org/markup-compatibility/2006">
+        <mc:Choice xmlns:a14="http://schemas.microsoft.com/office/drawing/2010/main" Requires="a14">
+          <p:sp>
+            <p:nvSpPr>
+              <p:cNvPr id="195" name="文本框 194">
+                <a:extLst>
+                  <a:ext uri="{FF2B5EF4-FFF2-40B4-BE49-F238E27FC236}">
+                    <a16:creationId xmlns:a16="http://schemas.microsoft.com/office/drawing/2014/main" id="{3C6A110D-FC1C-47E3-8BC1-8988DA242F2C}"/>
+                  </a:ext>
+                </a:extLst>
+              </p:cNvPr>
+              <p:cNvSpPr txBox="1"/>
+              <p:nvPr/>
+            </p:nvSpPr>
+            <p:spPr>
+              <a:xfrm>
+                <a:off x="114365" y="3158236"/>
+                <a:ext cx="1666931" cy="506549"/>
+              </a:xfrm>
+              <a:prstGeom prst="rect">
+                <a:avLst/>
+              </a:prstGeom>
+              <a:noFill/>
+            </p:spPr>
+            <p:txBody>
+              <a:bodyPr wrap="none" rtlCol="0">
+                <a:spAutoFit/>
+              </a:bodyPr>
+              <a:lstStyle/>
+              <a:p>
+                <a:pPr algn="ctr"/>
+                <a:r>
+                  <a:rPr lang="en-US" altLang="zh-CN" sz="1346" dirty="0">
+                    <a:latin typeface="宋体" panose="02010600030101010101" pitchFamily="2" charset="-122"/>
+                    <a:ea typeface="宋体" panose="02010600030101010101" pitchFamily="2" charset="-122"/>
+                  </a:rPr>
+                  <a:t>Patchization</a:t>
+                </a:r>
+                <a:br>
+                  <a:rPr lang="en-US" altLang="zh-CN" sz="1346" dirty="0">
+                    <a:latin typeface="宋体" panose="02010600030101010101" pitchFamily="2" charset="-122"/>
+                    <a:ea typeface="宋体" panose="02010600030101010101" pitchFamily="2" charset="-122"/>
+                  </a:rPr>
+                </a:br>
+                <a:r>
+                  <a:rPr lang="zh-CN" altLang="en-US" sz="1346" dirty="0">
+                    <a:latin typeface="宋体" panose="02010600030101010101" pitchFamily="2" charset="-122"/>
+                    <a:ea typeface="宋体" panose="02010600030101010101" pitchFamily="2" charset="-122"/>
+                  </a:rPr>
+                  <a:t>（序列分块，</a:t>
+                </a:r>
+                <a14:m>
+                  <m:oMath xmlns:m="http://schemas.openxmlformats.org/officeDocument/2006/math">
+                    <m:r>
+                      <a:rPr lang="en-US" altLang="zh-CN" sz="1346" i="1">
+                        <a:latin typeface="Cambria Math" panose="02040503050406030204" pitchFamily="18" charset="0"/>
+                        <a:ea typeface="宋体" panose="02010600030101010101" pitchFamily="2" charset="-122"/>
+                      </a:rPr>
+                      <m:t>𝑃</m:t>
+                    </m:r>
+                    <m:r>
+                      <a:rPr lang="en-US" altLang="zh-CN" sz="1346" i="1">
+                        <a:latin typeface="Cambria Math" panose="02040503050406030204" pitchFamily="18" charset="0"/>
+                        <a:ea typeface="宋体" panose="02010600030101010101" pitchFamily="2" charset="-122"/>
+                      </a:rPr>
+                      <m:t>,</m:t>
+                    </m:r>
+                    <m:r>
+                      <a:rPr lang="en-US" altLang="zh-CN" sz="1346" i="1">
+                        <a:latin typeface="Cambria Math" panose="02040503050406030204" pitchFamily="18" charset="0"/>
+                        <a:ea typeface="宋体" panose="02010600030101010101" pitchFamily="2" charset="-122"/>
+                      </a:rPr>
+                      <m:t>𝑆</m:t>
+                    </m:r>
+                  </m:oMath>
+                </a14:m>
+                <a:r>
+                  <a:rPr lang="zh-CN" altLang="en-US" sz="1346" dirty="0">
+                    <a:latin typeface="宋体" panose="02010600030101010101" pitchFamily="2" charset="-122"/>
+                    <a:ea typeface="宋体" panose="02010600030101010101" pitchFamily="2" charset="-122"/>
+                  </a:rPr>
+                  <a:t>）</a:t>
+                </a:r>
+              </a:p>
+            </p:txBody>
+          </p:sp>
+        </mc:Choice>
+        <mc:Fallback>
+          <p:sp>
+            <p:nvSpPr>
+              <p:cNvPr id="195" name="文本框 194">
+                <a:extLst>
+                  <a:ext uri="{FF2B5EF4-FFF2-40B4-BE49-F238E27FC236}">
+                    <a16:creationId xmlns:a16="http://schemas.microsoft.com/office/drawing/2014/main" id="{3C6A110D-FC1C-47E3-8BC1-8988DA242F2C}"/>
+                  </a:ext>
+                </a:extLst>
+              </p:cNvPr>
+              <p:cNvSpPr txBox="1">
+                <a:spLocks noRot="1" noChangeAspect="1" noMove="1" noResize="1" noEditPoints="1" noAdjustHandles="1" noChangeArrowheads="1" noChangeShapeType="1" noTextEdit="1"/>
+              </p:cNvSpPr>
+              <p:nvPr/>
+            </p:nvSpPr>
+            <p:spPr>
+              <a:xfrm>
+                <a:off x="114365" y="3158236"/>
+                <a:ext cx="1666931" cy="506549"/>
+              </a:xfrm>
+              <a:prstGeom prst="rect">
+                <a:avLst/>
+              </a:prstGeom>
+              <a:blipFill>
+                <a:blip r:embed="rId10"/>
+                <a:stretch>
+                  <a:fillRect l="-733" t="-1205" b="-9639"/>
+                </a:stretch>
+              </a:blipFill>
+            </p:spPr>
+            <p:txBody>
+              <a:bodyPr/>
+              <a:lstStyle/>
+              <a:p>
+                <a:r>
+                  <a:rPr lang="zh-CN" altLang="en-US">
+                    <a:noFill/>
+                  </a:rPr>
+                  <a:t> </a:t>
+                </a:r>
+              </a:p>
+            </p:txBody>
+          </p:sp>
+        </mc:Fallback>
+      </mc:AlternateContent>
+      <mc:AlternateContent xmlns:mc="http://schemas.openxmlformats.org/markup-compatibility/2006">
+        <mc:Choice xmlns:a14="http://schemas.microsoft.com/office/drawing/2010/main" Requires="a14">
+          <p:sp>
+            <p:nvSpPr>
+              <p:cNvPr id="196" name="文本框 195">
+                <a:extLst>
+                  <a:ext uri="{FF2B5EF4-FFF2-40B4-BE49-F238E27FC236}">
+                    <a16:creationId xmlns:a16="http://schemas.microsoft.com/office/drawing/2014/main" id="{1794E5B4-EB06-4ACF-A5FD-197AA2888A91}"/>
+                  </a:ext>
+                </a:extLst>
+              </p:cNvPr>
+              <p:cNvSpPr txBox="1"/>
+              <p:nvPr/>
+            </p:nvSpPr>
+            <p:spPr>
+              <a:xfrm>
+                <a:off x="1547465" y="3166315"/>
+                <a:ext cx="1712971" cy="506549"/>
+              </a:xfrm>
+              <a:prstGeom prst="rect">
+                <a:avLst/>
+              </a:prstGeom>
+              <a:noFill/>
+            </p:spPr>
+            <p:txBody>
+              <a:bodyPr wrap="square" rtlCol="0">
+                <a:spAutoFit/>
+              </a:bodyPr>
+              <a:lstStyle/>
+              <a:p>
+                <a:pPr algn="ctr"/>
+                <a:r>
+                  <a:rPr lang="en-US" altLang="zh-CN" sz="1346" dirty="0">
+                    <a:latin typeface="宋体" panose="02010600030101010101" pitchFamily="2" charset="-122"/>
+                    <a:ea typeface="宋体" panose="02010600030101010101" pitchFamily="2" charset="-122"/>
+                  </a:rPr>
+                  <a:t>Patchization</a:t>
+                </a:r>
+                <a:br>
+                  <a:rPr lang="en-US" altLang="zh-CN" sz="1346" dirty="0">
+                    <a:latin typeface="宋体" panose="02010600030101010101" pitchFamily="2" charset="-122"/>
+                    <a:ea typeface="宋体" panose="02010600030101010101" pitchFamily="2" charset="-122"/>
+                  </a:rPr>
+                </a:br>
+                <a:r>
+                  <a:rPr lang="zh-CN" altLang="en-US" sz="1346" dirty="0">
+                    <a:latin typeface="宋体" panose="02010600030101010101" pitchFamily="2" charset="-122"/>
+                    <a:ea typeface="宋体" panose="02010600030101010101" pitchFamily="2" charset="-122"/>
+                  </a:rPr>
+                  <a:t>（序列分块，</a:t>
+                </a:r>
+                <a14:m>
+                  <m:oMath xmlns:m="http://schemas.openxmlformats.org/officeDocument/2006/math">
+                    <m:r>
+                      <a:rPr lang="en-US" altLang="zh-CN" sz="1346" i="1">
+                        <a:latin typeface="Cambria Math" panose="02040503050406030204" pitchFamily="18" charset="0"/>
+                        <a:ea typeface="宋体" panose="02010600030101010101" pitchFamily="2" charset="-122"/>
+                      </a:rPr>
+                      <m:t>𝑃</m:t>
+                    </m:r>
+                    <m:r>
+                      <a:rPr lang="en-US" altLang="zh-CN" sz="1346" i="1">
+                        <a:latin typeface="Cambria Math" panose="02040503050406030204" pitchFamily="18" charset="0"/>
+                        <a:ea typeface="宋体" panose="02010600030101010101" pitchFamily="2" charset="-122"/>
+                      </a:rPr>
+                      <m:t>,</m:t>
+                    </m:r>
+                    <m:r>
+                      <a:rPr lang="en-US" altLang="zh-CN" sz="1346" i="1">
+                        <a:latin typeface="Cambria Math" panose="02040503050406030204" pitchFamily="18" charset="0"/>
+                        <a:ea typeface="宋体" panose="02010600030101010101" pitchFamily="2" charset="-122"/>
+                      </a:rPr>
+                      <m:t>𝑆</m:t>
+                    </m:r>
+                  </m:oMath>
+                </a14:m>
+                <a:r>
+                  <a:rPr lang="zh-CN" altLang="en-US" sz="1346" dirty="0">
+                    <a:latin typeface="宋体" panose="02010600030101010101" pitchFamily="2" charset="-122"/>
+                    <a:ea typeface="宋体" panose="02010600030101010101" pitchFamily="2" charset="-122"/>
+                  </a:rPr>
+                  <a:t>）</a:t>
+                </a:r>
+              </a:p>
+            </p:txBody>
+          </p:sp>
+        </mc:Choice>
+        <mc:Fallback>
+          <p:sp>
+            <p:nvSpPr>
+              <p:cNvPr id="196" name="文本框 195">
+                <a:extLst>
+                  <a:ext uri="{FF2B5EF4-FFF2-40B4-BE49-F238E27FC236}">
+                    <a16:creationId xmlns:a16="http://schemas.microsoft.com/office/drawing/2014/main" id="{1794E5B4-EB06-4ACF-A5FD-197AA2888A91}"/>
+                  </a:ext>
+                </a:extLst>
+              </p:cNvPr>
+              <p:cNvSpPr txBox="1">
+                <a:spLocks noRot="1" noChangeAspect="1" noMove="1" noResize="1" noEditPoints="1" noAdjustHandles="1" noChangeArrowheads="1" noChangeShapeType="1" noTextEdit="1"/>
+              </p:cNvSpPr>
+              <p:nvPr/>
+            </p:nvSpPr>
+            <p:spPr>
+              <a:xfrm>
+                <a:off x="1547465" y="3166315"/>
+                <a:ext cx="1712971" cy="506549"/>
+              </a:xfrm>
+              <a:prstGeom prst="rect">
+                <a:avLst/>
+              </a:prstGeom>
+              <a:blipFill>
+                <a:blip r:embed="rId11"/>
+                <a:stretch>
+                  <a:fillRect t="-1190" b="-8333"/>
+                </a:stretch>
+              </a:blipFill>
+            </p:spPr>
+            <p:txBody>
+              <a:bodyPr/>
+              <a:lstStyle/>
+              <a:p>
+                <a:r>
+                  <a:rPr lang="zh-CN" altLang="en-US">
+                    <a:noFill/>
+                  </a:rPr>
+                  <a:t> </a:t>
+                </a:r>
+              </a:p>
+            </p:txBody>
+          </p:sp>
+        </mc:Fallback>
+      </mc:AlternateContent>
+      <mc:AlternateContent xmlns:mc="http://schemas.openxmlformats.org/markup-compatibility/2006">
+        <mc:Choice xmlns:a14="http://schemas.microsoft.com/office/drawing/2010/main" Requires="a14">
+          <p:sp>
+            <p:nvSpPr>
+              <p:cNvPr id="205" name="文本框 204">
+                <a:extLst>
+                  <a:ext uri="{FF2B5EF4-FFF2-40B4-BE49-F238E27FC236}">
+                    <a16:creationId xmlns:a16="http://schemas.microsoft.com/office/drawing/2014/main" id="{2F2952D6-7901-4B02-B159-279C9A90055B}"/>
+                  </a:ext>
+                </a:extLst>
+              </p:cNvPr>
+              <p:cNvSpPr txBox="1"/>
+              <p:nvPr/>
+            </p:nvSpPr>
+            <p:spPr>
+              <a:xfrm>
+                <a:off x="74045" y="2584921"/>
+                <a:ext cx="877163" cy="506549"/>
+              </a:xfrm>
+              <a:prstGeom prst="rect">
+                <a:avLst/>
+              </a:prstGeom>
+              <a:noFill/>
+            </p:spPr>
+            <p:txBody>
+              <a:bodyPr wrap="none" rtlCol="0">
+                <a:spAutoFit/>
+              </a:bodyPr>
+              <a:lstStyle/>
+              <a:p>
+                <a:pPr algn="ctr"/>
+                <a:r>
+                  <a:rPr lang="zh-CN" altLang="en-US" sz="1346" dirty="0">
+                    <a:latin typeface="宋体" panose="02010600030101010101" pitchFamily="2" charset="-122"/>
+                    <a:ea typeface="宋体" panose="02010600030101010101" pitchFamily="2" charset="-122"/>
+                  </a:rPr>
+                  <a:t>低频近似</a:t>
+                </a:r>
+                <a:endParaRPr lang="en-US" altLang="zh-CN" sz="1346" dirty="0">
                   <a:latin typeface="宋体" panose="02010600030101010101" pitchFamily="2" charset="-122"/>
                   <a:ea typeface="宋体" panose="02010600030101010101" pitchFamily="2" charset="-122"/>
-                </a:rPr>
-                <a:t>DWT</a:t>
-              </a:r>
-            </a:p>
-            <a:p>
-              <a:pPr algn="ctr"/>
-              <a:r>
-                <a:rPr lang="zh-CN" altLang="en-US" sz="1346" dirty="0">
+                </a:endParaRPr>
+              </a:p>
+              <a:p>
+                <a:pPr algn="ctr"/>
+                <a:r>
+                  <a:rPr lang="zh-CN" altLang="en-US" sz="1346" dirty="0">
+                    <a:latin typeface="宋体" panose="02010600030101010101" pitchFamily="2" charset="-122"/>
+                    <a:ea typeface="宋体" panose="02010600030101010101" pitchFamily="2" charset="-122"/>
+                  </a:rPr>
+                  <a:t>分量</a:t>
+                </a:r>
+                <a14:m>
+                  <m:oMath xmlns:m="http://schemas.openxmlformats.org/officeDocument/2006/math">
+                    <m:sSub>
+                      <m:sSubPr>
+                        <m:ctrlPr>
+                          <a:rPr lang="en-US" altLang="zh-CN" sz="1346" i="1">
+                            <a:latin typeface="Cambria Math" panose="02040503050406030204" pitchFamily="18" charset="0"/>
+                            <a:ea typeface="宋体" panose="02010600030101010101" pitchFamily="2" charset="-122"/>
+                          </a:rPr>
+                        </m:ctrlPr>
+                      </m:sSubPr>
+                      <m:e>
+                        <m:r>
+                          <a:rPr lang="en-US" altLang="zh-CN" sz="1346" i="1">
+                            <a:latin typeface="Cambria Math" panose="02040503050406030204" pitchFamily="18" charset="0"/>
+                            <a:ea typeface="宋体" panose="02010600030101010101" pitchFamily="2" charset="-122"/>
+                          </a:rPr>
+                          <m:t>𝑋</m:t>
+                        </m:r>
+                      </m:e>
+                      <m:sub>
+                        <m:r>
+                          <a:rPr lang="en-US" altLang="zh-CN" sz="1346" i="1">
+                            <a:latin typeface="Cambria Math" panose="02040503050406030204" pitchFamily="18" charset="0"/>
+                            <a:ea typeface="宋体" panose="02010600030101010101" pitchFamily="2" charset="-122"/>
+                          </a:rPr>
+                          <m:t>𝑙𝑜𝑤</m:t>
+                        </m:r>
+                      </m:sub>
+                    </m:sSub>
+                  </m:oMath>
+                </a14:m>
+                <a:endParaRPr lang="zh-CN" altLang="en-US" sz="1346" dirty="0">
                   <a:latin typeface="宋体" panose="02010600030101010101" pitchFamily="2" charset="-122"/>
                   <a:ea typeface="宋体" panose="02010600030101010101" pitchFamily="2" charset="-122"/>
-                </a:rPr>
-                <a:t>（一维离散小波变换）</a:t>
-              </a:r>
-            </a:p>
-          </p:txBody>
-        </p:sp>
-        <p:sp>
-          <p:nvSpPr>
-            <p:cNvPr id="193" name="矩形: 圆角 192">
-              <a:extLst>
-                <a:ext uri="{FF2B5EF4-FFF2-40B4-BE49-F238E27FC236}">
-                  <a16:creationId xmlns:a16="http://schemas.microsoft.com/office/drawing/2014/main" id="{C0287108-B32E-443E-B926-CD7F68F91427}"/>
-                </a:ext>
-              </a:extLst>
-            </p:cNvPr>
-            <p:cNvSpPr/>
-            <p:nvPr/>
-          </p:nvSpPr>
-          <p:spPr>
-            <a:xfrm>
-              <a:off x="259496" y="3332424"/>
-              <a:ext cx="1381725" cy="584825"/>
-            </a:xfrm>
-            <a:prstGeom prst="roundRect">
-              <a:avLst/>
-            </a:prstGeom>
-            <a:solidFill>
-              <a:srgbClr val="BBD4EC"/>
-            </a:solidFill>
-            <a:ln>
-              <a:solidFill>
-                <a:schemeClr val="tx1"/>
-              </a:solidFill>
-            </a:ln>
-          </p:spPr>
-          <p:style>
-            <a:lnRef idx="2">
-              <a:schemeClr val="accent1">
-                <a:shade val="50000"/>
-              </a:schemeClr>
-            </a:lnRef>
-            <a:fillRef idx="1">
-              <a:schemeClr val="accent1"/>
-            </a:fillRef>
-            <a:effectRef idx="0">
-              <a:schemeClr val="accent1"/>
-            </a:effectRef>
-            <a:fontRef idx="minor">
-              <a:schemeClr val="lt1"/>
-            </a:fontRef>
-          </p:style>
-          <p:txBody>
-            <a:bodyPr rtlCol="0" anchor="ctr"/>
-            <a:lstStyle/>
-            <a:p>
-              <a:pPr algn="ctr"/>
-              <a:endParaRPr lang="zh-CN" altLang="en-US" sz="2019"/>
-            </a:p>
-          </p:txBody>
-        </p:sp>
-        <p:sp>
-          <p:nvSpPr>
-            <p:cNvPr id="194" name="矩形: 圆角 193">
-              <a:extLst>
-                <a:ext uri="{FF2B5EF4-FFF2-40B4-BE49-F238E27FC236}">
-                  <a16:creationId xmlns:a16="http://schemas.microsoft.com/office/drawing/2014/main" id="{C92CE03C-B025-4D5D-A26B-503B100AE3E7}"/>
-                </a:ext>
-              </a:extLst>
-            </p:cNvPr>
-            <p:cNvSpPr/>
-            <p:nvPr/>
-          </p:nvSpPr>
-          <p:spPr>
-            <a:xfrm>
-              <a:off x="1681694" y="3325518"/>
-              <a:ext cx="1430763" cy="584825"/>
-            </a:xfrm>
-            <a:prstGeom prst="roundRect">
-              <a:avLst/>
-            </a:prstGeom>
-            <a:solidFill>
-              <a:srgbClr val="F8D09E"/>
-            </a:solidFill>
-            <a:ln>
-              <a:solidFill>
-                <a:schemeClr val="tx1"/>
-              </a:solidFill>
-            </a:ln>
-          </p:spPr>
-          <p:style>
-            <a:lnRef idx="2">
-              <a:schemeClr val="accent1">
-                <a:shade val="50000"/>
-              </a:schemeClr>
-            </a:lnRef>
-            <a:fillRef idx="1">
-              <a:schemeClr val="accent1"/>
-            </a:fillRef>
-            <a:effectRef idx="0">
-              <a:schemeClr val="accent1"/>
-            </a:effectRef>
-            <a:fontRef idx="minor">
-              <a:schemeClr val="lt1"/>
-            </a:fontRef>
-          </p:style>
-          <p:txBody>
-            <a:bodyPr rtlCol="0" anchor="ctr"/>
-            <a:lstStyle/>
-            <a:p>
-              <a:pPr algn="ctr"/>
-              <a:endParaRPr lang="zh-CN" altLang="en-US" sz="2019"/>
-            </a:p>
-          </p:txBody>
-        </p:sp>
-        <mc:AlternateContent xmlns:mc="http://schemas.openxmlformats.org/markup-compatibility/2006" xmlns:a14="http://schemas.microsoft.com/office/drawing/2010/main">
-          <mc:Choice Requires="a14">
-            <p:sp>
-              <p:nvSpPr>
-                <p:cNvPr id="195" name="文本框 194">
-                  <a:extLst>
-                    <a:ext uri="{FF2B5EF4-FFF2-40B4-BE49-F238E27FC236}">
-                      <a16:creationId xmlns:a16="http://schemas.microsoft.com/office/drawing/2014/main" id="{3C6A110D-FC1C-47E3-8BC1-8988DA242F2C}"/>
-                    </a:ext>
-                  </a:extLst>
-                </p:cNvPr>
-                <p:cNvSpPr txBox="1"/>
-                <p:nvPr/>
-              </p:nvSpPr>
-              <p:spPr>
-                <a:xfrm>
-                  <a:off x="123532" y="3364655"/>
-                  <a:ext cx="1666931" cy="506549"/>
-                </a:xfrm>
-                <a:prstGeom prst="rect">
-                  <a:avLst/>
-                </a:prstGeom>
-                <a:noFill/>
-              </p:spPr>
-              <p:txBody>
-                <a:bodyPr wrap="none" rtlCol="0">
-                  <a:spAutoFit/>
-                </a:bodyPr>
-                <a:lstStyle/>
-                <a:p>
-                  <a:pPr algn="ctr"/>
-                  <a:r>
-                    <a:rPr lang="en-US" altLang="zh-CN" sz="1346" dirty="0">
-                      <a:latin typeface="宋体" panose="02010600030101010101" pitchFamily="2" charset="-122"/>
-                      <a:ea typeface="宋体" panose="02010600030101010101" pitchFamily="2" charset="-122"/>
-                    </a:rPr>
-                    <a:t>Patchization</a:t>
-                  </a:r>
-                  <a:br>
-                    <a:rPr lang="en-US" altLang="zh-CN" sz="1346" dirty="0">
-                      <a:latin typeface="宋体" panose="02010600030101010101" pitchFamily="2" charset="-122"/>
-                      <a:ea typeface="宋体" panose="02010600030101010101" pitchFamily="2" charset="-122"/>
-                    </a:rPr>
-                  </a:br>
-                  <a:r>
-                    <a:rPr lang="zh-CN" altLang="en-US" sz="1346" dirty="0">
-                      <a:latin typeface="宋体" panose="02010600030101010101" pitchFamily="2" charset="-122"/>
-                      <a:ea typeface="宋体" panose="02010600030101010101" pitchFamily="2" charset="-122"/>
-                    </a:rPr>
-                    <a:t>（序列分块，</a:t>
-                  </a:r>
-                  <a14:m>
-                    <m:oMath xmlns:m="http://schemas.openxmlformats.org/officeDocument/2006/math">
-                      <m:r>
-                        <a:rPr lang="en-US" altLang="zh-CN" sz="1346" i="1">
-                          <a:latin typeface="Cambria Math" panose="02040503050406030204" pitchFamily="18" charset="0"/>
-                          <a:ea typeface="宋体" panose="02010600030101010101" pitchFamily="2" charset="-122"/>
-                        </a:rPr>
-                        <m:t>𝑃</m:t>
-                      </m:r>
-                      <m:r>
-                        <a:rPr lang="en-US" altLang="zh-CN" sz="1346" i="1">
-                          <a:latin typeface="Cambria Math" panose="02040503050406030204" pitchFamily="18" charset="0"/>
-                          <a:ea typeface="宋体" panose="02010600030101010101" pitchFamily="2" charset="-122"/>
-                        </a:rPr>
-                        <m:t>,</m:t>
-                      </m:r>
-                      <m:r>
-                        <a:rPr lang="en-US" altLang="zh-CN" sz="1346" i="1">
-                          <a:latin typeface="Cambria Math" panose="02040503050406030204" pitchFamily="18" charset="0"/>
-                          <a:ea typeface="宋体" panose="02010600030101010101" pitchFamily="2" charset="-122"/>
-                        </a:rPr>
-                        <m:t>𝑆</m:t>
-                      </m:r>
-                    </m:oMath>
-                  </a14:m>
-                  <a:r>
-                    <a:rPr lang="zh-CN" altLang="en-US" sz="1346" dirty="0">
-                      <a:latin typeface="宋体" panose="02010600030101010101" pitchFamily="2" charset="-122"/>
-                      <a:ea typeface="宋体" panose="02010600030101010101" pitchFamily="2" charset="-122"/>
-                    </a:rPr>
-                    <a:t>）</a:t>
-                  </a:r>
-                </a:p>
-              </p:txBody>
-            </p:sp>
-          </mc:Choice>
-          <mc:Fallback xmlns="">
-            <p:sp>
-              <p:nvSpPr>
-                <p:cNvPr id="195" name="文本框 194">
-                  <a:extLst>
-                    <a:ext uri="{FF2B5EF4-FFF2-40B4-BE49-F238E27FC236}">
-                      <a16:creationId xmlns:a16="http://schemas.microsoft.com/office/drawing/2014/main" id="{3C6A110D-FC1C-47E3-8BC1-8988DA242F2C}"/>
-                    </a:ext>
-                  </a:extLst>
-                </p:cNvPr>
-                <p:cNvSpPr txBox="1">
-                  <a:spLocks noRot="1" noChangeAspect="1" noMove="1" noResize="1" noEditPoints="1" noAdjustHandles="1" noChangeArrowheads="1" noChangeShapeType="1" noTextEdit="1"/>
-                </p:cNvSpPr>
-                <p:nvPr/>
-              </p:nvSpPr>
-              <p:spPr>
-                <a:xfrm>
-                  <a:off x="123532" y="3364655"/>
-                  <a:ext cx="1666931" cy="506549"/>
-                </a:xfrm>
-                <a:prstGeom prst="rect">
-                  <a:avLst/>
-                </a:prstGeom>
-                <a:blipFill>
-                  <a:blip r:embed="rId10"/>
-                  <a:stretch>
-                    <a:fillRect l="-733" t="-1205" b="-9639"/>
-                  </a:stretch>
-                </a:blipFill>
-              </p:spPr>
-              <p:txBody>
-                <a:bodyPr/>
-                <a:lstStyle/>
-                <a:p>
-                  <a:r>
-                    <a:rPr lang="zh-CN" altLang="en-US">
-                      <a:noFill/>
-                    </a:rPr>
-                    <a:t> </a:t>
-                  </a:r>
-                </a:p>
-              </p:txBody>
-            </p:sp>
-          </mc:Fallback>
-        </mc:AlternateContent>
-        <mc:AlternateContent xmlns:mc="http://schemas.openxmlformats.org/markup-compatibility/2006" xmlns:a14="http://schemas.microsoft.com/office/drawing/2010/main">
-          <mc:Choice Requires="a14">
-            <p:sp>
-              <p:nvSpPr>
-                <p:cNvPr id="196" name="文本框 195">
-                  <a:extLst>
-                    <a:ext uri="{FF2B5EF4-FFF2-40B4-BE49-F238E27FC236}">
-                      <a16:creationId xmlns:a16="http://schemas.microsoft.com/office/drawing/2014/main" id="{1794E5B4-EB06-4ACF-A5FD-197AA2888A91}"/>
-                    </a:ext>
-                  </a:extLst>
-                </p:cNvPr>
-                <p:cNvSpPr txBox="1"/>
-                <p:nvPr/>
-              </p:nvSpPr>
-              <p:spPr>
-                <a:xfrm>
-                  <a:off x="1556632" y="3372734"/>
-                  <a:ext cx="1712971" cy="506549"/>
-                </a:xfrm>
-                <a:prstGeom prst="rect">
-                  <a:avLst/>
-                </a:prstGeom>
-                <a:noFill/>
-              </p:spPr>
-              <p:txBody>
-                <a:bodyPr wrap="square" rtlCol="0">
-                  <a:spAutoFit/>
-                </a:bodyPr>
-                <a:lstStyle/>
-                <a:p>
-                  <a:pPr algn="ctr"/>
-                  <a:r>
-                    <a:rPr lang="en-US" altLang="zh-CN" sz="1346" dirty="0">
-                      <a:latin typeface="宋体" panose="02010600030101010101" pitchFamily="2" charset="-122"/>
-                      <a:ea typeface="宋体" panose="02010600030101010101" pitchFamily="2" charset="-122"/>
-                    </a:rPr>
-                    <a:t>Patchization</a:t>
-                  </a:r>
-                  <a:br>
-                    <a:rPr lang="en-US" altLang="zh-CN" sz="1346" dirty="0">
-                      <a:latin typeface="宋体" panose="02010600030101010101" pitchFamily="2" charset="-122"/>
-                      <a:ea typeface="宋体" panose="02010600030101010101" pitchFamily="2" charset="-122"/>
-                    </a:rPr>
-                  </a:br>
-                  <a:r>
-                    <a:rPr lang="zh-CN" altLang="en-US" sz="1346" dirty="0">
-                      <a:latin typeface="宋体" panose="02010600030101010101" pitchFamily="2" charset="-122"/>
-                      <a:ea typeface="宋体" panose="02010600030101010101" pitchFamily="2" charset="-122"/>
-                    </a:rPr>
-                    <a:t>（序列分块，</a:t>
-                  </a:r>
-                  <a14:m>
-                    <m:oMath xmlns:m="http://schemas.openxmlformats.org/officeDocument/2006/math">
-                      <m:r>
-                        <a:rPr lang="en-US" altLang="zh-CN" sz="1346" i="1">
-                          <a:latin typeface="Cambria Math" panose="02040503050406030204" pitchFamily="18" charset="0"/>
-                          <a:ea typeface="宋体" panose="02010600030101010101" pitchFamily="2" charset="-122"/>
-                        </a:rPr>
-                        <m:t>𝑃</m:t>
-                      </m:r>
-                      <m:r>
-                        <a:rPr lang="en-US" altLang="zh-CN" sz="1346" i="1">
-                          <a:latin typeface="Cambria Math" panose="02040503050406030204" pitchFamily="18" charset="0"/>
-                          <a:ea typeface="宋体" panose="02010600030101010101" pitchFamily="2" charset="-122"/>
-                        </a:rPr>
-                        <m:t>,</m:t>
-                      </m:r>
-                      <m:r>
-                        <a:rPr lang="en-US" altLang="zh-CN" sz="1346" i="1">
-                          <a:latin typeface="Cambria Math" panose="02040503050406030204" pitchFamily="18" charset="0"/>
-                          <a:ea typeface="宋体" panose="02010600030101010101" pitchFamily="2" charset="-122"/>
-                        </a:rPr>
-                        <m:t>𝑆</m:t>
-                      </m:r>
-                    </m:oMath>
-                  </a14:m>
-                  <a:r>
-                    <a:rPr lang="zh-CN" altLang="en-US" sz="1346" dirty="0">
-                      <a:latin typeface="宋体" panose="02010600030101010101" pitchFamily="2" charset="-122"/>
-                      <a:ea typeface="宋体" panose="02010600030101010101" pitchFamily="2" charset="-122"/>
-                    </a:rPr>
-                    <a:t>）</a:t>
-                  </a:r>
-                </a:p>
-              </p:txBody>
-            </p:sp>
-          </mc:Choice>
-          <mc:Fallback xmlns="">
-            <p:sp>
-              <p:nvSpPr>
-                <p:cNvPr id="196" name="文本框 195">
-                  <a:extLst>
-                    <a:ext uri="{FF2B5EF4-FFF2-40B4-BE49-F238E27FC236}">
-                      <a16:creationId xmlns:a16="http://schemas.microsoft.com/office/drawing/2014/main" id="{1794E5B4-EB06-4ACF-A5FD-197AA2888A91}"/>
-                    </a:ext>
-                  </a:extLst>
-                </p:cNvPr>
-                <p:cNvSpPr txBox="1">
-                  <a:spLocks noRot="1" noChangeAspect="1" noMove="1" noResize="1" noEditPoints="1" noAdjustHandles="1" noChangeArrowheads="1" noChangeShapeType="1" noTextEdit="1"/>
-                </p:cNvSpPr>
-                <p:nvPr/>
-              </p:nvSpPr>
-              <p:spPr>
-                <a:xfrm>
-                  <a:off x="1556632" y="3372734"/>
-                  <a:ext cx="1712971" cy="506549"/>
-                </a:xfrm>
-                <a:prstGeom prst="rect">
-                  <a:avLst/>
-                </a:prstGeom>
-                <a:blipFill>
-                  <a:blip r:embed="rId11"/>
-                  <a:stretch>
-                    <a:fillRect t="-1190" b="-8333"/>
-                  </a:stretch>
-                </a:blipFill>
-              </p:spPr>
-              <p:txBody>
-                <a:bodyPr/>
-                <a:lstStyle/>
-                <a:p>
-                  <a:r>
-                    <a:rPr lang="zh-CN" altLang="en-US">
-                      <a:noFill/>
-                    </a:rPr>
-                    <a:t> </a:t>
-                  </a:r>
-                </a:p>
-              </p:txBody>
-            </p:sp>
-          </mc:Fallback>
-        </mc:AlternateContent>
-        <mc:AlternateContent xmlns:mc="http://schemas.openxmlformats.org/markup-compatibility/2006" xmlns:a14="http://schemas.microsoft.com/office/drawing/2010/main">
-          <mc:Choice Requires="a14">
-            <p:sp>
-              <p:nvSpPr>
-                <p:cNvPr id="205" name="文本框 204">
-                  <a:extLst>
-                    <a:ext uri="{FF2B5EF4-FFF2-40B4-BE49-F238E27FC236}">
-                      <a16:creationId xmlns:a16="http://schemas.microsoft.com/office/drawing/2014/main" id="{2F2952D6-7901-4B02-B159-279C9A90055B}"/>
-                    </a:ext>
-                  </a:extLst>
-                </p:cNvPr>
-                <p:cNvSpPr txBox="1"/>
-                <p:nvPr/>
-              </p:nvSpPr>
-              <p:spPr>
-                <a:xfrm>
-                  <a:off x="83212" y="2791340"/>
-                  <a:ext cx="877163" cy="506549"/>
-                </a:xfrm>
-                <a:prstGeom prst="rect">
-                  <a:avLst/>
-                </a:prstGeom>
-                <a:noFill/>
-              </p:spPr>
-              <p:txBody>
-                <a:bodyPr wrap="none" rtlCol="0">
-                  <a:spAutoFit/>
-                </a:bodyPr>
-                <a:lstStyle/>
-                <a:p>
-                  <a:pPr algn="ctr"/>
-                  <a:r>
-                    <a:rPr lang="zh-CN" altLang="en-US" sz="1346" dirty="0">
-                      <a:latin typeface="宋体" panose="02010600030101010101" pitchFamily="2" charset="-122"/>
-                      <a:ea typeface="宋体" panose="02010600030101010101" pitchFamily="2" charset="-122"/>
-                    </a:rPr>
-                    <a:t>低频近似</a:t>
-                  </a:r>
-                  <a:endParaRPr lang="en-US" altLang="zh-CN" sz="1346" dirty="0">
+                </a:endParaRPr>
+              </a:p>
+            </p:txBody>
+          </p:sp>
+        </mc:Choice>
+        <mc:Fallback>
+          <p:sp>
+            <p:nvSpPr>
+              <p:cNvPr id="205" name="文本框 204">
+                <a:extLst>
+                  <a:ext uri="{FF2B5EF4-FFF2-40B4-BE49-F238E27FC236}">
+                    <a16:creationId xmlns:a16="http://schemas.microsoft.com/office/drawing/2014/main" id="{2F2952D6-7901-4B02-B159-279C9A90055B}"/>
+                  </a:ext>
+                </a:extLst>
+              </p:cNvPr>
+              <p:cNvSpPr txBox="1">
+                <a:spLocks noRot="1" noChangeAspect="1" noMove="1" noResize="1" noEditPoints="1" noAdjustHandles="1" noChangeArrowheads="1" noChangeShapeType="1" noTextEdit="1"/>
+              </p:cNvSpPr>
+              <p:nvPr/>
+            </p:nvSpPr>
+            <p:spPr>
+              <a:xfrm>
+                <a:off x="74045" y="2584921"/>
+                <a:ext cx="877163" cy="506549"/>
+              </a:xfrm>
+              <a:prstGeom prst="rect">
+                <a:avLst/>
+              </a:prstGeom>
+              <a:blipFill>
+                <a:blip r:embed="rId12"/>
+                <a:stretch>
+                  <a:fillRect l="-694" t="-1205" r="-1389" b="-9639"/>
+                </a:stretch>
+              </a:blipFill>
+            </p:spPr>
+            <p:txBody>
+              <a:bodyPr/>
+              <a:lstStyle/>
+              <a:p>
+                <a:r>
+                  <a:rPr lang="zh-CN" altLang="en-US">
+                    <a:noFill/>
+                  </a:rPr>
+                  <a:t> </a:t>
+                </a:r>
+              </a:p>
+            </p:txBody>
+          </p:sp>
+        </mc:Fallback>
+      </mc:AlternateContent>
+      <mc:AlternateContent xmlns:mc="http://schemas.openxmlformats.org/markup-compatibility/2006">
+        <mc:Choice xmlns:a14="http://schemas.microsoft.com/office/drawing/2010/main" Requires="a14">
+          <p:sp>
+            <p:nvSpPr>
+              <p:cNvPr id="206" name="文本框 205">
+                <a:extLst>
+                  <a:ext uri="{FF2B5EF4-FFF2-40B4-BE49-F238E27FC236}">
+                    <a16:creationId xmlns:a16="http://schemas.microsoft.com/office/drawing/2014/main" id="{37C97EE6-3C5B-4254-A093-7B1CB3594E01}"/>
+                  </a:ext>
+                </a:extLst>
+              </p:cNvPr>
+              <p:cNvSpPr txBox="1"/>
+              <p:nvPr/>
+            </p:nvSpPr>
+            <p:spPr>
+              <a:xfrm>
+                <a:off x="2234872" y="2585619"/>
+                <a:ext cx="929678" cy="523220"/>
+              </a:xfrm>
+              <a:prstGeom prst="rect">
+                <a:avLst/>
+              </a:prstGeom>
+              <a:noFill/>
+            </p:spPr>
+            <p:txBody>
+              <a:bodyPr wrap="none" rtlCol="0">
+                <a:spAutoFit/>
+              </a:bodyPr>
+              <a:lstStyle/>
+              <a:p>
+                <a:pPr algn="ctr"/>
+                <a:r>
+                  <a:rPr lang="zh-CN" altLang="en-US" sz="1346" dirty="0">
                     <a:latin typeface="宋体" panose="02010600030101010101" pitchFamily="2" charset="-122"/>
                     <a:ea typeface="宋体" panose="02010600030101010101" pitchFamily="2" charset="-122"/>
-                  </a:endParaRPr>
-                </a:p>
-                <a:p>
-                  <a:pPr algn="ctr"/>
-                  <a:r>
-                    <a:rPr lang="zh-CN" altLang="en-US" sz="1346" dirty="0">
-                      <a:latin typeface="宋体" panose="02010600030101010101" pitchFamily="2" charset="-122"/>
-                      <a:ea typeface="宋体" panose="02010600030101010101" pitchFamily="2" charset="-122"/>
-                    </a:rPr>
-                    <a:t>分量</a:t>
-                  </a:r>
-                  <a14:m>
-                    <m:oMath xmlns:m="http://schemas.openxmlformats.org/officeDocument/2006/math">
-                      <m:sSub>
-                        <m:sSubPr>
-                          <m:ctrlPr>
-                            <a:rPr lang="en-US" altLang="zh-CN" sz="1346" i="1">
-                              <a:latin typeface="Cambria Math" panose="02040503050406030204" pitchFamily="18" charset="0"/>
-                              <a:ea typeface="宋体" panose="02010600030101010101" pitchFamily="2" charset="-122"/>
-                            </a:rPr>
-                          </m:ctrlPr>
-                        </m:sSubPr>
-                        <m:e>
-                          <m:r>
-                            <a:rPr lang="en-US" altLang="zh-CN" sz="1346" i="1">
-                              <a:latin typeface="Cambria Math" panose="02040503050406030204" pitchFamily="18" charset="0"/>
-                              <a:ea typeface="宋体" panose="02010600030101010101" pitchFamily="2" charset="-122"/>
-                            </a:rPr>
-                            <m:t>𝑋</m:t>
-                          </m:r>
-                        </m:e>
-                        <m:sub>
-                          <m:r>
-                            <a:rPr lang="en-US" altLang="zh-CN" sz="1346" i="1">
-                              <a:latin typeface="Cambria Math" panose="02040503050406030204" pitchFamily="18" charset="0"/>
-                              <a:ea typeface="宋体" panose="02010600030101010101" pitchFamily="2" charset="-122"/>
-                            </a:rPr>
-                            <m:t>𝑙𝑜𝑤</m:t>
-                          </m:r>
-                        </m:sub>
-                      </m:sSub>
-                    </m:oMath>
-                  </a14:m>
-                  <a:endParaRPr lang="zh-CN" altLang="en-US" sz="1346" dirty="0">
+                  </a:rPr>
+                  <a:t>高频细节</a:t>
+                </a:r>
+                <a:endParaRPr lang="en-US" altLang="zh-CN" sz="1346" dirty="0">
+                  <a:latin typeface="宋体" panose="02010600030101010101" pitchFamily="2" charset="-122"/>
+                  <a:ea typeface="宋体" panose="02010600030101010101" pitchFamily="2" charset="-122"/>
+                </a:endParaRPr>
+              </a:p>
+              <a:p>
+                <a:pPr algn="ctr"/>
+                <a:r>
+                  <a:rPr lang="zh-CN" altLang="en-US" sz="1346" dirty="0">
                     <a:latin typeface="宋体" panose="02010600030101010101" pitchFamily="2" charset="-122"/>
                     <a:ea typeface="宋体" panose="02010600030101010101" pitchFamily="2" charset="-122"/>
-                  </a:endParaRPr>
-                </a:p>
-              </p:txBody>
-            </p:sp>
-          </mc:Choice>
-          <mc:Fallback xmlns="">
-            <p:sp>
-              <p:nvSpPr>
-                <p:cNvPr id="205" name="文本框 204">
-                  <a:extLst>
-                    <a:ext uri="{FF2B5EF4-FFF2-40B4-BE49-F238E27FC236}">
-                      <a16:creationId xmlns:a16="http://schemas.microsoft.com/office/drawing/2014/main" id="{2F2952D6-7901-4B02-B159-279C9A90055B}"/>
-                    </a:ext>
-                  </a:extLst>
-                </p:cNvPr>
-                <p:cNvSpPr txBox="1">
-                  <a:spLocks noRot="1" noChangeAspect="1" noMove="1" noResize="1" noEditPoints="1" noAdjustHandles="1" noChangeArrowheads="1" noChangeShapeType="1" noTextEdit="1"/>
-                </p:cNvSpPr>
-                <p:nvPr/>
-              </p:nvSpPr>
-              <p:spPr>
-                <a:xfrm>
-                  <a:off x="83212" y="2791340"/>
-                  <a:ext cx="877163" cy="506549"/>
-                </a:xfrm>
-                <a:prstGeom prst="rect">
-                  <a:avLst/>
-                </a:prstGeom>
-                <a:blipFill>
-                  <a:blip r:embed="rId12"/>
-                  <a:stretch>
-                    <a:fillRect l="-694" t="-1205" r="-1389" b="-9639"/>
-                  </a:stretch>
-                </a:blipFill>
-              </p:spPr>
-              <p:txBody>
-                <a:bodyPr/>
-                <a:lstStyle/>
-                <a:p>
-                  <a:r>
-                    <a:rPr lang="zh-CN" altLang="en-US">
-                      <a:noFill/>
-                    </a:rPr>
-                    <a:t> </a:t>
-                  </a:r>
-                </a:p>
-              </p:txBody>
-            </p:sp>
-          </mc:Fallback>
-        </mc:AlternateContent>
-        <mc:AlternateContent xmlns:mc="http://schemas.openxmlformats.org/markup-compatibility/2006" xmlns:a14="http://schemas.microsoft.com/office/drawing/2010/main">
-          <mc:Choice Requires="a14">
-            <p:sp>
-              <p:nvSpPr>
-                <p:cNvPr id="206" name="文本框 205">
-                  <a:extLst>
-                    <a:ext uri="{FF2B5EF4-FFF2-40B4-BE49-F238E27FC236}">
-                      <a16:creationId xmlns:a16="http://schemas.microsoft.com/office/drawing/2014/main" id="{37C97EE6-3C5B-4254-A093-7B1CB3594E01}"/>
-                    </a:ext>
-                  </a:extLst>
-                </p:cNvPr>
-                <p:cNvSpPr txBox="1"/>
-                <p:nvPr/>
-              </p:nvSpPr>
-              <p:spPr>
-                <a:xfrm>
-                  <a:off x="2244039" y="2792038"/>
-                  <a:ext cx="929678" cy="523220"/>
-                </a:xfrm>
-                <a:prstGeom prst="rect">
-                  <a:avLst/>
-                </a:prstGeom>
-                <a:noFill/>
-              </p:spPr>
-              <p:txBody>
-                <a:bodyPr wrap="none" rtlCol="0">
-                  <a:spAutoFit/>
-                </a:bodyPr>
-                <a:lstStyle/>
-                <a:p>
-                  <a:pPr algn="ctr"/>
-                  <a:r>
-                    <a:rPr lang="zh-CN" altLang="en-US" sz="1346" dirty="0">
-                      <a:latin typeface="宋体" panose="02010600030101010101" pitchFamily="2" charset="-122"/>
-                      <a:ea typeface="宋体" panose="02010600030101010101" pitchFamily="2" charset="-122"/>
-                    </a:rPr>
-                    <a:t>高频细节</a:t>
-                  </a:r>
-                  <a:endParaRPr lang="en-US" altLang="zh-CN" sz="1346" dirty="0">
+                  </a:rPr>
+                  <a:t>分量</a:t>
+                </a:r>
+                <a14:m>
+                  <m:oMath xmlns:m="http://schemas.openxmlformats.org/officeDocument/2006/math">
+                    <m:sSub>
+                      <m:sSubPr>
+                        <m:ctrlPr>
+                          <a:rPr lang="en-US" altLang="zh-CN" sz="1346" i="1">
+                            <a:latin typeface="Cambria Math" panose="02040503050406030204" pitchFamily="18" charset="0"/>
+                            <a:ea typeface="宋体" panose="02010600030101010101" pitchFamily="2" charset="-122"/>
+                          </a:rPr>
+                        </m:ctrlPr>
+                      </m:sSubPr>
+                      <m:e>
+                        <m:r>
+                          <a:rPr lang="en-US" altLang="zh-CN" sz="1346" i="1">
+                            <a:latin typeface="Cambria Math" panose="02040503050406030204" pitchFamily="18" charset="0"/>
+                            <a:ea typeface="宋体" panose="02010600030101010101" pitchFamily="2" charset="-122"/>
+                          </a:rPr>
+                          <m:t>𝑋</m:t>
+                        </m:r>
+                      </m:e>
+                      <m:sub>
+                        <m:r>
+                          <a:rPr lang="en-US" altLang="zh-CN" sz="1346" i="1">
+                            <a:latin typeface="Cambria Math" panose="02040503050406030204" pitchFamily="18" charset="0"/>
+                            <a:ea typeface="宋体" panose="02010600030101010101" pitchFamily="2" charset="-122"/>
+                          </a:rPr>
+                          <m:t>h𝑖𝑔h</m:t>
+                        </m:r>
+                      </m:sub>
+                    </m:sSub>
+                  </m:oMath>
+                </a14:m>
+                <a:endParaRPr lang="zh-CN" altLang="en-US" sz="1346" dirty="0">
+                  <a:latin typeface="宋体" panose="02010600030101010101" pitchFamily="2" charset="-122"/>
+                  <a:ea typeface="宋体" panose="02010600030101010101" pitchFamily="2" charset="-122"/>
+                </a:endParaRPr>
+              </a:p>
+            </p:txBody>
+          </p:sp>
+        </mc:Choice>
+        <mc:Fallback>
+          <p:sp>
+            <p:nvSpPr>
+              <p:cNvPr id="206" name="文本框 205">
+                <a:extLst>
+                  <a:ext uri="{FF2B5EF4-FFF2-40B4-BE49-F238E27FC236}">
+                    <a16:creationId xmlns:a16="http://schemas.microsoft.com/office/drawing/2014/main" id="{37C97EE6-3C5B-4254-A093-7B1CB3594E01}"/>
+                  </a:ext>
+                </a:extLst>
+              </p:cNvPr>
+              <p:cNvSpPr txBox="1">
+                <a:spLocks noRot="1" noChangeAspect="1" noMove="1" noResize="1" noEditPoints="1" noAdjustHandles="1" noChangeArrowheads="1" noChangeShapeType="1" noTextEdit="1"/>
+              </p:cNvSpPr>
+              <p:nvPr/>
+            </p:nvSpPr>
+            <p:spPr>
+              <a:xfrm>
+                <a:off x="2234872" y="2585619"/>
+                <a:ext cx="929678" cy="523220"/>
+              </a:xfrm>
+              <a:prstGeom prst="rect">
+                <a:avLst/>
+              </a:prstGeom>
+              <a:blipFill>
+                <a:blip r:embed="rId13"/>
+                <a:stretch>
+                  <a:fillRect l="-1974" t="-1163" b="-5814"/>
+                </a:stretch>
+              </a:blipFill>
+            </p:spPr>
+            <p:txBody>
+              <a:bodyPr/>
+              <a:lstStyle/>
+              <a:p>
+                <a:r>
+                  <a:rPr lang="zh-CN" altLang="en-US">
+                    <a:noFill/>
+                  </a:rPr>
+                  <a:t> </a:t>
+                </a:r>
+              </a:p>
+            </p:txBody>
+          </p:sp>
+        </mc:Fallback>
+      </mc:AlternateContent>
+      <mc:AlternateContent xmlns:mc="http://schemas.openxmlformats.org/markup-compatibility/2006">
+        <mc:Choice xmlns:a14="http://schemas.microsoft.com/office/drawing/2010/main" Requires="a14">
+          <p:sp>
+            <p:nvSpPr>
+              <p:cNvPr id="207" name="文本框 206">
+                <a:extLst>
+                  <a:ext uri="{FF2B5EF4-FFF2-40B4-BE49-F238E27FC236}">
+                    <a16:creationId xmlns:a16="http://schemas.microsoft.com/office/drawing/2014/main" id="{CD2C5B77-2A13-4396-890E-89DE926B9489}"/>
+                  </a:ext>
+                </a:extLst>
+              </p:cNvPr>
+              <p:cNvSpPr txBox="1"/>
+              <p:nvPr/>
+            </p:nvSpPr>
+            <p:spPr>
+              <a:xfrm>
+                <a:off x="942887" y="3658863"/>
+                <a:ext cx="1381725" cy="299441"/>
+              </a:xfrm>
+              <a:prstGeom prst="rect">
+                <a:avLst/>
+              </a:prstGeom>
+              <a:noFill/>
+            </p:spPr>
+            <p:txBody>
+              <a:bodyPr wrap="none" rtlCol="0">
+                <a:spAutoFit/>
+              </a:bodyPr>
+              <a:lstStyle/>
+              <a:p>
+                <a:pPr algn="ctr"/>
+                <a:r>
+                  <a:rPr lang="zh-CN" altLang="en-US" sz="1346" dirty="0">
+                    <a:ea typeface="宋体" panose="02010600030101010101" pitchFamily="2" charset="-122"/>
+                  </a:rPr>
+                  <a:t>块大小</a:t>
+                </a:r>
+                <a14:m>
+                  <m:oMath xmlns:m="http://schemas.openxmlformats.org/officeDocument/2006/math">
+                    <m:r>
+                      <a:rPr lang="en-US" altLang="zh-CN" sz="1346" i="1">
+                        <a:latin typeface="Cambria Math" panose="02040503050406030204" pitchFamily="18" charset="0"/>
+                        <a:ea typeface="宋体" panose="02010600030101010101" pitchFamily="2" charset="-122"/>
+                      </a:rPr>
+                      <m:t>𝑃</m:t>
+                    </m:r>
+                  </m:oMath>
+                </a14:m>
+                <a:r>
+                  <a:rPr lang="en-US" altLang="zh-CN" sz="1346" dirty="0">
                     <a:latin typeface="宋体" panose="02010600030101010101" pitchFamily="2" charset="-122"/>
                     <a:ea typeface="宋体" panose="02010600030101010101" pitchFamily="2" charset="-122"/>
-                  </a:endParaRPr>
-                </a:p>
-                <a:p>
-                  <a:pPr algn="ctr"/>
-                  <a:r>
-                    <a:rPr lang="zh-CN" altLang="en-US" sz="1346" dirty="0">
-                      <a:latin typeface="宋体" panose="02010600030101010101" pitchFamily="2" charset="-122"/>
-                      <a:ea typeface="宋体" panose="02010600030101010101" pitchFamily="2" charset="-122"/>
-                    </a:rPr>
-                    <a:t>分量</a:t>
-                  </a:r>
-                  <a14:m>
-                    <m:oMath xmlns:m="http://schemas.openxmlformats.org/officeDocument/2006/math">
-                      <m:sSub>
-                        <m:sSubPr>
-                          <m:ctrlPr>
-                            <a:rPr lang="en-US" altLang="zh-CN" sz="1346" i="1">
-                              <a:latin typeface="Cambria Math" panose="02040503050406030204" pitchFamily="18" charset="0"/>
-                              <a:ea typeface="宋体" panose="02010600030101010101" pitchFamily="2" charset="-122"/>
-                            </a:rPr>
-                          </m:ctrlPr>
-                        </m:sSubPr>
-                        <m:e>
-                          <m:r>
-                            <a:rPr lang="en-US" altLang="zh-CN" sz="1346" i="1">
-                              <a:latin typeface="Cambria Math" panose="02040503050406030204" pitchFamily="18" charset="0"/>
-                              <a:ea typeface="宋体" panose="02010600030101010101" pitchFamily="2" charset="-122"/>
-                            </a:rPr>
-                            <m:t>𝑋</m:t>
-                          </m:r>
-                        </m:e>
-                        <m:sub>
-                          <m:r>
-                            <a:rPr lang="en-US" altLang="zh-CN" sz="1346" i="1">
-                              <a:latin typeface="Cambria Math" panose="02040503050406030204" pitchFamily="18" charset="0"/>
-                              <a:ea typeface="宋体" panose="02010600030101010101" pitchFamily="2" charset="-122"/>
-                            </a:rPr>
-                            <m:t>h𝑖𝑔h</m:t>
-                          </m:r>
-                        </m:sub>
-                      </m:sSub>
-                    </m:oMath>
-                  </a14:m>
-                  <a:endParaRPr lang="zh-CN" altLang="en-US" sz="1346" dirty="0">
+                  </a:rPr>
+                  <a:t>,</a:t>
+                </a:r>
+                <a:r>
+                  <a:rPr lang="zh-CN" altLang="en-US" sz="1346" dirty="0">
                     <a:latin typeface="宋体" panose="02010600030101010101" pitchFamily="2" charset="-122"/>
                     <a:ea typeface="宋体" panose="02010600030101010101" pitchFamily="2" charset="-122"/>
-                  </a:endParaRPr>
-                </a:p>
-              </p:txBody>
-            </p:sp>
-          </mc:Choice>
-          <mc:Fallback xmlns="">
-            <p:sp>
-              <p:nvSpPr>
-                <p:cNvPr id="206" name="文本框 205">
-                  <a:extLst>
-                    <a:ext uri="{FF2B5EF4-FFF2-40B4-BE49-F238E27FC236}">
-                      <a16:creationId xmlns:a16="http://schemas.microsoft.com/office/drawing/2014/main" id="{37C97EE6-3C5B-4254-A093-7B1CB3594E01}"/>
-                    </a:ext>
-                  </a:extLst>
-                </p:cNvPr>
-                <p:cNvSpPr txBox="1">
-                  <a:spLocks noRot="1" noChangeAspect="1" noMove="1" noResize="1" noEditPoints="1" noAdjustHandles="1" noChangeArrowheads="1" noChangeShapeType="1" noTextEdit="1"/>
-                </p:cNvSpPr>
-                <p:nvPr/>
-              </p:nvSpPr>
-              <p:spPr>
-                <a:xfrm>
-                  <a:off x="2244039" y="2792038"/>
-                  <a:ext cx="929678" cy="523220"/>
-                </a:xfrm>
-                <a:prstGeom prst="rect">
-                  <a:avLst/>
-                </a:prstGeom>
-                <a:blipFill>
-                  <a:blip r:embed="rId13"/>
-                  <a:stretch>
-                    <a:fillRect l="-1974" t="-1163" b="-5814"/>
-                  </a:stretch>
-                </a:blipFill>
-              </p:spPr>
-              <p:txBody>
-                <a:bodyPr/>
-                <a:lstStyle/>
-                <a:p>
-                  <a:r>
-                    <a:rPr lang="zh-CN" altLang="en-US">
-                      <a:noFill/>
-                    </a:rPr>
-                    <a:t> </a:t>
-                  </a:r>
-                </a:p>
-              </p:txBody>
-            </p:sp>
-          </mc:Fallback>
-        </mc:AlternateContent>
-        <mc:AlternateContent xmlns:mc="http://schemas.openxmlformats.org/markup-compatibility/2006" xmlns:a14="http://schemas.microsoft.com/office/drawing/2010/main">
-          <mc:Choice Requires="a14">
-            <p:sp>
-              <p:nvSpPr>
-                <p:cNvPr id="207" name="文本框 206">
-                  <a:extLst>
-                    <a:ext uri="{FF2B5EF4-FFF2-40B4-BE49-F238E27FC236}">
-                      <a16:creationId xmlns:a16="http://schemas.microsoft.com/office/drawing/2014/main" id="{CD2C5B77-2A13-4396-890E-89DE926B9489}"/>
-                    </a:ext>
-                  </a:extLst>
-                </p:cNvPr>
-                <p:cNvSpPr txBox="1"/>
-                <p:nvPr/>
-              </p:nvSpPr>
-              <p:spPr>
-                <a:xfrm>
-                  <a:off x="952054" y="3865282"/>
-                  <a:ext cx="1381725" cy="299441"/>
-                </a:xfrm>
-                <a:prstGeom prst="rect">
-                  <a:avLst/>
-                </a:prstGeom>
-                <a:noFill/>
-              </p:spPr>
-              <p:txBody>
-                <a:bodyPr wrap="none" rtlCol="0">
-                  <a:spAutoFit/>
-                </a:bodyPr>
-                <a:lstStyle/>
-                <a:p>
-                  <a:pPr algn="ctr"/>
-                  <a:r>
-                    <a:rPr lang="zh-CN" altLang="en-US" sz="1346" dirty="0">
-                      <a:ea typeface="宋体" panose="02010600030101010101" pitchFamily="2" charset="-122"/>
-                    </a:rPr>
-                    <a:t>块大小</a:t>
-                  </a:r>
-                  <a14:m>
-                    <m:oMath xmlns:m="http://schemas.openxmlformats.org/officeDocument/2006/math">
-                      <m:r>
-                        <a:rPr lang="en-US" altLang="zh-CN" sz="1346" i="1">
-                          <a:latin typeface="Cambria Math" panose="02040503050406030204" pitchFamily="18" charset="0"/>
-                          <a:ea typeface="宋体" panose="02010600030101010101" pitchFamily="2" charset="-122"/>
-                        </a:rPr>
-                        <m:t>𝑃</m:t>
-                      </m:r>
-                    </m:oMath>
-                  </a14:m>
-                  <a:r>
-                    <a:rPr lang="en-US" altLang="zh-CN" sz="1346" dirty="0">
-                      <a:latin typeface="宋体" panose="02010600030101010101" pitchFamily="2" charset="-122"/>
-                      <a:ea typeface="宋体" panose="02010600030101010101" pitchFamily="2" charset="-122"/>
-                    </a:rPr>
-                    <a:t>,</a:t>
-                  </a:r>
-                  <a:r>
-                    <a:rPr lang="zh-CN" altLang="en-US" sz="1346" dirty="0">
-                      <a:latin typeface="宋体" panose="02010600030101010101" pitchFamily="2" charset="-122"/>
-                      <a:ea typeface="宋体" panose="02010600030101010101" pitchFamily="2" charset="-122"/>
-                    </a:rPr>
-                    <a:t>步长</a:t>
-                  </a:r>
-                  <a14:m>
-                    <m:oMath xmlns:m="http://schemas.openxmlformats.org/officeDocument/2006/math">
-                      <m:r>
-                        <a:rPr lang="en-US" altLang="zh-CN" sz="1346" i="1">
-                          <a:latin typeface="Cambria Math" panose="02040503050406030204" pitchFamily="18" charset="0"/>
-                          <a:ea typeface="宋体" panose="02010600030101010101" pitchFamily="2" charset="-122"/>
-                        </a:rPr>
-                        <m:t>𝑆</m:t>
-                      </m:r>
-                      <m:r>
-                        <a:rPr lang="en-US" altLang="zh-CN" sz="1346" i="1">
-                          <a:latin typeface="Cambria Math" panose="02040503050406030204" pitchFamily="18" charset="0"/>
-                          <a:ea typeface="宋体" panose="02010600030101010101" pitchFamily="2" charset="-122"/>
-                        </a:rPr>
-                        <m:t> </m:t>
-                      </m:r>
-                    </m:oMath>
-                  </a14:m>
-                  <a:endParaRPr lang="zh-CN" altLang="en-US" sz="1346" dirty="0">
-                    <a:latin typeface="宋体" panose="02010600030101010101" pitchFamily="2" charset="-122"/>
-                    <a:ea typeface="宋体" panose="02010600030101010101" pitchFamily="2" charset="-122"/>
-                  </a:endParaRPr>
-                </a:p>
-              </p:txBody>
-            </p:sp>
-          </mc:Choice>
-          <mc:Fallback xmlns="">
-            <p:sp>
-              <p:nvSpPr>
-                <p:cNvPr id="207" name="文本框 206">
-                  <a:extLst>
-                    <a:ext uri="{FF2B5EF4-FFF2-40B4-BE49-F238E27FC236}">
-                      <a16:creationId xmlns:a16="http://schemas.microsoft.com/office/drawing/2014/main" id="{CD2C5B77-2A13-4396-890E-89DE926B9489}"/>
-                    </a:ext>
-                  </a:extLst>
-                </p:cNvPr>
-                <p:cNvSpPr txBox="1">
-                  <a:spLocks noRot="1" noChangeAspect="1" noMove="1" noResize="1" noEditPoints="1" noAdjustHandles="1" noChangeArrowheads="1" noChangeShapeType="1" noTextEdit="1"/>
-                </p:cNvSpPr>
-                <p:nvPr/>
-              </p:nvSpPr>
-              <p:spPr>
-                <a:xfrm>
-                  <a:off x="952054" y="3865282"/>
-                  <a:ext cx="1381725" cy="299441"/>
-                </a:xfrm>
-                <a:prstGeom prst="rect">
-                  <a:avLst/>
-                </a:prstGeom>
-                <a:blipFill>
-                  <a:blip r:embed="rId14"/>
-                  <a:stretch>
-                    <a:fillRect l="-885" t="-4082" b="-18367"/>
-                  </a:stretch>
-                </a:blipFill>
-              </p:spPr>
-              <p:txBody>
-                <a:bodyPr/>
-                <a:lstStyle/>
-                <a:p>
-                  <a:r>
-                    <a:rPr lang="zh-CN" altLang="en-US">
-                      <a:noFill/>
-                    </a:rPr>
-                    <a:t> </a:t>
-                  </a:r>
-                </a:p>
-              </p:txBody>
-            </p:sp>
-          </mc:Fallback>
-        </mc:AlternateContent>
-        <p:cxnSp>
-          <p:nvCxnSpPr>
-            <p:cNvPr id="226" name="直接箭头连接符 225">
-              <a:extLst>
-                <a:ext uri="{FF2B5EF4-FFF2-40B4-BE49-F238E27FC236}">
-                  <a16:creationId xmlns:a16="http://schemas.microsoft.com/office/drawing/2014/main" id="{148AE121-0EA8-4892-BF88-C385926C3432}"/>
-                </a:ext>
-              </a:extLst>
-            </p:cNvPr>
-            <p:cNvCxnSpPr>
-              <a:cxnSpLocks/>
-            </p:cNvCxnSpPr>
-            <p:nvPr/>
-          </p:nvCxnSpPr>
-          <p:spPr>
-            <a:xfrm flipV="1">
-              <a:off x="2333380" y="2666592"/>
-              <a:ext cx="399" cy="655734"/>
-            </a:xfrm>
-            <a:prstGeom prst="straightConnector1">
-              <a:avLst/>
-            </a:prstGeom>
-            <a:ln w="12700">
-              <a:tailEnd type="triangle"/>
-            </a:ln>
-          </p:spPr>
-          <p:style>
-            <a:lnRef idx="1">
-              <a:schemeClr val="dk1"/>
-            </a:lnRef>
-            <a:fillRef idx="0">
-              <a:schemeClr val="dk1"/>
-            </a:fillRef>
-            <a:effectRef idx="0">
-              <a:schemeClr val="dk1"/>
-            </a:effectRef>
-            <a:fontRef idx="minor">
-              <a:schemeClr val="tx1"/>
-            </a:fontRef>
-          </p:style>
-        </p:cxnSp>
-        <p:cxnSp>
-          <p:nvCxnSpPr>
-            <p:cNvPr id="133" name="直接箭头连接符 132">
-              <a:extLst>
-                <a:ext uri="{FF2B5EF4-FFF2-40B4-BE49-F238E27FC236}">
-                  <a16:creationId xmlns:a16="http://schemas.microsoft.com/office/drawing/2014/main" id="{3B89BC68-7AEA-4754-847D-2BBA088DC2DE}"/>
-                </a:ext>
-              </a:extLst>
-            </p:cNvPr>
-            <p:cNvCxnSpPr>
-              <a:cxnSpLocks/>
-            </p:cNvCxnSpPr>
-            <p:nvPr/>
-          </p:nvCxnSpPr>
-          <p:spPr>
-            <a:xfrm flipV="1">
-              <a:off x="901213" y="2676878"/>
-              <a:ext cx="399" cy="655734"/>
-            </a:xfrm>
-            <a:prstGeom prst="straightConnector1">
-              <a:avLst/>
-            </a:prstGeom>
-            <a:ln w="12700">
-              <a:tailEnd type="triangle"/>
-            </a:ln>
-          </p:spPr>
-          <p:style>
-            <a:lnRef idx="1">
-              <a:schemeClr val="dk1"/>
-            </a:lnRef>
-            <a:fillRef idx="0">
-              <a:schemeClr val="dk1"/>
-            </a:fillRef>
-            <a:effectRef idx="0">
-              <a:schemeClr val="dk1"/>
-            </a:effectRef>
-            <a:fontRef idx="minor">
-              <a:schemeClr val="tx1"/>
-            </a:fontRef>
-          </p:style>
-        </p:cxnSp>
-      </p:grpSp>
-      <mc:AlternateContent xmlns:mc="http://schemas.openxmlformats.org/markup-compatibility/2006">
-        <mc:Choice xmlns:a14="http://schemas.microsoft.com/office/drawing/2010/main" Requires="a14">
+                  </a:rPr>
+                  <a:t>步长</a:t>
+                </a:r>
+                <a14:m>
+                  <m:oMath xmlns:m="http://schemas.openxmlformats.org/officeDocument/2006/math">
+                    <m:r>
+                      <a:rPr lang="en-US" altLang="zh-CN" sz="1346" i="1">
+                        <a:latin typeface="Cambria Math" panose="02040503050406030204" pitchFamily="18" charset="0"/>
+                        <a:ea typeface="宋体" panose="02010600030101010101" pitchFamily="2" charset="-122"/>
+                      </a:rPr>
+                      <m:t>𝑆</m:t>
+                    </m:r>
+                    <m:r>
+                      <a:rPr lang="en-US" altLang="zh-CN" sz="1346" i="1">
+                        <a:latin typeface="Cambria Math" panose="02040503050406030204" pitchFamily="18" charset="0"/>
+                        <a:ea typeface="宋体" panose="02010600030101010101" pitchFamily="2" charset="-122"/>
+                      </a:rPr>
+                      <m:t> </m:t>
+                    </m:r>
+                  </m:oMath>
+                </a14:m>
+                <a:endParaRPr lang="zh-CN" altLang="en-US" sz="1346" dirty="0">
+                  <a:latin typeface="宋体" panose="02010600030101010101" pitchFamily="2" charset="-122"/>
+                  <a:ea typeface="宋体" panose="02010600030101010101" pitchFamily="2" charset="-122"/>
+                </a:endParaRPr>
+              </a:p>
+            </p:txBody>
+          </p:sp>
+        </mc:Choice>
+        <mc:Fallback>
+          <p:sp>
+            <p:nvSpPr>
+              <p:cNvPr id="207" name="文本框 206">
+                <a:extLst>
+                  <a:ext uri="{FF2B5EF4-FFF2-40B4-BE49-F238E27FC236}">
+                    <a16:creationId xmlns:a16="http://schemas.microsoft.com/office/drawing/2014/main" id="{CD2C5B77-2A13-4396-890E-89DE926B9489}"/>
+                  </a:ext>
+                </a:extLst>
+              </p:cNvPr>
+              <p:cNvSpPr txBox="1">
+                <a:spLocks noRot="1" noChangeAspect="1" noMove="1" noResize="1" noEditPoints="1" noAdjustHandles="1" noChangeArrowheads="1" noChangeShapeType="1" noTextEdit="1"/>
+              </p:cNvSpPr>
+              <p:nvPr/>
+            </p:nvSpPr>
+            <p:spPr>
+              <a:xfrm>
+                <a:off x="942887" y="3658863"/>
+                <a:ext cx="1381725" cy="299441"/>
+              </a:xfrm>
+              <a:prstGeom prst="rect">
+                <a:avLst/>
+              </a:prstGeom>
+              <a:blipFill>
+                <a:blip r:embed="rId14"/>
+                <a:stretch>
+                  <a:fillRect l="-885" t="-4082" b="-18367"/>
+                </a:stretch>
+              </a:blipFill>
+            </p:spPr>
+            <p:txBody>
+              <a:bodyPr/>
+              <a:lstStyle/>
+              <a:p>
+                <a:r>
+                  <a:rPr lang="zh-CN" altLang="en-US">
+                    <a:noFill/>
+                  </a:rPr>
+                  <a:t> </a:t>
+                </a:r>
+              </a:p>
+            </p:txBody>
+          </p:sp>
+        </mc:Fallback>
+      </mc:AlternateContent>
+      <p:cxnSp>
+        <p:nvCxnSpPr>
+          <p:cNvPr id="226" name="直接箭头连接符 225">
+            <a:extLst>
+              <a:ext uri="{FF2B5EF4-FFF2-40B4-BE49-F238E27FC236}">
+                <a16:creationId xmlns:a16="http://schemas.microsoft.com/office/drawing/2014/main" id="{148AE121-0EA8-4892-BF88-C385926C3432}"/>
+              </a:ext>
+            </a:extLst>
+          </p:cNvPr>
+          <p:cNvCxnSpPr>
+            <a:cxnSpLocks/>
+          </p:cNvCxnSpPr>
+          <p:nvPr/>
+        </p:nvCxnSpPr>
+        <p:spPr>
+          <a:xfrm flipV="1">
+            <a:off x="2324213" y="2460173"/>
+            <a:ext cx="399" cy="655734"/>
+          </a:xfrm>
+          <a:prstGeom prst="straightConnector1">
+            <a:avLst/>
+          </a:prstGeom>
+          <a:ln w="12700">
+            <a:tailEnd type="triangle"/>
+          </a:ln>
+        </p:spPr>
+        <p:style>
+          <a:lnRef idx="1">
+            <a:schemeClr val="dk1"/>
+          </a:lnRef>
+          <a:fillRef idx="0">
+            <a:schemeClr val="dk1"/>
+          </a:fillRef>
+          <a:effectRef idx="0">
+            <a:schemeClr val="dk1"/>
+          </a:effectRef>
+          <a:fontRef idx="minor">
+            <a:schemeClr val="tx1"/>
+          </a:fontRef>
+        </p:style>
+      </p:cxnSp>
+      <p:cxnSp>
+        <p:nvCxnSpPr>
+          <p:cNvPr id="133" name="直接箭头连接符 132">
+            <a:extLst>
+              <a:ext uri="{FF2B5EF4-FFF2-40B4-BE49-F238E27FC236}">
+                <a16:creationId xmlns:a16="http://schemas.microsoft.com/office/drawing/2014/main" id="{3B89BC68-7AEA-4754-847D-2BBA088DC2DE}"/>
+              </a:ext>
+            </a:extLst>
+          </p:cNvPr>
+          <p:cNvCxnSpPr>
+            <a:cxnSpLocks/>
+          </p:cNvCxnSpPr>
+          <p:nvPr/>
+        </p:nvCxnSpPr>
+        <p:spPr>
+          <a:xfrm flipV="1">
+            <a:off x="892046" y="2470459"/>
+            <a:ext cx="399" cy="655734"/>
+          </a:xfrm>
+          <a:prstGeom prst="straightConnector1">
+            <a:avLst/>
+          </a:prstGeom>
+          <a:ln w="12700">
+            <a:tailEnd type="triangle"/>
+          </a:ln>
+        </p:spPr>
+        <p:style>
+          <a:lnRef idx="1">
+            <a:schemeClr val="dk1"/>
+          </a:lnRef>
+          <a:fillRef idx="0">
+            <a:schemeClr val="dk1"/>
+          </a:fillRef>
+          <a:effectRef idx="0">
+            <a:schemeClr val="dk1"/>
+          </a:effectRef>
+          <a:fontRef idx="minor">
+            <a:schemeClr val="tx1"/>
+          </a:fontRef>
+        </p:style>
+      </p:cxnSp>
+      <mc:AlternateContent xmlns:mc="http://schemas.openxmlformats.org/markup-compatibility/2006" xmlns:a14="http://schemas.microsoft.com/office/drawing/2010/main">
+        <mc:Choice Requires="a14">
           <p:sp>
             <p:nvSpPr>
               <p:cNvPr id="121" name="文本框 120">
@@ -9582,7 +9508,7 @@
             </p:txBody>
           </p:sp>
         </mc:Choice>
-        <mc:Fallback>
+        <mc:Fallback xmlns="">
           <p:sp>
             <p:nvSpPr>
               <p:cNvPr id="121" name="文本框 120">
@@ -9627,8 +9553,8 @@
           </p:sp>
         </mc:Fallback>
       </mc:AlternateContent>
-      <mc:AlternateContent xmlns:mc="http://schemas.openxmlformats.org/markup-compatibility/2006">
-        <mc:Choice xmlns:a14="http://schemas.microsoft.com/office/drawing/2010/main" Requires="a14">
+      <mc:AlternateContent xmlns:mc="http://schemas.openxmlformats.org/markup-compatibility/2006" xmlns:a14="http://schemas.microsoft.com/office/drawing/2010/main">
+        <mc:Choice Requires="a14">
           <p:sp>
             <p:nvSpPr>
               <p:cNvPr id="123" name="文本框 122">
@@ -9683,7 +9609,7 @@
             </p:txBody>
           </p:sp>
         </mc:Choice>
-        <mc:Fallback>
+        <mc:Fallback xmlns="">
           <p:sp>
             <p:nvSpPr>
               <p:cNvPr id="123" name="文本框 122">
@@ -9785,7 +9711,7 @@
             </p:nvSpPr>
             <p:spPr>
               <a:xfrm>
-                <a:off x="6695247" y="1566940"/>
+                <a:off x="6159167" y="1718751"/>
                 <a:ext cx="665117" cy="316112"/>
               </a:xfrm>
               <a:prstGeom prst="rect">
@@ -9862,7 +9788,7 @@
             </p:nvSpPr>
             <p:spPr>
               <a:xfrm>
-                <a:off x="6695247" y="1566940"/>
+                <a:off x="6159167" y="1718751"/>
                 <a:ext cx="665117" cy="316112"/>
               </a:xfrm>
               <a:prstGeom prst="rect">
@@ -9906,7 +9832,7 @@
             </p:nvSpPr>
             <p:spPr>
               <a:xfrm>
-                <a:off x="6705958" y="2515906"/>
+                <a:off x="6220560" y="2756657"/>
                 <a:ext cx="600998" cy="299441"/>
               </a:xfrm>
               <a:prstGeom prst="rect">
@@ -9983,7 +9909,7 @@
             </p:nvSpPr>
             <p:spPr>
               <a:xfrm>
-                <a:off x="6705958" y="2515906"/>
+                <a:off x="6220560" y="2756657"/>
                 <a:ext cx="600998" cy="299441"/>
               </a:xfrm>
               <a:prstGeom prst="rect">
@@ -9991,6 +9917,469 @@
               </a:prstGeom>
               <a:blipFill>
                 <a:blip r:embed="rId18"/>
+                <a:stretch>
+                  <a:fillRect/>
+                </a:stretch>
+              </a:blipFill>
+            </p:spPr>
+            <p:txBody>
+              <a:bodyPr/>
+              <a:lstStyle/>
+              <a:p>
+                <a:r>
+                  <a:rPr lang="zh-CN" altLang="en-US">
+                    <a:noFill/>
+                  </a:rPr>
+                  <a:t> </a:t>
+                </a:r>
+              </a:p>
+            </p:txBody>
+          </p:sp>
+        </mc:Fallback>
+      </mc:AlternateContent>
+      <mc:AlternateContent xmlns:mc="http://schemas.openxmlformats.org/markup-compatibility/2006">
+        <mc:Choice xmlns:a14="http://schemas.microsoft.com/office/drawing/2010/main" Requires="a14">
+          <p:sp>
+            <p:nvSpPr>
+              <p:cNvPr id="130" name="文本框 129">
+                <a:extLst>
+                  <a:ext uri="{FF2B5EF4-FFF2-40B4-BE49-F238E27FC236}">
+                    <a16:creationId xmlns:a16="http://schemas.microsoft.com/office/drawing/2014/main" id="{3658A9AF-E780-4346-93D4-1739620BCE07}"/>
+                  </a:ext>
+                </a:extLst>
+              </p:cNvPr>
+              <p:cNvSpPr txBox="1"/>
+              <p:nvPr/>
+            </p:nvSpPr>
+            <p:spPr>
+              <a:xfrm>
+                <a:off x="6750439" y="2138450"/>
+                <a:ext cx="528671" cy="313932"/>
+              </a:xfrm>
+              <a:prstGeom prst="rect">
+                <a:avLst/>
+              </a:prstGeom>
+              <a:noFill/>
+            </p:spPr>
+            <p:txBody>
+              <a:bodyPr wrap="none" rtlCol="0">
+                <a:spAutoFit/>
+              </a:bodyPr>
+              <a:lstStyle/>
+              <a:p>
+                <a:pPr algn="ctr"/>
+                <a14:m>
+                  <m:oMathPara xmlns:m="http://schemas.openxmlformats.org/officeDocument/2006/math">
+                    <m:oMathParaPr>
+                      <m:jc m:val="centerGroup"/>
+                    </m:oMathParaPr>
+                    <m:oMath xmlns:m="http://schemas.openxmlformats.org/officeDocument/2006/math">
+                      <m:sSub>
+                        <m:sSubPr>
+                          <m:ctrlPr>
+                            <a:rPr lang="en-US" altLang="zh-CN" sz="1346" i="1" smtClean="0">
+                              <a:latin typeface="Cambria Math" panose="02040503050406030204" pitchFamily="18" charset="0"/>
+                              <a:ea typeface="宋体" panose="02010600030101010101" pitchFamily="2" charset="-122"/>
+                            </a:rPr>
+                          </m:ctrlPr>
+                        </m:sSubPr>
+                        <m:e>
+                          <m:r>
+                            <a:rPr lang="en-US" altLang="zh-CN" sz="1346" b="0" i="1" smtClean="0">
+                              <a:latin typeface="Cambria Math" panose="02040503050406030204" pitchFamily="18" charset="0"/>
+                              <a:ea typeface="宋体" panose="02010600030101010101" pitchFamily="2" charset="-122"/>
+                            </a:rPr>
+                            <m:t>𝑊</m:t>
+                          </m:r>
+                        </m:e>
+                        <m:sub>
+                          <m:r>
+                            <a:rPr lang="en-US" altLang="zh-CN" sz="1346" b="0" i="1" smtClean="0">
+                              <a:latin typeface="Cambria Math" panose="02040503050406030204" pitchFamily="18" charset="0"/>
+                              <a:ea typeface="宋体" panose="02010600030101010101" pitchFamily="2" charset="-122"/>
+                            </a:rPr>
+                            <m:t>𝑄</m:t>
+                          </m:r>
+                        </m:sub>
+                      </m:sSub>
+                    </m:oMath>
+                  </m:oMathPara>
+                </a14:m>
+                <a:endParaRPr lang="zh-CN" altLang="en-US" sz="1346" dirty="0">
+                  <a:latin typeface="宋体" panose="02010600030101010101" pitchFamily="2" charset="-122"/>
+                  <a:ea typeface="宋体" panose="02010600030101010101" pitchFamily="2" charset="-122"/>
+                </a:endParaRPr>
+              </a:p>
+            </p:txBody>
+          </p:sp>
+        </mc:Choice>
+        <mc:Fallback>
+          <p:sp>
+            <p:nvSpPr>
+              <p:cNvPr id="130" name="文本框 129">
+                <a:extLst>
+                  <a:ext uri="{FF2B5EF4-FFF2-40B4-BE49-F238E27FC236}">
+                    <a16:creationId xmlns:a16="http://schemas.microsoft.com/office/drawing/2014/main" id="{3658A9AF-E780-4346-93D4-1739620BCE07}"/>
+                  </a:ext>
+                </a:extLst>
+              </p:cNvPr>
+              <p:cNvSpPr txBox="1">
+                <a:spLocks noRot="1" noChangeAspect="1" noMove="1" noResize="1" noEditPoints="1" noAdjustHandles="1" noChangeArrowheads="1" noChangeShapeType="1" noTextEdit="1"/>
+              </p:cNvSpPr>
+              <p:nvPr/>
+            </p:nvSpPr>
+            <p:spPr>
+              <a:xfrm>
+                <a:off x="6750439" y="2138450"/>
+                <a:ext cx="528671" cy="313932"/>
+              </a:xfrm>
+              <a:prstGeom prst="rect">
+                <a:avLst/>
+              </a:prstGeom>
+              <a:blipFill>
+                <a:blip r:embed="rId19"/>
+                <a:stretch>
+                  <a:fillRect b="-1961"/>
+                </a:stretch>
+              </a:blipFill>
+            </p:spPr>
+            <p:txBody>
+              <a:bodyPr/>
+              <a:lstStyle/>
+              <a:p>
+                <a:r>
+                  <a:rPr lang="zh-CN" altLang="en-US">
+                    <a:noFill/>
+                  </a:rPr>
+                  <a:t> </a:t>
+                </a:r>
+              </a:p>
+            </p:txBody>
+          </p:sp>
+        </mc:Fallback>
+      </mc:AlternateContent>
+      <mc:AlternateContent xmlns:mc="http://schemas.openxmlformats.org/markup-compatibility/2006">
+        <mc:Choice xmlns:a14="http://schemas.microsoft.com/office/drawing/2010/main" Requires="a14">
+          <p:sp>
+            <p:nvSpPr>
+              <p:cNvPr id="132" name="文本框 131">
+                <a:extLst>
+                  <a:ext uri="{FF2B5EF4-FFF2-40B4-BE49-F238E27FC236}">
+                    <a16:creationId xmlns:a16="http://schemas.microsoft.com/office/drawing/2014/main" id="{A14100B9-BE9C-48B5-B2B7-301F5669DA6F}"/>
+                  </a:ext>
+                </a:extLst>
+              </p:cNvPr>
+              <p:cNvSpPr txBox="1"/>
+              <p:nvPr/>
+            </p:nvSpPr>
+            <p:spPr>
+              <a:xfrm>
+                <a:off x="6752612" y="2626214"/>
+                <a:ext cx="514179" cy="299441"/>
+              </a:xfrm>
+              <a:prstGeom prst="rect">
+                <a:avLst/>
+              </a:prstGeom>
+              <a:noFill/>
+            </p:spPr>
+            <p:txBody>
+              <a:bodyPr wrap="none" rtlCol="0">
+                <a:spAutoFit/>
+              </a:bodyPr>
+              <a:lstStyle/>
+              <a:p>
+                <a:pPr algn="ctr"/>
+                <a14:m>
+                  <m:oMathPara xmlns:m="http://schemas.openxmlformats.org/officeDocument/2006/math">
+                    <m:oMathParaPr>
+                      <m:jc m:val="centerGroup"/>
+                    </m:oMathParaPr>
+                    <m:oMath xmlns:m="http://schemas.openxmlformats.org/officeDocument/2006/math">
+                      <m:sSub>
+                        <m:sSubPr>
+                          <m:ctrlPr>
+                            <a:rPr lang="en-US" altLang="zh-CN" sz="1346" i="1" smtClean="0">
+                              <a:latin typeface="Cambria Math" panose="02040503050406030204" pitchFamily="18" charset="0"/>
+                              <a:ea typeface="宋体" panose="02010600030101010101" pitchFamily="2" charset="-122"/>
+                            </a:rPr>
+                          </m:ctrlPr>
+                        </m:sSubPr>
+                        <m:e>
+                          <m:r>
+                            <a:rPr lang="en-US" altLang="zh-CN" sz="1346" b="0" i="1" smtClean="0">
+                              <a:latin typeface="Cambria Math" panose="02040503050406030204" pitchFamily="18" charset="0"/>
+                              <a:ea typeface="宋体" panose="02010600030101010101" pitchFamily="2" charset="-122"/>
+                            </a:rPr>
+                            <m:t>𝑊</m:t>
+                          </m:r>
+                        </m:e>
+                        <m:sub>
+                          <m:r>
+                            <a:rPr lang="en-US" altLang="zh-CN" sz="1346" b="0" i="1" smtClean="0">
+                              <a:latin typeface="Cambria Math" panose="02040503050406030204" pitchFamily="18" charset="0"/>
+                              <a:ea typeface="宋体" panose="02010600030101010101" pitchFamily="2" charset="-122"/>
+                            </a:rPr>
+                            <m:t>𝐾</m:t>
+                          </m:r>
+                        </m:sub>
+                      </m:sSub>
+                    </m:oMath>
+                  </m:oMathPara>
+                </a14:m>
+                <a:endParaRPr lang="zh-CN" altLang="en-US" sz="1346" dirty="0">
+                  <a:latin typeface="宋体" panose="02010600030101010101" pitchFamily="2" charset="-122"/>
+                  <a:ea typeface="宋体" panose="02010600030101010101" pitchFamily="2" charset="-122"/>
+                </a:endParaRPr>
+              </a:p>
+            </p:txBody>
+          </p:sp>
+        </mc:Choice>
+        <mc:Fallback>
+          <p:sp>
+            <p:nvSpPr>
+              <p:cNvPr id="132" name="文本框 131">
+                <a:extLst>
+                  <a:ext uri="{FF2B5EF4-FFF2-40B4-BE49-F238E27FC236}">
+                    <a16:creationId xmlns:a16="http://schemas.microsoft.com/office/drawing/2014/main" id="{A14100B9-BE9C-48B5-B2B7-301F5669DA6F}"/>
+                  </a:ext>
+                </a:extLst>
+              </p:cNvPr>
+              <p:cNvSpPr txBox="1">
+                <a:spLocks noRot="1" noChangeAspect="1" noMove="1" noResize="1" noEditPoints="1" noAdjustHandles="1" noChangeArrowheads="1" noChangeShapeType="1" noTextEdit="1"/>
+              </p:cNvSpPr>
+              <p:nvPr/>
+            </p:nvSpPr>
+            <p:spPr>
+              <a:xfrm>
+                <a:off x="6752612" y="2626214"/>
+                <a:ext cx="514179" cy="299441"/>
+              </a:xfrm>
+              <a:prstGeom prst="rect">
+                <a:avLst/>
+              </a:prstGeom>
+              <a:blipFill>
+                <a:blip r:embed="rId20"/>
+                <a:stretch>
+                  <a:fillRect/>
+                </a:stretch>
+              </a:blipFill>
+            </p:spPr>
+            <p:txBody>
+              <a:bodyPr/>
+              <a:lstStyle/>
+              <a:p>
+                <a:r>
+                  <a:rPr lang="zh-CN" altLang="en-US">
+                    <a:noFill/>
+                  </a:rPr>
+                  <a:t> </a:t>
+                </a:r>
+              </a:p>
+            </p:txBody>
+          </p:sp>
+        </mc:Fallback>
+      </mc:AlternateContent>
+      <mc:AlternateContent xmlns:mc="http://schemas.openxmlformats.org/markup-compatibility/2006">
+        <mc:Choice xmlns:a14="http://schemas.microsoft.com/office/drawing/2010/main" Requires="a14">
+          <p:sp>
+            <p:nvSpPr>
+              <p:cNvPr id="134" name="文本框 133">
+                <a:extLst>
+                  <a:ext uri="{FF2B5EF4-FFF2-40B4-BE49-F238E27FC236}">
+                    <a16:creationId xmlns:a16="http://schemas.microsoft.com/office/drawing/2014/main" id="{49E7229A-11BE-4BBA-9C70-3865D4D0427D}"/>
+                  </a:ext>
+                </a:extLst>
+              </p:cNvPr>
+              <p:cNvSpPr txBox="1"/>
+              <p:nvPr/>
+            </p:nvSpPr>
+            <p:spPr>
+              <a:xfrm>
+                <a:off x="7076672" y="3086122"/>
+                <a:ext cx="504562" cy="299441"/>
+              </a:xfrm>
+              <a:prstGeom prst="rect">
+                <a:avLst/>
+              </a:prstGeom>
+              <a:noFill/>
+            </p:spPr>
+            <p:txBody>
+              <a:bodyPr wrap="none" rtlCol="0">
+                <a:spAutoFit/>
+              </a:bodyPr>
+              <a:lstStyle/>
+              <a:p>
+                <a:pPr algn="ctr"/>
+                <a14:m>
+                  <m:oMathPara xmlns:m="http://schemas.openxmlformats.org/officeDocument/2006/math">
+                    <m:oMathParaPr>
+                      <m:jc m:val="centerGroup"/>
+                    </m:oMathParaPr>
+                    <m:oMath xmlns:m="http://schemas.openxmlformats.org/officeDocument/2006/math">
+                      <m:sSub>
+                        <m:sSubPr>
+                          <m:ctrlPr>
+                            <a:rPr lang="en-US" altLang="zh-CN" sz="1346" i="1" smtClean="0">
+                              <a:latin typeface="Cambria Math" panose="02040503050406030204" pitchFamily="18" charset="0"/>
+                              <a:ea typeface="宋体" panose="02010600030101010101" pitchFamily="2" charset="-122"/>
+                            </a:rPr>
+                          </m:ctrlPr>
+                        </m:sSubPr>
+                        <m:e>
+                          <m:r>
+                            <a:rPr lang="en-US" altLang="zh-CN" sz="1346" b="0" i="1" smtClean="0">
+                              <a:latin typeface="Cambria Math" panose="02040503050406030204" pitchFamily="18" charset="0"/>
+                              <a:ea typeface="宋体" panose="02010600030101010101" pitchFamily="2" charset="-122"/>
+                            </a:rPr>
+                            <m:t>𝑊</m:t>
+                          </m:r>
+                        </m:e>
+                        <m:sub>
+                          <m:r>
+                            <a:rPr lang="en-US" altLang="zh-CN" sz="1346" b="0" i="1" smtClean="0">
+                              <a:latin typeface="Cambria Math" panose="02040503050406030204" pitchFamily="18" charset="0"/>
+                              <a:ea typeface="宋体" panose="02010600030101010101" pitchFamily="2" charset="-122"/>
+                            </a:rPr>
+                            <m:t>𝑉</m:t>
+                          </m:r>
+                        </m:sub>
+                      </m:sSub>
+                    </m:oMath>
+                  </m:oMathPara>
+                </a14:m>
+                <a:endParaRPr lang="zh-CN" altLang="en-US" sz="1346" dirty="0">
+                  <a:latin typeface="宋体" panose="02010600030101010101" pitchFamily="2" charset="-122"/>
+                  <a:ea typeface="宋体" panose="02010600030101010101" pitchFamily="2" charset="-122"/>
+                </a:endParaRPr>
+              </a:p>
+            </p:txBody>
+          </p:sp>
+        </mc:Choice>
+        <mc:Fallback>
+          <p:sp>
+            <p:nvSpPr>
+              <p:cNvPr id="134" name="文本框 133">
+                <a:extLst>
+                  <a:ext uri="{FF2B5EF4-FFF2-40B4-BE49-F238E27FC236}">
+                    <a16:creationId xmlns:a16="http://schemas.microsoft.com/office/drawing/2014/main" id="{49E7229A-11BE-4BBA-9C70-3865D4D0427D}"/>
+                  </a:ext>
+                </a:extLst>
+              </p:cNvPr>
+              <p:cNvSpPr txBox="1">
+                <a:spLocks noRot="1" noChangeAspect="1" noMove="1" noResize="1" noEditPoints="1" noAdjustHandles="1" noChangeArrowheads="1" noChangeShapeType="1" noTextEdit="1"/>
+              </p:cNvSpPr>
+              <p:nvPr/>
+            </p:nvSpPr>
+            <p:spPr>
+              <a:xfrm>
+                <a:off x="7076672" y="3086122"/>
+                <a:ext cx="504562" cy="299441"/>
+              </a:xfrm>
+              <a:prstGeom prst="rect">
+                <a:avLst/>
+              </a:prstGeom>
+              <a:blipFill>
+                <a:blip r:embed="rId21"/>
+                <a:stretch>
+                  <a:fillRect/>
+                </a:stretch>
+              </a:blipFill>
+            </p:spPr>
+            <p:txBody>
+              <a:bodyPr/>
+              <a:lstStyle/>
+              <a:p>
+                <a:r>
+                  <a:rPr lang="zh-CN" altLang="en-US">
+                    <a:noFill/>
+                  </a:rPr>
+                  <a:t> </a:t>
+                </a:r>
+              </a:p>
+            </p:txBody>
+          </p:sp>
+        </mc:Fallback>
+      </mc:AlternateContent>
+      <mc:AlternateContent xmlns:mc="http://schemas.openxmlformats.org/markup-compatibility/2006">
+        <mc:Choice xmlns:a14="http://schemas.microsoft.com/office/drawing/2010/main" Requires="a14">
+          <p:sp>
+            <p:nvSpPr>
+              <p:cNvPr id="137" name="文本框 136">
+                <a:extLst>
+                  <a:ext uri="{FF2B5EF4-FFF2-40B4-BE49-F238E27FC236}">
+                    <a16:creationId xmlns:a16="http://schemas.microsoft.com/office/drawing/2014/main" id="{F4C60A0F-DFA5-4052-A43E-490AC470381F}"/>
+                  </a:ext>
+                </a:extLst>
+              </p:cNvPr>
+              <p:cNvSpPr txBox="1"/>
+              <p:nvPr/>
+            </p:nvSpPr>
+            <p:spPr>
+              <a:xfrm>
+                <a:off x="6659126" y="1585712"/>
+                <a:ext cx="621709" cy="299441"/>
+              </a:xfrm>
+              <a:prstGeom prst="rect">
+                <a:avLst/>
+              </a:prstGeom>
+              <a:noFill/>
+            </p:spPr>
+            <p:txBody>
+              <a:bodyPr wrap="none" rtlCol="0">
+                <a:spAutoFit/>
+              </a:bodyPr>
+              <a:lstStyle/>
+              <a:p>
+                <a:pPr algn="ctr"/>
+                <a14:m>
+                  <m:oMathPara xmlns:m="http://schemas.openxmlformats.org/officeDocument/2006/math">
+                    <m:oMathParaPr>
+                      <m:jc m:val="centerGroup"/>
+                    </m:oMathParaPr>
+                    <m:oMath xmlns:m="http://schemas.openxmlformats.org/officeDocument/2006/math">
+                      <m:r>
+                        <a:rPr lang="en-US" altLang="zh-CN" sz="1346" b="0" i="1" smtClean="0">
+                          <a:latin typeface="Cambria Math" panose="02040503050406030204" pitchFamily="18" charset="0"/>
+                          <a:ea typeface="宋体" panose="02010600030101010101" pitchFamily="2" charset="-122"/>
+                        </a:rPr>
+                        <m:t>𝑀𝐿𝑃</m:t>
+                      </m:r>
+                    </m:oMath>
+                  </m:oMathPara>
+                </a14:m>
+                <a:endParaRPr lang="zh-CN" altLang="en-US" sz="1346" dirty="0">
+                  <a:latin typeface="宋体" panose="02010600030101010101" pitchFamily="2" charset="-122"/>
+                  <a:ea typeface="宋体" panose="02010600030101010101" pitchFamily="2" charset="-122"/>
+                </a:endParaRPr>
+              </a:p>
+            </p:txBody>
+          </p:sp>
+        </mc:Choice>
+        <mc:Fallback>
+          <p:sp>
+            <p:nvSpPr>
+              <p:cNvPr id="137" name="文本框 136">
+                <a:extLst>
+                  <a:ext uri="{FF2B5EF4-FFF2-40B4-BE49-F238E27FC236}">
+                    <a16:creationId xmlns:a16="http://schemas.microsoft.com/office/drawing/2014/main" id="{F4C60A0F-DFA5-4052-A43E-490AC470381F}"/>
+                  </a:ext>
+                </a:extLst>
+              </p:cNvPr>
+              <p:cNvSpPr txBox="1">
+                <a:spLocks noRot="1" noChangeAspect="1" noMove="1" noResize="1" noEditPoints="1" noAdjustHandles="1" noChangeArrowheads="1" noChangeShapeType="1" noTextEdit="1"/>
+              </p:cNvSpPr>
+              <p:nvPr/>
+            </p:nvSpPr>
+            <p:spPr>
+              <a:xfrm>
+                <a:off x="6659126" y="1585712"/>
+                <a:ext cx="621709" cy="299441"/>
+              </a:xfrm>
+              <a:prstGeom prst="rect">
+                <a:avLst/>
+              </a:prstGeom>
+              <a:blipFill>
+                <a:blip r:embed="rId22"/>
                 <a:stretch>
                   <a:fillRect/>
                 </a:stretch>
